--- a/media/exports/reports/2026-09/cash-payroll.pptx
+++ b/media/exports/reports/2026-09/cash-payroll.pptx
@@ -633,457 +633,457 @@
                   <c:v>88000</c:v>
                 </c:pt>
                 <c:pt idx="1">
-                  <c:v>112411</c:v>
+                  <c:v>88000</c:v>
                 </c:pt>
                 <c:pt idx="2">
-                  <c:v>124362</c:v>
+                  <c:v>132701</c:v>
                 </c:pt>
                 <c:pt idx="3">
-                  <c:v>139672</c:v>
+                  <c:v>151542</c:v>
                 </c:pt>
                 <c:pt idx="4">
-                  <c:v>140540</c:v>
+                  <c:v>152596</c:v>
                 </c:pt>
                 <c:pt idx="5">
-                  <c:v>134936</c:v>
+                  <c:v>155460</c:v>
                 </c:pt>
                 <c:pt idx="6">
-                  <c:v>135317</c:v>
+                  <c:v>155919</c:v>
                 </c:pt>
                 <c:pt idx="7">
-                  <c:v>147735</c:v>
+                  <c:v>155919</c:v>
                 </c:pt>
                 <c:pt idx="8">
-                  <c:v>157535</c:v>
+                  <c:v>155919</c:v>
                 </c:pt>
                 <c:pt idx="9">
-                  <c:v>159179</c:v>
+                  <c:v>185269</c:v>
                 </c:pt>
                 <c:pt idx="10">
-                  <c:v>160618</c:v>
+                  <c:v>187001</c:v>
                 </c:pt>
                 <c:pt idx="11">
-                  <c:v>160999</c:v>
+                  <c:v>187001</c:v>
                 </c:pt>
                 <c:pt idx="12">
-                  <c:v>161655</c:v>
+                  <c:v>188241</c:v>
                 </c:pt>
                 <c:pt idx="13">
-                  <c:v>162638</c:v>
+                  <c:v>189402</c:v>
                 </c:pt>
                 <c:pt idx="14">
-                  <c:v>163871</c:v>
+                  <c:v>189402</c:v>
                 </c:pt>
                 <c:pt idx="15">
-                  <c:v>164213</c:v>
+                  <c:v>189402</c:v>
                 </c:pt>
                 <c:pt idx="16">
-                  <c:v>117019</c:v>
+                  <c:v>139498</c:v>
                 </c:pt>
                 <c:pt idx="17">
-                  <c:v>118547</c:v>
+                  <c:v>141308</c:v>
                 </c:pt>
                 <c:pt idx="18">
-                  <c:v>119573</c:v>
+                  <c:v>142555</c:v>
                 </c:pt>
                 <c:pt idx="19">
-                  <c:v>82483</c:v>
+                  <c:v>106665</c:v>
                 </c:pt>
                 <c:pt idx="20">
-                  <c:v>82483</c:v>
+                  <c:v>106665</c:v>
                 </c:pt>
                 <c:pt idx="21">
-                  <c:v>84321</c:v>
+                  <c:v>106665</c:v>
                 </c:pt>
                 <c:pt idx="22">
-                  <c:v>85990</c:v>
+                  <c:v>106665</c:v>
                 </c:pt>
                 <c:pt idx="23">
-                  <c:v>87510</c:v>
+                  <c:v>112651</c:v>
                 </c:pt>
                 <c:pt idx="24">
-                  <c:v>88034</c:v>
+                  <c:v>113267</c:v>
                 </c:pt>
                 <c:pt idx="25">
-                  <c:v>105372</c:v>
+                  <c:v>134548</c:v>
                 </c:pt>
                 <c:pt idx="26">
-                  <c:v>106041</c:v>
+                  <c:v>135343</c:v>
                 </c:pt>
                 <c:pt idx="27">
-                  <c:v>102428</c:v>
+                  <c:v>132018</c:v>
                 </c:pt>
                 <c:pt idx="28">
-                  <c:v>104108</c:v>
+                  <c:v>132018</c:v>
                 </c:pt>
                 <c:pt idx="29">
-                  <c:v>104818</c:v>
+                  <c:v>132018</c:v>
                 </c:pt>
                 <c:pt idx="30">
-                  <c:v>65263</c:v>
+                  <c:v>92859</c:v>
                 </c:pt>
                 <c:pt idx="31">
-                  <c:v>66142</c:v>
+                  <c:v>93905</c:v>
                 </c:pt>
                 <c:pt idx="32">
-                  <c:v>67515</c:v>
+                  <c:v>95545</c:v>
                 </c:pt>
                 <c:pt idx="33">
-                  <c:v>40350</c:v>
+                  <c:v>72037</c:v>
                 </c:pt>
                 <c:pt idx="34">
-                  <c:v>42612</c:v>
+                  <c:v>74714</c:v>
                 </c:pt>
                 <c:pt idx="35">
-                  <c:v>42612</c:v>
+                  <c:v>74714</c:v>
                 </c:pt>
                 <c:pt idx="36">
-                  <c:v>82025</c:v>
+                  <c:v>74714</c:v>
                 </c:pt>
                 <c:pt idx="37">
-                  <c:v>103175</c:v>
+                  <c:v>149281</c:v>
                 </c:pt>
                 <c:pt idx="38">
-                  <c:v>109490</c:v>
+                  <c:v>156941</c:v>
                 </c:pt>
                 <c:pt idx="39">
-                  <c:v>126731</c:v>
+                  <c:v>178156</c:v>
                 </c:pt>
                 <c:pt idx="40">
-                  <c:v>115467</c:v>
+                  <c:v>165845</c:v>
                 </c:pt>
                 <c:pt idx="41">
-                  <c:v>116582</c:v>
+                  <c:v>167171</c:v>
                 </c:pt>
                 <c:pt idx="42">
-                  <c:v>117829</c:v>
+                  <c:v>167171</c:v>
                 </c:pt>
                 <c:pt idx="43">
-                  <c:v>140107</c:v>
+                  <c:v>167171</c:v>
                 </c:pt>
                 <c:pt idx="44">
-                  <c:v>140278</c:v>
+                  <c:v>196325</c:v>
                 </c:pt>
                 <c:pt idx="45">
-                  <c:v>94943</c:v>
+                  <c:v>146575</c:v>
                 </c:pt>
                 <c:pt idx="46">
-                  <c:v>95278</c:v>
+                  <c:v>146973</c:v>
                 </c:pt>
                 <c:pt idx="47">
-                  <c:v>58577</c:v>
+                  <c:v>111700</c:v>
                 </c:pt>
                 <c:pt idx="48">
-                  <c:v>58904</c:v>
+                  <c:v>112080</c:v>
                 </c:pt>
                 <c:pt idx="49">
-                  <c:v>59824</c:v>
+                  <c:v>112080</c:v>
                 </c:pt>
                 <c:pt idx="50">
-                  <c:v>60146</c:v>
+                  <c:v>112080</c:v>
                 </c:pt>
                 <c:pt idx="51">
-                  <c:v>60986</c:v>
+                  <c:v>114578</c:v>
                 </c:pt>
                 <c:pt idx="52">
-                  <c:v>62378</c:v>
+                  <c:v>116248</c:v>
                 </c:pt>
                 <c:pt idx="53">
-                  <c:v>63229</c:v>
+                  <c:v>117244</c:v>
                 </c:pt>
                 <c:pt idx="54">
-                  <c:v>64620</c:v>
+                  <c:v>118893</c:v>
                 </c:pt>
                 <c:pt idx="55">
-                  <c:v>64908</c:v>
+                  <c:v>119230</c:v>
                 </c:pt>
                 <c:pt idx="56">
-                  <c:v>67402</c:v>
+                  <c:v>119230</c:v>
                 </c:pt>
                 <c:pt idx="57">
-                  <c:v>81904</c:v>
+                  <c:v>119230</c:v>
                 </c:pt>
                 <c:pt idx="58">
-                  <c:v>78389</c:v>
+                  <c:v>136867</c:v>
                 </c:pt>
                 <c:pt idx="59">
-                  <c:v>107291</c:v>
+                  <c:v>172419</c:v>
                 </c:pt>
                 <c:pt idx="60">
-                  <c:v>59746</c:v>
+                  <c:v>120228</c:v>
                 </c:pt>
                 <c:pt idx="61">
-                  <c:v>60746</c:v>
+                  <c:v>132057</c:v>
                 </c:pt>
                 <c:pt idx="62">
-                  <c:v>60746</c:v>
+                  <c:v>133401</c:v>
                 </c:pt>
                 <c:pt idx="63">
-                  <c:v>62037</c:v>
+                  <c:v>133401</c:v>
                 </c:pt>
                 <c:pt idx="64">
-                  <c:v>110127</c:v>
+                  <c:v>133401</c:v>
                 </c:pt>
                 <c:pt idx="65">
-                  <c:v>110127</c:v>
+                  <c:v>133401</c:v>
                 </c:pt>
                 <c:pt idx="66">
-                  <c:v>110127</c:v>
+                  <c:v>194170</c:v>
                 </c:pt>
                 <c:pt idx="67">
-                  <c:v>120381</c:v>
+                  <c:v>202904</c:v>
                 </c:pt>
                 <c:pt idx="68">
-                  <c:v>121672</c:v>
+                  <c:v>202904</c:v>
                 </c:pt>
                 <c:pt idx="69">
-                  <c:v>141563</c:v>
+                  <c:v>225784</c:v>
                 </c:pt>
                 <c:pt idx="70">
-                  <c:v>142853</c:v>
+                  <c:v>225784</c:v>
                 </c:pt>
                 <c:pt idx="71">
-                  <c:v>144144</c:v>
+                  <c:v>225784</c:v>
                 </c:pt>
                 <c:pt idx="72">
-                  <c:v>144144</c:v>
+                  <c:v>230478</c:v>
                 </c:pt>
                 <c:pt idx="73">
-                  <c:v>144144</c:v>
+                  <c:v>232043</c:v>
                 </c:pt>
                 <c:pt idx="74">
-                  <c:v>145435</c:v>
+                  <c:v>232043</c:v>
                 </c:pt>
                 <c:pt idx="75">
-                  <c:v>53846</c:v>
+                  <c:v>134844</c:v>
                 </c:pt>
                 <c:pt idx="76">
-                  <c:v>55136</c:v>
+                  <c:v>136409</c:v>
                 </c:pt>
                 <c:pt idx="77">
-                  <c:v>56427</c:v>
+                  <c:v>136409</c:v>
                 </c:pt>
                 <c:pt idx="78">
-                  <c:v>70618</c:v>
+                  <c:v>136409</c:v>
                 </c:pt>
                 <c:pt idx="79">
-                  <c:v>70618</c:v>
+                  <c:v>156943</c:v>
                 </c:pt>
                 <c:pt idx="80">
-                  <c:v>70618</c:v>
+                  <c:v>158508</c:v>
                 </c:pt>
                 <c:pt idx="81">
-                  <c:v>71909</c:v>
+                  <c:v>158508</c:v>
                 </c:pt>
                 <c:pt idx="82">
-                  <c:v>73199</c:v>
+                  <c:v>158508</c:v>
                 </c:pt>
                 <c:pt idx="83">
-                  <c:v>84290</c:v>
+                  <c:v>172172</c:v>
                 </c:pt>
                 <c:pt idx="84">
-                  <c:v>85581</c:v>
+                  <c:v>172172</c:v>
                 </c:pt>
                 <c:pt idx="85">
-                  <c:v>86872</c:v>
+                  <c:v>172172</c:v>
                 </c:pt>
                 <c:pt idx="86">
-                  <c:v>86872</c:v>
+                  <c:v>176866</c:v>
                 </c:pt>
                 <c:pt idx="87">
-                  <c:v>86872</c:v>
+                  <c:v>178431</c:v>
                 </c:pt>
                 <c:pt idx="88">
-                  <c:v>76145</c:v>
+                  <c:v>87178</c:v>
                 </c:pt>
                 <c:pt idx="89">
-                  <c:v>54836</c:v>
+                  <c:v>69267</c:v>
                 </c:pt>
                 <c:pt idx="90">
-                  <c:v>56127</c:v>
+                  <c:v>70832</c:v>
                 </c:pt>
                 <c:pt idx="91">
-                  <c:v>103492</c:v>
+                  <c:v>70832</c:v>
                 </c:pt>
                 <c:pt idx="92">
-                  <c:v>110357</c:v>
+                  <c:v>70832</c:v>
                 </c:pt>
                 <c:pt idx="93">
-                  <c:v>54197</c:v>
+                  <c:v>77691</c:v>
                 </c:pt>
                 <c:pt idx="94">
-                  <c:v>54197</c:v>
+                  <c:v>79256</c:v>
                 </c:pt>
                 <c:pt idx="95">
-                  <c:v>61062</c:v>
+                  <c:v>79256</c:v>
                 </c:pt>
                 <c:pt idx="96">
-                  <c:v>67927</c:v>
+                  <c:v>86230</c:v>
                 </c:pt>
                 <c:pt idx="97">
-                  <c:v>74792</c:v>
+                  <c:v>94768</c:v>
                 </c:pt>
                 <c:pt idx="98">
-                  <c:v>81657</c:v>
+                  <c:v>94768</c:v>
                 </c:pt>
                 <c:pt idx="99">
-                  <c:v>88522</c:v>
+                  <c:v>94768</c:v>
                 </c:pt>
                 <c:pt idx="100">
-                  <c:v>88522</c:v>
+                  <c:v>113410</c:v>
                 </c:pt>
                 <c:pt idx="101">
-                  <c:v>88522</c:v>
+                  <c:v>114975</c:v>
                 </c:pt>
                 <c:pt idx="102">
-                  <c:v>95387</c:v>
+                  <c:v>121949</c:v>
                 </c:pt>
                 <c:pt idx="103">
-                  <c:v>64452</c:v>
+                  <c:v>92312</c:v>
                 </c:pt>
                 <c:pt idx="104">
-                  <c:v>71317</c:v>
+                  <c:v>100851</c:v>
                 </c:pt>
                 <c:pt idx="105">
-                  <c:v>78182</c:v>
+                  <c:v>100851</c:v>
                 </c:pt>
                 <c:pt idx="106">
-                  <c:v>85047</c:v>
+                  <c:v>100851</c:v>
                 </c:pt>
                 <c:pt idx="107">
-                  <c:v>29967</c:v>
+                  <c:v>58905</c:v>
                 </c:pt>
                 <c:pt idx="108">
-                  <c:v>29967</c:v>
+                  <c:v>60469</c:v>
                 </c:pt>
                 <c:pt idx="109">
-                  <c:v>36832</c:v>
+                  <c:v>67443</c:v>
                 </c:pt>
                 <c:pt idx="110">
-                  <c:v>43697</c:v>
+                  <c:v>74417</c:v>
                 </c:pt>
                 <c:pt idx="111">
-                  <c:v>50562</c:v>
+                  <c:v>82956</c:v>
                 </c:pt>
                 <c:pt idx="112">
-                  <c:v>57427</c:v>
+                  <c:v>82956</c:v>
                 </c:pt>
                 <c:pt idx="113">
-                  <c:v>64292</c:v>
+                  <c:v>82956</c:v>
                 </c:pt>
                 <c:pt idx="114">
-                  <c:v>64292</c:v>
+                  <c:v>101598</c:v>
                 </c:pt>
                 <c:pt idx="115">
-                  <c:v>64292</c:v>
+                  <c:v>103163</c:v>
                 </c:pt>
                 <c:pt idx="116">
-                  <c:v>71157</c:v>
+                  <c:v>110137</c:v>
                 </c:pt>
                 <c:pt idx="117">
-                  <c:v>40222</c:v>
+                  <c:v>80500</c:v>
                 </c:pt>
                 <c:pt idx="118">
-                  <c:v>47087</c:v>
+                  <c:v>89039</c:v>
                 </c:pt>
                 <c:pt idx="119">
-                  <c:v>53952</c:v>
+                  <c:v>89039</c:v>
                 </c:pt>
                 <c:pt idx="120">
-                  <c:v>60817</c:v>
+                  <c:v>89039</c:v>
                 </c:pt>
                 <c:pt idx="121">
-                  <c:v>-343</c:v>
+                  <c:v>41013</c:v>
                 </c:pt>
                 <c:pt idx="122">
-                  <c:v>40157</c:v>
+                  <c:v>92462</c:v>
                 </c:pt>
                 <c:pt idx="123">
-                  <c:v>47022</c:v>
+                  <c:v>99436</c:v>
                 </c:pt>
                 <c:pt idx="124">
-                  <c:v>53886</c:v>
+                  <c:v>106410</c:v>
                 </c:pt>
                 <c:pt idx="125">
-                  <c:v>60751</c:v>
+                  <c:v>114949</c:v>
                 </c:pt>
                 <c:pt idx="126">
-                  <c:v>67616</c:v>
+                  <c:v>114949</c:v>
                 </c:pt>
                 <c:pt idx="127">
-                  <c:v>74481</c:v>
+                  <c:v>114949</c:v>
                 </c:pt>
                 <c:pt idx="128">
-                  <c:v>74481</c:v>
+                  <c:v>133591</c:v>
                 </c:pt>
                 <c:pt idx="129">
-                  <c:v>74481</c:v>
+                  <c:v>135156</c:v>
                 </c:pt>
                 <c:pt idx="130">
-                  <c:v>81346</c:v>
+                  <c:v>142130</c:v>
                 </c:pt>
                 <c:pt idx="131">
-                  <c:v>50411</c:v>
+                  <c:v>112493</c:v>
                 </c:pt>
                 <c:pt idx="132">
-                  <c:v>57276</c:v>
+                  <c:v>121032</c:v>
                 </c:pt>
                 <c:pt idx="133">
-                  <c:v>64141</c:v>
+                  <c:v>121032</c:v>
                 </c:pt>
                 <c:pt idx="134">
-                  <c:v>71006</c:v>
+                  <c:v>121032</c:v>
                 </c:pt>
                 <c:pt idx="135">
-                  <c:v>71006</c:v>
+                  <c:v>139674</c:v>
                 </c:pt>
                 <c:pt idx="136">
-                  <c:v>15926</c:v>
+                  <c:v>80650</c:v>
                 </c:pt>
                 <c:pt idx="137">
-                  <c:v>22791</c:v>
+                  <c:v>87624</c:v>
                 </c:pt>
                 <c:pt idx="138">
-                  <c:v>29656</c:v>
+                  <c:v>94598</c:v>
                 </c:pt>
                 <c:pt idx="139">
-                  <c:v>36521</c:v>
+                  <c:v>103137</c:v>
                 </c:pt>
                 <c:pt idx="140">
-                  <c:v>43386</c:v>
+                  <c:v>103137</c:v>
                 </c:pt>
                 <c:pt idx="141">
-                  <c:v>50251</c:v>
+                  <c:v>103137</c:v>
                 </c:pt>
                 <c:pt idx="142">
-                  <c:v>50251</c:v>
+                  <c:v>121779</c:v>
                 </c:pt>
                 <c:pt idx="143">
-                  <c:v>50251</c:v>
+                  <c:v>123344</c:v>
                 </c:pt>
                 <c:pt idx="144">
-                  <c:v>57116</c:v>
+                  <c:v>130318</c:v>
                 </c:pt>
                 <c:pt idx="145">
-                  <c:v>26181</c:v>
+                  <c:v>100681</c:v>
                 </c:pt>
                 <c:pt idx="146">
-                  <c:v>33046</c:v>
+                  <c:v>100681</c:v>
                 </c:pt>
                 <c:pt idx="147">
-                  <c:v>39911</c:v>
+                  <c:v>100681</c:v>
                 </c:pt>
                 <c:pt idx="148">
-                  <c:v>46776</c:v>
+                  <c:v>100681</c:v>
                 </c:pt>
                 <c:pt idx="149">
-                  <c:v>41776</c:v>
+                  <c:v>100681</c:v>
                 </c:pt>
                 <c:pt idx="150">
-                  <c:v>41776</c:v>
+                  <c:v>122862</c:v>
                 </c:pt>
                 <c:pt idx="151">
-                  <c:v>48641</c:v>
+                  <c:v>129836</c:v>
                 </c:pt>
               </c:numCache>
             </c:numRef>
@@ -1132,8 +1132,8 @@
         <c:axId val="-2100718248"/>
         <c:scaling>
           <c:orientation val="minMax"/>
-          <c:max val="200000.0"/>
-          <c:min val="-50000.0"/>
+          <c:max val="250000.0"/>
+          <c:min val="0.0"/>
         </c:scaling>
         <c:delete val="0"/>
         <c:axPos val="l"/>
@@ -1254,7 +1254,7 @@
             <c:idx val="3"/>
             <c:spPr>
               <a:solidFill>
-                <a:srgbClr val="0E9F6E"/>
+                <a:srgbClr val="B42318"/>
               </a:solidFill>
             </c:spPr>
           </c:dPt>
@@ -1266,24 +1266,35 @@
               </a:solidFill>
             </c:spPr>
           </c:dPt>
+          <c:dPt>
+            <c:idx val="5"/>
+            <c:spPr>
+              <a:solidFill>
+                <a:srgbClr val="0E9F6E"/>
+              </a:solidFill>
+            </c:spPr>
+          </c:dPt>
           <c:cat>
             <c:strRef>
-              <c:f>Sheet1!$A$2:$A$6</c:f>
+              <c:f>Sheet1!$A$2:$A$7</c:f>
               <c:strCache>
-                <c:ptCount val="5"/>
+                <c:ptCount val="6"/>
                 <c:pt idx="0">
-                  <c:v>Wages (3 pay runs)</c:v>
+                  <c:v>Pay runs (3)</c:v>
                 </c:pt>
                 <c:pt idx="1">
+                  <c:v>BAS (GST and PAYG)</c:v>
+                </c:pt>
+                <c:pt idx="2">
                   <c:v>Suppliers and overheads</c:v>
                 </c:pt>
-                <c:pt idx="2">
-                  <c:v>Tax, interest and equipment finance</c:v>
-                </c:pt>
                 <c:pt idx="3">
+                  <c:v>Interest and equipment finance</c:v>
+                </c:pt>
+                <c:pt idx="4">
                   <c:v>New work collected</c:v>
                 </c:pt>
-                <c:pt idx="4">
+                <c:pt idx="5">
                   <c:v>Unpaid invoices collected</c:v>
                 </c:pt>
               </c:strCache>
@@ -1291,24 +1302,27 @@
           </c:cat>
           <c:val>
             <c:numRef>
-              <c:f>Sheet1!$B$2:$B$6</c:f>
+              <c:f>Sheet1!$B$2:$B$7</c:f>
               <c:numCache>
                 <c:formatCode>$#,##0;[Red]($#,##0);"-"</c:formatCode>
-                <c:ptCount val="5"/>
+                <c:ptCount val="6"/>
                 <c:pt idx="0">
-                  <c:v>-113400</c:v>
+                  <c:v>-109833</c:v>
                 </c:pt>
                 <c:pt idx="1">
-                  <c:v>-55080</c:v>
+                  <c:v>-86253</c:v>
                 </c:pt>
                 <c:pt idx="2">
-                  <c:v>-12017</c:v>
+                  <c:v>-60588</c:v>
                 </c:pt>
                 <c:pt idx="3">
-                  <c:v>73180</c:v>
+                  <c:v>-5000</c:v>
                 </c:pt>
                 <c:pt idx="4">
-                  <c:v>151063</c:v>
+                  <c:v>26600</c:v>
+                </c:pt>
+                <c:pt idx="5">
+                  <c:v>185678</c:v>
                 </c:pt>
               </c:numCache>
             </c:numRef>
@@ -1372,8 +1386,8 @@
       <c:valAx>
         <c:axId val="-2113994440"/>
         <c:scaling>
-          <c:max val="173722.44999999998"/>
-          <c:min val="-130409.99999999999"/>
+          <c:max val="213529.69999999998"/>
+          <c:min val="-126307.95"/>
         </c:scaling>
         <c:delete/>
         <c:axPos val="b"/>
@@ -1799,7 +1813,7 @@
           <a:lstStyle/>
           <a:p>
             <a:r>
-              <a:t>Will cash cover payroll next month?. Sample Electrical &amp; Air Pty Ltd. Period: September 2026. A 13-week cash forecast from 30 September: cash at bank, plus what customers owe on their usual payment dates and new work at its recent rate, less pay runs, supplier bills, tax and finance on their due dates. Every day opens its workings.</a:t>
+              <a:t>Will cash cover payroll next month?. Sample Electrical &amp; Air Pty Ltd. Period: September 2026. A 13-week cash forecast from 30 September: cash at bank, plus what customers owe on their usual payment dates and new work at its recent rate, less pay runs, supplier bills, the BAS and finance on their due dates. Every day opens its workings.</a:t>
             </a:r>
           </a:p>
         </p:txBody>
@@ -1869,7 +1883,7 @@
           <a:lstStyle/>
           <a:p>
             <a:r>
-              <a:t>Will cash cover payroll next month?. Cash at bank, 30 Sep: $59,746; Wages to pay in October: $113,400; After the tightest pay run, 15 Oct: $53,846; Lowest point, next 13 weeks: ($343). Cash at bank was $59,746 at 30 September. October has 3 pay runs ($113,400). The tightest is 15 October: $53,846 left after paying wages, $16,046 more than a pay run in reserve. The lowest point in the 13 weeks is ($343) on 30 November. 18 invoices ($8,963) are already past the customer's usual payment date; the forecast assumes they arrive within a week. Without them, 15 October would be $44,883. October is one of the two months a year with three pay runs: $37,800 more wages than a usual month. The PAYG instalment ($7,017) is due 28 October.</a:t>
+              <a:t>Will cash cover payroll next month?. Cash at bank, 30 Sep: $120,228; Paid to employees in October: $109,833; After the tightest pay run, 29 Oct: $69,267; Lowest point, next 13 weeks: $41,013. Cash at bank was $120,228 at 30 September. October has 3 pay runs ($109,833). The tightest is 29 October: $69,267 left after paying wages, $32,656 more than a pay run in reserve. The lowest point in the 13 weeks is $41,013 on 30 November. 15 invoices ($8,734) are already past the customer's usual payment date; the forecast assumes they arrive within a week. Without them, the lowest point would be $32,279. October is one of the two months a year with three pay runs: $36,611 more than a usual month. The July to September BAS ($86,253) is due 28 October: GST $32,817, PAYG withheld $47,754 and the PAYG instalment $5,682.</a:t>
             </a:r>
           </a:p>
         </p:txBody>
@@ -1939,7 +1953,7 @@
           <a:lstStyle/>
           <a:p>
             <a:r>
-              <a:t>How this forecast has done so far. For 5 October it said $110,127; the bank says $47,244, $62,883 less. $64,300 of it is 7 invoices expected by then and not yet paid, the largest Wacol warehouse switchboard ($46,800).</a:t>
+              <a:t>October: where the cash comes from and goes (forecast). Money in, and money out in brackets. Includes GST.</a:t>
             </a:r>
           </a:p>
         </p:txBody>
@@ -2009,7 +2023,7 @@
           <a:lstStyle/>
           <a:p>
             <a:r>
-              <a:t>October: where the cash comes from and goes (forecast). Money in, and money out in brackets.</a:t>
+              <a:t>13 weeks, week by week. Lowest in the week: amber below one pay run ($36,611), red below zero. Amounts include GST.</a:t>
             </a:r>
           </a:p>
         </p:txBody>
@@ -2079,7 +2093,7 @@
           <a:lstStyle/>
           <a:p>
             <a:r>
-              <a:t>13 weeks, week by week. Lowest in the week: amber below one pay run ($37,800), red below zero.</a:t>
+              <a:t>Invoices past the customer's usual payment date ($8,734): the forecast assumes these arrive within a week (1 of 2)</a:t>
             </a:r>
           </a:p>
         </p:txBody>
@@ -2149,7 +2163,7 @@
           <a:lstStyle/>
           <a:p>
             <a:r>
-              <a:t>Invoices past the customer's usual payment date ($8,963)</a:t>
+              <a:t>Invoices past the customer's usual payment date ($8,734): the forecast assumes these arrive within a week (2 of 2)</a:t>
             </a:r>
           </a:p>
         </p:txBody>
@@ -5399,7 +5413,7 @@
                 </a:solidFill>
                 <a:latin typeface="Roboto"/>
               </a:rPr>
-              <a:t>Period: September 2026. A 13-week cash forecast from 30 September: cash at bank, plus what customers owe on their usual payment dates and new work at its recent rate, less pay runs, supplier bills, tax and finance on their due dates. Every day opens its workings.</a:t>
+              <a:t>Period: September 2026. A 13-week cash forecast from 30 September: cash at bank, plus what customers owe on their usual payment dates and new work at its recent rate, less pay runs, supplier bills, the BAS and finance on their due dates. Every day opens its workings.</a:t>
             </a:r>
           </a:p>
         </p:txBody>
@@ -5564,7 +5578,7 @@
                 </a:solidFill>
                 <a:latin typeface="Roboto"/>
               </a:rPr>
-              <a:t>Data retrieved 2pm, Tue 6 Oct 2026 · Generated 8 Oct 2026, 9:35am · Sample data · Made with Python (python-pptx)</a:t>
+              <a:t>Data retrieved 2pm, Tue 6 Oct 2026 · Generated 9 Oct 2026, 8:41am · Sample data · Made with Python (python-pptx)</a:t>
             </a:r>
           </a:p>
         </p:txBody>
@@ -5910,7 +5924,7 @@
                 </a:solidFill>
                 <a:latin typeface="Roboto"/>
               </a:rPr>
-              <a:t>$59,746</a:t>
+              <a:t>$120,228</a:t>
             </a:r>
           </a:p>
         </p:txBody>
@@ -6037,7 +6051,7 @@
                 </a:solidFill>
                 <a:latin typeface="Roboto"/>
               </a:rPr>
-              <a:t>Wages to pay in October</a:t>
+              <a:t>Paid to employees in October</a:t>
             </a:r>
           </a:p>
         </p:txBody>
@@ -6076,7 +6090,7 @@
                 </a:solidFill>
                 <a:latin typeface="Roboto"/>
               </a:rPr>
-              <a:t>$113,400</a:t>
+              <a:t>$109,833</a:t>
             </a:r>
           </a:p>
         </p:txBody>
@@ -6115,7 +6129,7 @@
                 </a:solidFill>
                 <a:latin typeface="Roboto"/>
               </a:rPr>
-              <a:t>3 fortnightly pay runs</a:t>
+              <a:t>3 fortnightly pay runs, net pay + super</a:t>
             </a:r>
           </a:p>
         </p:txBody>
@@ -6203,7 +6217,7 @@
                 </a:solidFill>
                 <a:latin typeface="Roboto"/>
               </a:rPr>
-              <a:t>After the tightest pay run, 15 Oct</a:t>
+              <a:t>After the tightest pay run, 29 Oct</a:t>
             </a:r>
           </a:p>
         </p:txBody>
@@ -6242,7 +6256,7 @@
                 </a:solidFill>
                 <a:latin typeface="Roboto"/>
               </a:rPr>
-              <a:t>$53,846</a:t>
+              <a:t>$69,267</a:t>
             </a:r>
           </a:p>
         </p:txBody>
@@ -6281,7 +6295,7 @@
                 </a:solidFill>
                 <a:latin typeface="Roboto"/>
               </a:rPr>
-              <a:t>buffer: one pay run, $37,800</a:t>
+              <a:t>buffer: one pay run, $36,611</a:t>
             </a:r>
           </a:p>
         </p:txBody>
@@ -6404,11 +6418,11 @@
             <a:r>
               <a:rPr sz="2200" b="1">
                 <a:solidFill>
-                  <a:srgbClr val="B42318"/>
+                  <a:srgbClr val="2F7A5D"/>
                 </a:solidFill>
                 <a:latin typeface="Roboto"/>
               </a:rPr>
-              <a:t>($343)</a:t>
+              <a:t>$41,013</a:t>
             </a:r>
           </a:p>
         </p:txBody>
@@ -6462,7 +6476,7 @@
         </p:nvGraphicFramePr>
         <p:xfrm>
           <a:off x="457200" y="2604516"/>
-          <a:ext cx="11277295" cy="2119884"/>
+          <a:ext cx="11277295" cy="1921764"/>
         </p:xfrm>
         <a:graphic>
           <a:graphicData uri="http://schemas.openxmlformats.org/drawingml/2006/chart">
@@ -6478,7 +6492,7 @@
         </p:nvCxnSpPr>
         <p:spPr>
           <a:xfrm>
-            <a:off x="1697702" y="3810814"/>
+            <a:off x="1697702" y="4012870"/>
             <a:ext cx="9698474" cy="0"/>
           </a:xfrm>
           <a:prstGeom prst="line">
@@ -6514,7 +6528,7 @@
         </p:nvSpPr>
         <p:spPr>
           <a:xfrm>
-            <a:off x="5909776" y="3536494"/>
+            <a:off x="5909776" y="3738550"/>
             <a:ext cx="5486400" cy="237744"/>
           </a:xfrm>
           <a:prstGeom prst="rect">
@@ -6540,7 +6554,7 @@
                 </a:solidFill>
                 <a:latin typeface="Roboto"/>
               </a:rPr>
-              <a:t>Buffer: one pay run, $37,800</a:t>
+              <a:t>Buffer: one pay run, $36,611</a:t>
             </a:r>
           </a:p>
         </p:txBody>
@@ -6553,8 +6567,8 @@
         </p:nvSpPr>
         <p:spPr>
           <a:xfrm>
-            <a:off x="457200" y="4815840"/>
-            <a:ext cx="5501487" cy="1493520"/>
+            <a:off x="457200" y="4617720"/>
+            <a:ext cx="5501487" cy="1691640"/>
           </a:xfrm>
           <a:prstGeom prst="rect">
             <a:avLst/>
@@ -6602,7 +6616,7 @@
         </p:nvSpPr>
         <p:spPr>
           <a:xfrm>
-            <a:off x="594360" y="4870704"/>
+            <a:off x="594360" y="4672584"/>
             <a:ext cx="5227167" cy="274320"/>
           </a:xfrm>
           <a:prstGeom prst="rect">
@@ -6641,8 +6655,8 @@
         </p:nvSpPr>
         <p:spPr>
           <a:xfrm>
-            <a:off x="594360" y="5145024"/>
-            <a:ext cx="5227167" cy="1127760"/>
+            <a:off x="594360" y="4946904"/>
+            <a:ext cx="5227167" cy="1325880"/>
           </a:xfrm>
           <a:prstGeom prst="rect">
             <a:avLst/>
@@ -6667,7 +6681,7 @@
                 </a:solidFill>
                 <a:latin typeface="Roboto"/>
               </a:rPr>
-              <a:t>Cash at bank was $59,746 at 30 September. October has 3 pay runs ($113,400). The tightest is 15 October: $53,846 left after paying wages, $16,046 more than a pay run in reserve. The lowest point in the 13 weeks is ($343) on 30 November.</a:t>
+              <a:t>Cash at bank was $120,228 at 30 September. October has 3 pay runs ($109,833). The tightest is 29 October: $69,267 left after paying wages, $32,656 more than a pay run in reserve. The lowest point in the 13 weeks is $41,013 on 30 November.</a:t>
             </a:r>
           </a:p>
         </p:txBody>
@@ -6680,8 +6694,8 @@
         </p:nvSpPr>
         <p:spPr>
           <a:xfrm>
-            <a:off x="6233007" y="4815840"/>
-            <a:ext cx="5501487" cy="1493520"/>
+            <a:off x="6233007" y="4617720"/>
+            <a:ext cx="5501487" cy="1691640"/>
           </a:xfrm>
           <a:prstGeom prst="rect">
             <a:avLst/>
@@ -6729,7 +6743,7 @@
         </p:nvSpPr>
         <p:spPr>
           <a:xfrm>
-            <a:off x="6370167" y="4870704"/>
+            <a:off x="6370167" y="4672584"/>
             <a:ext cx="5227167" cy="274320"/>
           </a:xfrm>
           <a:prstGeom prst="rect">
@@ -6768,8 +6782,8 @@
         </p:nvSpPr>
         <p:spPr>
           <a:xfrm>
-            <a:off x="6370167" y="5145024"/>
-            <a:ext cx="5227167" cy="1127760"/>
+            <a:off x="6370167" y="4946904"/>
+            <a:ext cx="5227167" cy="1325880"/>
           </a:xfrm>
           <a:prstGeom prst="rect">
             <a:avLst/>
@@ -6794,7 +6808,7 @@
                 </a:solidFill>
                 <a:latin typeface="Roboto"/>
               </a:rPr>
-              <a:t>18 invoices ($8,963) are already past the customer's usual payment date; the forecast assumes they arrive within a week. Without them, 15 October would be $44,883. October is one of the two months a year with three pay runs: $37,800 more wages than a usual month. The PAYG instalment ($7,017) is due 28 October.</a:t>
+              <a:t>15 invoices ($8,734) are already past the customer's usual payment date; the forecast assumes they arrive within a week. Without them, the lowest point would be $32,279. October is one of the two months a year with three pay runs: $36,611 more than a usual month. The July to September BAS ($86,253) is due 28 October: GST $32,817, PAYG withheld $47,754 and the PAYG instalment $5,682.</a:t>
             </a:r>
           </a:p>
         </p:txBody>
@@ -6872,7 +6886,7 @@
                 </a:solidFill>
                 <a:latin typeface="Roboto"/>
               </a:rPr>
-              <a:t>Data retrieved 2pm, Tue 6 Oct 2026 · Generated 8 Oct 2026, 9:35am · Sample data · Made with Python (python-pptx)</a:t>
+              <a:t>Data retrieved 2pm, Tue 6 Oct 2026 · Generated 9 Oct 2026, 8:41am · Sample data · Made with Python (python-pptx)</a:t>
             </a:r>
           </a:p>
         </p:txBody>
@@ -6966,7 +6980,7 @@
                 </a:solidFill>
                 <a:latin typeface="Roboto"/>
               </a:rPr>
-              <a:t>How this forecast has done so far</a:t>
+              <a:t>October: where the cash comes from and goes (forecast)</a:t>
             </a:r>
           </a:p>
         </p:txBody>
@@ -7066,7 +7080,7 @@
         <p:spPr>
           <a:xfrm>
             <a:off x="457200" y="914400"/>
-            <a:ext cx="11277295" cy="454152"/>
+            <a:ext cx="11277295" cy="263652"/>
           </a:xfrm>
           <a:prstGeom prst="rect">
             <a:avLst/>
@@ -7091,314 +7105,26 @@
                 </a:solidFill>
                 <a:latin typeface="Roboto"/>
               </a:rPr>
-              <a:t>For 5 October it said $110,127; the bank says $47,244, $62,883 less. $64,300 of it is 7 invoices expected by then and not yet paid, the largest Wacol warehouse switchboard ($46,800).</a:t>
+              <a:t>Money in, and money out in brackets. Includes GST.</a:t>
             </a:r>
           </a:p>
         </p:txBody>
       </p:sp>
       <p:graphicFrame>
         <p:nvGraphicFramePr>
-          <p:cNvPr id="6" name="Table 5"/>
+          <p:cNvPr id="6" name="Chart 5"/>
           <p:cNvGraphicFramePr>
             <a:graphicFrameLocks noGrp="1"/>
           </p:cNvGraphicFramePr>
           <p:nvPr/>
         </p:nvGraphicFramePr>
         <p:xfrm>
-          <a:off x="457200" y="1469136"/>
-          <a:ext cx="11277294" cy="1554480"/>
+          <a:off x="457200" y="1278636"/>
+          <a:ext cx="11277295" cy="4527804"/>
         </p:xfrm>
         <a:graphic>
-          <a:graphicData uri="http://schemas.openxmlformats.org/drawingml/2006/table">
-            <a:tbl>
-              <a:tblPr bandRow="1">
-                <a:tableStyleId>{5C22544A-7EE6-4342-B048-85BDC9FD1C3A}</a:tableStyleId>
-              </a:tblPr>
-              <a:tblGrid>
-                <a:gridCol w="3608734"/>
-                <a:gridCol w="7668560"/>
-              </a:tblGrid>
-              <a:tr h="310896">
-                <a:tc>
-                  <a:txBody>
-                    <a:bodyPr/>
-                    <a:lstStyle/>
-                    <a:p>
-                      <a:pPr algn="l">
-                        <a:defRPr>
-                          <a:latin typeface="Roboto"/>
-                        </a:defRPr>
-                      </a:pPr>
-                      <a:r>
-                        <a:rPr sz="1050">
-                          <a:solidFill>
-                            <a:srgbClr val="25342A"/>
-                          </a:solidFill>
-                          <a:latin typeface="Roboto"/>
-                        </a:rPr>
-                        <a:t>Forecast for 5 October</a:t>
-                      </a:r>
-                    </a:p>
-                  </a:txBody>
-                  <a:tcPr>
-                    <a:solidFill>
-                      <a:srgbClr val="FFFFFF"/>
-                    </a:solidFill>
-                  </a:tcPr>
-                </a:tc>
-                <a:tc>
-                  <a:txBody>
-                    <a:bodyPr/>
-                    <a:lstStyle/>
-                    <a:p>
-                      <a:pPr algn="r">
-                        <a:defRPr>
-                          <a:latin typeface="Roboto"/>
-                        </a:defRPr>
-                      </a:pPr>
-                      <a:r>
-                        <a:rPr sz="1050">
-                          <a:solidFill>
-                            <a:srgbClr val="25342A"/>
-                          </a:solidFill>
-                          <a:latin typeface="Roboto"/>
-                        </a:rPr>
-                        <a:t>$110,127</a:t>
-                      </a:r>
-                    </a:p>
-                  </a:txBody>
-                  <a:tcPr>
-                    <a:solidFill>
-                      <a:srgbClr val="FFFFFF"/>
-                    </a:solidFill>
-                  </a:tcPr>
-                </a:tc>
-              </a:tr>
-              <a:tr h="310896">
-                <a:tc>
-                  <a:txBody>
-                    <a:bodyPr/>
-                    <a:lstStyle/>
-                    <a:p>
-                      <a:pPr algn="l">
-                        <a:defRPr>
-                          <a:latin typeface="Roboto"/>
-                        </a:defRPr>
-                      </a:pPr>
-                      <a:r>
-                        <a:rPr sz="1050">
-                          <a:solidFill>
-                            <a:srgbClr val="25342A"/>
-                          </a:solidFill>
-                          <a:latin typeface="Roboto"/>
-                        </a:rPr>
-                        <a:t>Actual, 5 October</a:t>
-                      </a:r>
-                    </a:p>
-                  </a:txBody>
-                  <a:tcPr>
-                    <a:solidFill>
-                      <a:srgbClr val="F7FAF7"/>
-                    </a:solidFill>
-                  </a:tcPr>
-                </a:tc>
-                <a:tc>
-                  <a:txBody>
-                    <a:bodyPr/>
-                    <a:lstStyle/>
-                    <a:p>
-                      <a:pPr algn="r">
-                        <a:defRPr>
-                          <a:latin typeface="Roboto"/>
-                        </a:defRPr>
-                      </a:pPr>
-                      <a:r>
-                        <a:rPr sz="1050">
-                          <a:solidFill>
-                            <a:srgbClr val="25342A"/>
-                          </a:solidFill>
-                          <a:latin typeface="Roboto"/>
-                        </a:rPr>
-                        <a:t>$47,244</a:t>
-                      </a:r>
-                    </a:p>
-                  </a:txBody>
-                  <a:tcPr>
-                    <a:solidFill>
-                      <a:srgbClr val="F7FAF7"/>
-                    </a:solidFill>
-                  </a:tcPr>
-                </a:tc>
-              </a:tr>
-              <a:tr h="310896">
-                <a:tc>
-                  <a:txBody>
-                    <a:bodyPr/>
-                    <a:lstStyle/>
-                    <a:p>
-                      <a:pPr algn="l">
-                        <a:defRPr>
-                          <a:latin typeface="Roboto"/>
-                        </a:defRPr>
-                      </a:pPr>
-                      <a:r>
-                        <a:rPr sz="1050">
-                          <a:solidFill>
-                            <a:srgbClr val="25342A"/>
-                          </a:solidFill>
-                          <a:latin typeface="Roboto"/>
-                        </a:rPr>
-                        <a:t>Actual − forecast</a:t>
-                      </a:r>
-                    </a:p>
-                  </a:txBody>
-                  <a:tcPr>
-                    <a:solidFill>
-                      <a:srgbClr val="FFFFFF"/>
-                    </a:solidFill>
-                  </a:tcPr>
-                </a:tc>
-                <a:tc>
-                  <a:txBody>
-                    <a:bodyPr/>
-                    <a:lstStyle/>
-                    <a:p>
-                      <a:pPr algn="r">
-                        <a:defRPr>
-                          <a:latin typeface="Roboto"/>
-                        </a:defRPr>
-                      </a:pPr>
-                      <a:r>
-                        <a:rPr sz="1050">
-                          <a:solidFill>
-                            <a:srgbClr val="B42318"/>
-                          </a:solidFill>
-                          <a:latin typeface="Roboto"/>
-                        </a:rPr>
-                        <a:t>($62,883)</a:t>
-                      </a:r>
-                    </a:p>
-                  </a:txBody>
-                  <a:tcPr>
-                    <a:solidFill>
-                      <a:srgbClr val="FFFFFF"/>
-                    </a:solidFill>
-                  </a:tcPr>
-                </a:tc>
-              </a:tr>
-              <a:tr h="310896">
-                <a:tc>
-                  <a:txBody>
-                    <a:bodyPr/>
-                    <a:lstStyle/>
-                    <a:p>
-                      <a:pPr algn="l">
-                        <a:defRPr>
-                          <a:latin typeface="Roboto"/>
-                        </a:defRPr>
-                      </a:pPr>
-                      <a:r>
-                        <a:rPr sz="1050">
-                          <a:solidFill>
-                            <a:srgbClr val="25342A"/>
-                          </a:solidFill>
-                          <a:latin typeface="Roboto"/>
-                        </a:rPr>
-                        <a:t>Of which: invoices expected by then, not yet paid</a:t>
-                      </a:r>
-                    </a:p>
-                  </a:txBody>
-                  <a:tcPr>
-                    <a:solidFill>
-                      <a:srgbClr val="F7FAF7"/>
-                    </a:solidFill>
-                  </a:tcPr>
-                </a:tc>
-                <a:tc>
-                  <a:txBody>
-                    <a:bodyPr/>
-                    <a:lstStyle/>
-                    <a:p>
-                      <a:pPr algn="r">
-                        <a:defRPr>
-                          <a:latin typeface="Roboto"/>
-                        </a:defRPr>
-                      </a:pPr>
-                      <a:r>
-                        <a:rPr sz="1050">
-                          <a:solidFill>
-                            <a:srgbClr val="B42318"/>
-                          </a:solidFill>
-                          <a:latin typeface="Roboto"/>
-                        </a:rPr>
-                        <a:t>($64,300)</a:t>
-                      </a:r>
-                    </a:p>
-                  </a:txBody>
-                  <a:tcPr>
-                    <a:solidFill>
-                      <a:srgbClr val="F7FAF7"/>
-                    </a:solidFill>
-                  </a:tcPr>
-                </a:tc>
-              </a:tr>
-              <a:tr h="310896">
-                <a:tc>
-                  <a:txBody>
-                    <a:bodyPr/>
-                    <a:lstStyle/>
-                    <a:p>
-                      <a:pPr algn="l">
-                        <a:defRPr>
-                          <a:latin typeface="Roboto"/>
-                        </a:defRPr>
-                      </a:pPr>
-                      <a:r>
-                        <a:rPr sz="1050">
-                          <a:solidFill>
-                            <a:srgbClr val="25342A"/>
-                          </a:solidFill>
-                          <a:latin typeface="Roboto"/>
-                        </a:rPr>
-                        <a:t>Everything else (timing of other money in and out)</a:t>
-                      </a:r>
-                    </a:p>
-                  </a:txBody>
-                  <a:tcPr>
-                    <a:solidFill>
-                      <a:srgbClr val="FFFFFF"/>
-                    </a:solidFill>
-                  </a:tcPr>
-                </a:tc>
-                <a:tc>
-                  <a:txBody>
-                    <a:bodyPr/>
-                    <a:lstStyle/>
-                    <a:p>
-                      <a:pPr algn="r">
-                        <a:defRPr>
-                          <a:latin typeface="Roboto"/>
-                        </a:defRPr>
-                      </a:pPr>
-                      <a:r>
-                        <a:rPr sz="1050">
-                          <a:solidFill>
-                            <a:srgbClr val="25342A"/>
-                          </a:solidFill>
-                          <a:latin typeface="Roboto"/>
-                        </a:rPr>
-                        <a:t>$1,417</a:t>
-                      </a:r>
-                    </a:p>
-                  </a:txBody>
-                  <a:tcPr>
-                    <a:solidFill>
-                      <a:srgbClr val="FFFFFF"/>
-                    </a:solidFill>
-                  </a:tcPr>
-                </a:tc>
-              </a:tr>
-            </a:tbl>
+          <a:graphicData uri="http://schemas.openxmlformats.org/drawingml/2006/chart">
+            <c:chart xmlns:c="http://schemas.openxmlformats.org/drawingml/2006/chart" r:id="rId3"/>
           </a:graphicData>
         </a:graphic>
       </p:graphicFrame>
@@ -7475,7 +7201,7 @@
                 </a:solidFill>
                 <a:latin typeface="Roboto"/>
               </a:rPr>
-              <a:t>Data retrieved 2pm, Tue 6 Oct 2026 · Generated 8 Oct 2026, 9:35am · Sample data · Made with Python (python-pptx)</a:t>
+              <a:t>Data retrieved 2pm, Tue 6 Oct 2026 · Generated 9 Oct 2026, 8:41am · Sample data · Made with Python (python-pptx)</a:t>
             </a:r>
           </a:p>
         </p:txBody>
@@ -7569,7 +7295,7 @@
                 </a:solidFill>
                 <a:latin typeface="Roboto"/>
               </a:rPr>
-              <a:t>October: where the cash comes from and goes (forecast)</a:t>
+              <a:t>13 weeks, week by week</a:t>
             </a:r>
           </a:p>
         </p:txBody>
@@ -7694,14 +7420,14 @@
                 </a:solidFill>
                 <a:latin typeface="Roboto"/>
               </a:rPr>
-              <a:t>Money in, and money out in brackets.</a:t>
+              <a:t>Lowest in the week: amber below one pay run ($36,611), red below zero. Amounts include GST.</a:t>
             </a:r>
           </a:p>
         </p:txBody>
       </p:sp>
       <p:graphicFrame>
         <p:nvGraphicFramePr>
-          <p:cNvPr id="6" name="Chart 5"/>
+          <p:cNvPr id="6" name="Table 5"/>
           <p:cNvGraphicFramePr>
             <a:graphicFrameLocks noGrp="1"/>
           </p:cNvGraphicFramePr>
@@ -7709,11 +7435,3835 @@
         </p:nvGraphicFramePr>
         <p:xfrm>
           <a:off x="457200" y="1278636"/>
-          <a:ext cx="11277295" cy="4527804"/>
+          <a:ext cx="11277295" cy="4352544"/>
         </p:xfrm>
         <a:graphic>
-          <a:graphicData uri="http://schemas.openxmlformats.org/drawingml/2006/chart">
-            <c:chart xmlns:c="http://schemas.openxmlformats.org/drawingml/2006/chart" r:id="rId3"/>
+          <a:graphicData uri="http://schemas.openxmlformats.org/drawingml/2006/table">
+            <a:tbl>
+              <a:tblPr firstRow="1" bandRow="1">
+                <a:tableStyleId>{5C22544A-7EE6-4342-B048-85BDC9FD1C3A}</a:tableStyleId>
+              </a:tblPr>
+              <a:tblGrid>
+                <a:gridCol w="1127729"/>
+                <a:gridCol w="1127729"/>
+                <a:gridCol w="1127729"/>
+                <a:gridCol w="1127729"/>
+                <a:gridCol w="1127729"/>
+                <a:gridCol w="1127729"/>
+                <a:gridCol w="1127729"/>
+                <a:gridCol w="1127729"/>
+                <a:gridCol w="1127729"/>
+                <a:gridCol w="1127734"/>
+              </a:tblGrid>
+              <a:tr h="310896">
+                <a:tc>
+                  <a:txBody>
+                    <a:bodyPr/>
+                    <a:lstStyle/>
+                    <a:p>
+                      <a:pPr algn="l">
+                        <a:defRPr>
+                          <a:latin typeface="Roboto"/>
+                        </a:defRPr>
+                      </a:pPr>
+                      <a:r>
+                        <a:rPr sz="1100" b="1">
+                          <a:solidFill>
+                            <a:srgbClr val="FFFFFF"/>
+                          </a:solidFill>
+                          <a:latin typeface="Roboto"/>
+                        </a:rPr>
+                        <a:t>Week ending</a:t>
+                      </a:r>
+                    </a:p>
+                  </a:txBody>
+                  <a:tcPr>
+                    <a:solidFill>
+                      <a:srgbClr val="2F7A5D"/>
+                    </a:solidFill>
+                  </a:tcPr>
+                </a:tc>
+                <a:tc>
+                  <a:txBody>
+                    <a:bodyPr/>
+                    <a:lstStyle/>
+                    <a:p>
+                      <a:pPr algn="r">
+                        <a:defRPr>
+                          <a:latin typeface="Roboto"/>
+                        </a:defRPr>
+                      </a:pPr>
+                      <a:r>
+                        <a:rPr sz="1100" b="1">
+                          <a:solidFill>
+                            <a:srgbClr val="FFFFFF"/>
+                          </a:solidFill>
+                          <a:latin typeface="Roboto"/>
+                        </a:rPr>
+                        <a:t>Cash at start</a:t>
+                      </a:r>
+                    </a:p>
+                  </a:txBody>
+                  <a:tcPr>
+                    <a:solidFill>
+                      <a:srgbClr val="2F7A5D"/>
+                    </a:solidFill>
+                  </a:tcPr>
+                </a:tc>
+                <a:tc>
+                  <a:txBody>
+                    <a:bodyPr/>
+                    <a:lstStyle/>
+                    <a:p>
+                      <a:pPr algn="r">
+                        <a:defRPr>
+                          <a:latin typeface="Roboto"/>
+                        </a:defRPr>
+                      </a:pPr>
+                      <a:r>
+                        <a:rPr sz="1100" b="1">
+                          <a:solidFill>
+                            <a:srgbClr val="FFFFFF"/>
+                          </a:solidFill>
+                          <a:latin typeface="Roboto"/>
+                        </a:rPr>
+                        <a:t>Unpaid invoices collected</a:t>
+                      </a:r>
+                    </a:p>
+                  </a:txBody>
+                  <a:tcPr>
+                    <a:solidFill>
+                      <a:srgbClr val="2F7A5D"/>
+                    </a:solidFill>
+                  </a:tcPr>
+                </a:tc>
+                <a:tc>
+                  <a:txBody>
+                    <a:bodyPr/>
+                    <a:lstStyle/>
+                    <a:p>
+                      <a:pPr algn="r">
+                        <a:defRPr>
+                          <a:latin typeface="Roboto"/>
+                        </a:defRPr>
+                      </a:pPr>
+                      <a:r>
+                        <a:rPr sz="1100" b="1">
+                          <a:solidFill>
+                            <a:srgbClr val="FFFFFF"/>
+                          </a:solidFill>
+                          <a:latin typeface="Roboto"/>
+                        </a:rPr>
+                        <a:t>New work collected</a:t>
+                      </a:r>
+                    </a:p>
+                  </a:txBody>
+                  <a:tcPr>
+                    <a:solidFill>
+                      <a:srgbClr val="2F7A5D"/>
+                    </a:solidFill>
+                  </a:tcPr>
+                </a:tc>
+                <a:tc>
+                  <a:txBody>
+                    <a:bodyPr/>
+                    <a:lstStyle/>
+                    <a:p>
+                      <a:pPr algn="r">
+                        <a:defRPr>
+                          <a:latin typeface="Roboto"/>
+                        </a:defRPr>
+                      </a:pPr>
+                      <a:r>
+                        <a:rPr sz="1100" b="1">
+                          <a:solidFill>
+                            <a:srgbClr val="FFFFFF"/>
+                          </a:solidFill>
+                          <a:latin typeface="Roboto"/>
+                        </a:rPr>
+                        <a:t>Pay runs</a:t>
+                      </a:r>
+                    </a:p>
+                  </a:txBody>
+                  <a:tcPr>
+                    <a:solidFill>
+                      <a:srgbClr val="2F7A5D"/>
+                    </a:solidFill>
+                  </a:tcPr>
+                </a:tc>
+                <a:tc>
+                  <a:txBody>
+                    <a:bodyPr/>
+                    <a:lstStyle/>
+                    <a:p>
+                      <a:pPr algn="r">
+                        <a:defRPr>
+                          <a:latin typeface="Roboto"/>
+                        </a:defRPr>
+                      </a:pPr>
+                      <a:r>
+                        <a:rPr sz="1100" b="1">
+                          <a:solidFill>
+                            <a:srgbClr val="FFFFFF"/>
+                          </a:solidFill>
+                          <a:latin typeface="Roboto"/>
+                        </a:rPr>
+                        <a:t>Suppliers and overheads</a:t>
+                      </a:r>
+                    </a:p>
+                  </a:txBody>
+                  <a:tcPr>
+                    <a:solidFill>
+                      <a:srgbClr val="2F7A5D"/>
+                    </a:solidFill>
+                  </a:tcPr>
+                </a:tc>
+                <a:tc>
+                  <a:txBody>
+                    <a:bodyPr/>
+                    <a:lstStyle/>
+                    <a:p>
+                      <a:pPr algn="r">
+                        <a:defRPr>
+                          <a:latin typeface="Roboto"/>
+                        </a:defRPr>
+                      </a:pPr>
+                      <a:r>
+                        <a:rPr sz="1100" b="1">
+                          <a:solidFill>
+                            <a:srgbClr val="FFFFFF"/>
+                          </a:solidFill>
+                          <a:latin typeface="Roboto"/>
+                        </a:rPr>
+                        <a:t>BAS (GST and PAYG)</a:t>
+                      </a:r>
+                    </a:p>
+                  </a:txBody>
+                  <a:tcPr>
+                    <a:solidFill>
+                      <a:srgbClr val="2F7A5D"/>
+                    </a:solidFill>
+                  </a:tcPr>
+                </a:tc>
+                <a:tc>
+                  <a:txBody>
+                    <a:bodyPr/>
+                    <a:lstStyle/>
+                    <a:p>
+                      <a:pPr algn="r">
+                        <a:defRPr>
+                          <a:latin typeface="Roboto"/>
+                        </a:defRPr>
+                      </a:pPr>
+                      <a:r>
+                        <a:rPr sz="1100" b="1">
+                          <a:solidFill>
+                            <a:srgbClr val="FFFFFF"/>
+                          </a:solidFill>
+                          <a:latin typeface="Roboto"/>
+                        </a:rPr>
+                        <a:t>Interest and finance</a:t>
+                      </a:r>
+                    </a:p>
+                  </a:txBody>
+                  <a:tcPr>
+                    <a:solidFill>
+                      <a:srgbClr val="2F7A5D"/>
+                    </a:solidFill>
+                  </a:tcPr>
+                </a:tc>
+                <a:tc>
+                  <a:txBody>
+                    <a:bodyPr/>
+                    <a:lstStyle/>
+                    <a:p>
+                      <a:pPr algn="r">
+                        <a:defRPr>
+                          <a:latin typeface="Roboto"/>
+                        </a:defRPr>
+                      </a:pPr>
+                      <a:r>
+                        <a:rPr sz="1100" b="1">
+                          <a:solidFill>
+                            <a:srgbClr val="FFFFFF"/>
+                          </a:solidFill>
+                          <a:latin typeface="Roboto"/>
+                        </a:rPr>
+                        <a:t>Cash at end</a:t>
+                      </a:r>
+                    </a:p>
+                  </a:txBody>
+                  <a:tcPr>
+                    <a:solidFill>
+                      <a:srgbClr val="2F7A5D"/>
+                    </a:solidFill>
+                  </a:tcPr>
+                </a:tc>
+                <a:tc>
+                  <a:txBody>
+                    <a:bodyPr/>
+                    <a:lstStyle/>
+                    <a:p>
+                      <a:pPr algn="r">
+                        <a:defRPr>
+                          <a:latin typeface="Roboto"/>
+                        </a:defRPr>
+                      </a:pPr>
+                      <a:r>
+                        <a:rPr sz="1100" b="1">
+                          <a:solidFill>
+                            <a:srgbClr val="FFFFFF"/>
+                          </a:solidFill>
+                          <a:latin typeface="Roboto"/>
+                        </a:rPr>
+                        <a:t>Lowest in the week</a:t>
+                      </a:r>
+                    </a:p>
+                  </a:txBody>
+                  <a:tcPr>
+                    <a:solidFill>
+                      <a:srgbClr val="2F7A5D"/>
+                    </a:solidFill>
+                  </a:tcPr>
+                </a:tc>
+              </a:tr>
+              <a:tr h="310896">
+                <a:tc>
+                  <a:txBody>
+                    <a:bodyPr/>
+                    <a:lstStyle/>
+                    <a:p>
+                      <a:pPr algn="l">
+                        <a:defRPr>
+                          <a:latin typeface="Roboto"/>
+                        </a:defRPr>
+                      </a:pPr>
+                      <a:r>
+                        <a:rPr sz="1050">
+                          <a:solidFill>
+                            <a:srgbClr val="25342A"/>
+                          </a:solidFill>
+                          <a:latin typeface="Roboto"/>
+                        </a:rPr>
+                        <a:t>7 Oct</a:t>
+                      </a:r>
+                    </a:p>
+                  </a:txBody>
+                  <a:tcPr>
+                    <a:solidFill>
+                      <a:srgbClr val="FFFFFF"/>
+                    </a:solidFill>
+                  </a:tcPr>
+                </a:tc>
+                <a:tc>
+                  <a:txBody>
+                    <a:bodyPr/>
+                    <a:lstStyle/>
+                    <a:p>
+                      <a:pPr algn="r">
+                        <a:defRPr>
+                          <a:latin typeface="Roboto"/>
+                        </a:defRPr>
+                      </a:pPr>
+                      <a:r>
+                        <a:rPr sz="1050">
+                          <a:solidFill>
+                            <a:srgbClr val="25342A"/>
+                          </a:solidFill>
+                          <a:latin typeface="Roboto"/>
+                        </a:rPr>
+                        <a:t>$120,228</a:t>
+                      </a:r>
+                    </a:p>
+                  </a:txBody>
+                  <a:tcPr>
+                    <a:solidFill>
+                      <a:srgbClr val="FFFFFF"/>
+                    </a:solidFill>
+                  </a:tcPr>
+                </a:tc>
+                <a:tc>
+                  <a:txBody>
+                    <a:bodyPr/>
+                    <a:lstStyle/>
+                    <a:p>
+                      <a:pPr algn="r">
+                        <a:defRPr>
+                          <a:latin typeface="Roboto"/>
+                        </a:defRPr>
+                      </a:pPr>
+                      <a:r>
+                        <a:rPr sz="1050">
+                          <a:solidFill>
+                            <a:srgbClr val="25342A"/>
+                          </a:solidFill>
+                          <a:latin typeface="Roboto"/>
+                        </a:rPr>
+                        <a:t>$116,158</a:t>
+                      </a:r>
+                    </a:p>
+                  </a:txBody>
+                  <a:tcPr>
+                    <a:solidFill>
+                      <a:srgbClr val="FFFFFF"/>
+                    </a:solidFill>
+                  </a:tcPr>
+                </a:tc>
+                <a:tc>
+                  <a:txBody>
+                    <a:bodyPr/>
+                    <a:lstStyle/>
+                    <a:p>
+                      <a:pPr algn="r">
+                        <a:defRPr>
+                          <a:latin typeface="Roboto"/>
+                        </a:defRPr>
+                      </a:pPr>
+                      <a:r>
+                        <a:rPr sz="1050">
+                          <a:solidFill>
+                            <a:srgbClr val="25342A"/>
+                          </a:solidFill>
+                          <a:latin typeface="Roboto"/>
+                        </a:rPr>
+                        <a:t>$3,129</a:t>
+                      </a:r>
+                    </a:p>
+                  </a:txBody>
+                  <a:tcPr>
+                    <a:solidFill>
+                      <a:srgbClr val="FFFFFF"/>
+                    </a:solidFill>
+                  </a:tcPr>
+                </a:tc>
+                <a:tc>
+                  <a:txBody>
+                    <a:bodyPr/>
+                    <a:lstStyle/>
+                    <a:p>
+                      <a:pPr algn="r">
+                        <a:defRPr>
+                          <a:latin typeface="Roboto"/>
+                        </a:defRPr>
+                      </a:pPr>
+                      <a:r>
+                        <a:rPr sz="1050">
+                          <a:solidFill>
+                            <a:srgbClr val="B42318"/>
+                          </a:solidFill>
+                          <a:latin typeface="Roboto"/>
+                        </a:rPr>
+                        <a:t>($36,611)</a:t>
+                      </a:r>
+                    </a:p>
+                  </a:txBody>
+                  <a:tcPr>
+                    <a:solidFill>
+                      <a:srgbClr val="FFFFFF"/>
+                    </a:solidFill>
+                  </a:tcPr>
+                </a:tc>
+                <a:tc>
+                  <a:txBody>
+                    <a:bodyPr/>
+                    <a:lstStyle/>
+                    <a:p>
+                      <a:pPr algn="r">
+                        <a:defRPr>
+                          <a:latin typeface="Roboto"/>
+                        </a:defRPr>
+                      </a:pPr>
+                      <a:r>
+                        <a:rPr sz="1050">
+                          <a:solidFill>
+                            <a:srgbClr val="25342A"/>
+                          </a:solidFill>
+                          <a:latin typeface="Roboto"/>
+                        </a:rPr>
+                        <a:t>$0</a:t>
+                      </a:r>
+                    </a:p>
+                  </a:txBody>
+                  <a:tcPr>
+                    <a:solidFill>
+                      <a:srgbClr val="FFFFFF"/>
+                    </a:solidFill>
+                  </a:tcPr>
+                </a:tc>
+                <a:tc>
+                  <a:txBody>
+                    <a:bodyPr/>
+                    <a:lstStyle/>
+                    <a:p>
+                      <a:pPr algn="r">
+                        <a:defRPr>
+                          <a:latin typeface="Roboto"/>
+                        </a:defRPr>
+                      </a:pPr>
+                      <a:r>
+                        <a:rPr sz="1050">
+                          <a:solidFill>
+                            <a:srgbClr val="25342A"/>
+                          </a:solidFill>
+                          <a:latin typeface="Roboto"/>
+                        </a:rPr>
+                        <a:t>$0</a:t>
+                      </a:r>
+                    </a:p>
+                  </a:txBody>
+                  <a:tcPr>
+                    <a:solidFill>
+                      <a:srgbClr val="FFFFFF"/>
+                    </a:solidFill>
+                  </a:tcPr>
+                </a:tc>
+                <a:tc>
+                  <a:txBody>
+                    <a:bodyPr/>
+                    <a:lstStyle/>
+                    <a:p>
+                      <a:pPr algn="r">
+                        <a:defRPr>
+                          <a:latin typeface="Roboto"/>
+                        </a:defRPr>
+                      </a:pPr>
+                      <a:r>
+                        <a:rPr sz="1050">
+                          <a:solidFill>
+                            <a:srgbClr val="25342A"/>
+                          </a:solidFill>
+                          <a:latin typeface="Roboto"/>
+                        </a:rPr>
+                        <a:t>$0</a:t>
+                      </a:r>
+                    </a:p>
+                  </a:txBody>
+                  <a:tcPr>
+                    <a:solidFill>
+                      <a:srgbClr val="FFFFFF"/>
+                    </a:solidFill>
+                  </a:tcPr>
+                </a:tc>
+                <a:tc>
+                  <a:txBody>
+                    <a:bodyPr/>
+                    <a:lstStyle/>
+                    <a:p>
+                      <a:pPr algn="r">
+                        <a:defRPr>
+                          <a:latin typeface="Roboto"/>
+                        </a:defRPr>
+                      </a:pPr>
+                      <a:r>
+                        <a:rPr sz="1050">
+                          <a:solidFill>
+                            <a:srgbClr val="25342A"/>
+                          </a:solidFill>
+                          <a:latin typeface="Roboto"/>
+                        </a:rPr>
+                        <a:t>$202,904</a:t>
+                      </a:r>
+                    </a:p>
+                  </a:txBody>
+                  <a:tcPr>
+                    <a:solidFill>
+                      <a:srgbClr val="FFFFFF"/>
+                    </a:solidFill>
+                  </a:tcPr>
+                </a:tc>
+                <a:tc>
+                  <a:txBody>
+                    <a:bodyPr/>
+                    <a:lstStyle/>
+                    <a:p>
+                      <a:pPr algn="r">
+                        <a:defRPr>
+                          <a:latin typeface="Roboto"/>
+                        </a:defRPr>
+                      </a:pPr>
+                      <a:r>
+                        <a:rPr sz="1050">
+                          <a:solidFill>
+                            <a:srgbClr val="25342A"/>
+                          </a:solidFill>
+                          <a:latin typeface="Roboto"/>
+                        </a:rPr>
+                        <a:t>$132,057</a:t>
+                      </a:r>
+                    </a:p>
+                  </a:txBody>
+                  <a:tcPr>
+                    <a:solidFill>
+                      <a:srgbClr val="FFFFFF"/>
+                    </a:solidFill>
+                  </a:tcPr>
+                </a:tc>
+              </a:tr>
+              <a:tr h="310896">
+                <a:tc>
+                  <a:txBody>
+                    <a:bodyPr/>
+                    <a:lstStyle/>
+                    <a:p>
+                      <a:pPr algn="l">
+                        <a:defRPr>
+                          <a:latin typeface="Roboto"/>
+                        </a:defRPr>
+                      </a:pPr>
+                      <a:r>
+                        <a:rPr sz="1050">
+                          <a:solidFill>
+                            <a:srgbClr val="25342A"/>
+                          </a:solidFill>
+                          <a:latin typeface="Roboto"/>
+                        </a:rPr>
+                        <a:t>14 Oct</a:t>
+                      </a:r>
+                    </a:p>
+                  </a:txBody>
+                  <a:tcPr>
+                    <a:solidFill>
+                      <a:srgbClr val="F7FAF7"/>
+                    </a:solidFill>
+                  </a:tcPr>
+                </a:tc>
+                <a:tc>
+                  <a:txBody>
+                    <a:bodyPr/>
+                    <a:lstStyle/>
+                    <a:p>
+                      <a:pPr algn="r">
+                        <a:defRPr>
+                          <a:latin typeface="Roboto"/>
+                        </a:defRPr>
+                      </a:pPr>
+                      <a:r>
+                        <a:rPr sz="1050">
+                          <a:solidFill>
+                            <a:srgbClr val="25342A"/>
+                          </a:solidFill>
+                          <a:latin typeface="Roboto"/>
+                        </a:rPr>
+                        <a:t>$202,904</a:t>
+                      </a:r>
+                    </a:p>
+                  </a:txBody>
+                  <a:tcPr>
+                    <a:solidFill>
+                      <a:srgbClr val="F7FAF7"/>
+                    </a:solidFill>
+                  </a:tcPr>
+                </a:tc>
+                <a:tc>
+                  <a:txBody>
+                    <a:bodyPr/>
+                    <a:lstStyle/>
+                    <a:p>
+                      <a:pPr algn="r">
+                        <a:defRPr>
+                          <a:latin typeface="Roboto"/>
+                        </a:defRPr>
+                      </a:pPr>
+                      <a:r>
+                        <a:rPr sz="1050">
+                          <a:solidFill>
+                            <a:srgbClr val="25342A"/>
+                          </a:solidFill>
+                          <a:latin typeface="Roboto"/>
+                        </a:rPr>
+                        <a:t>$22,880</a:t>
+                      </a:r>
+                    </a:p>
+                  </a:txBody>
+                  <a:tcPr>
+                    <a:solidFill>
+                      <a:srgbClr val="F7FAF7"/>
+                    </a:solidFill>
+                  </a:tcPr>
+                </a:tc>
+                <a:tc>
+                  <a:txBody>
+                    <a:bodyPr/>
+                    <a:lstStyle/>
+                    <a:p>
+                      <a:pPr algn="r">
+                        <a:defRPr>
+                          <a:latin typeface="Roboto"/>
+                        </a:defRPr>
+                      </a:pPr>
+                      <a:r>
+                        <a:rPr sz="1050">
+                          <a:solidFill>
+                            <a:srgbClr val="25342A"/>
+                          </a:solidFill>
+                          <a:latin typeface="Roboto"/>
+                        </a:rPr>
+                        <a:t>$6,259</a:t>
+                      </a:r>
+                    </a:p>
+                  </a:txBody>
+                  <a:tcPr>
+                    <a:solidFill>
+                      <a:srgbClr val="F7FAF7"/>
+                    </a:solidFill>
+                  </a:tcPr>
+                </a:tc>
+                <a:tc>
+                  <a:txBody>
+                    <a:bodyPr/>
+                    <a:lstStyle/>
+                    <a:p>
+                      <a:pPr algn="r">
+                        <a:defRPr>
+                          <a:latin typeface="Roboto"/>
+                        </a:defRPr>
+                      </a:pPr>
+                      <a:r>
+                        <a:rPr sz="1050">
+                          <a:solidFill>
+                            <a:srgbClr val="25342A"/>
+                          </a:solidFill>
+                          <a:latin typeface="Roboto"/>
+                        </a:rPr>
+                        <a:t>$0</a:t>
+                      </a:r>
+                    </a:p>
+                  </a:txBody>
+                  <a:tcPr>
+                    <a:solidFill>
+                      <a:srgbClr val="F7FAF7"/>
+                    </a:solidFill>
+                  </a:tcPr>
+                </a:tc>
+                <a:tc>
+                  <a:txBody>
+                    <a:bodyPr/>
+                    <a:lstStyle/>
+                    <a:p>
+                      <a:pPr algn="r">
+                        <a:defRPr>
+                          <a:latin typeface="Roboto"/>
+                        </a:defRPr>
+                      </a:pPr>
+                      <a:r>
+                        <a:rPr sz="1050">
+                          <a:solidFill>
+                            <a:srgbClr val="25342A"/>
+                          </a:solidFill>
+                          <a:latin typeface="Roboto"/>
+                        </a:rPr>
+                        <a:t>$0</a:t>
+                      </a:r>
+                    </a:p>
+                  </a:txBody>
+                  <a:tcPr>
+                    <a:solidFill>
+                      <a:srgbClr val="F7FAF7"/>
+                    </a:solidFill>
+                  </a:tcPr>
+                </a:tc>
+                <a:tc>
+                  <a:txBody>
+                    <a:bodyPr/>
+                    <a:lstStyle/>
+                    <a:p>
+                      <a:pPr algn="r">
+                        <a:defRPr>
+                          <a:latin typeface="Roboto"/>
+                        </a:defRPr>
+                      </a:pPr>
+                      <a:r>
+                        <a:rPr sz="1050">
+                          <a:solidFill>
+                            <a:srgbClr val="25342A"/>
+                          </a:solidFill>
+                          <a:latin typeface="Roboto"/>
+                        </a:rPr>
+                        <a:t>$0</a:t>
+                      </a:r>
+                    </a:p>
+                  </a:txBody>
+                  <a:tcPr>
+                    <a:solidFill>
+                      <a:srgbClr val="F7FAF7"/>
+                    </a:solidFill>
+                  </a:tcPr>
+                </a:tc>
+                <a:tc>
+                  <a:txBody>
+                    <a:bodyPr/>
+                    <a:lstStyle/>
+                    <a:p>
+                      <a:pPr algn="r">
+                        <a:defRPr>
+                          <a:latin typeface="Roboto"/>
+                        </a:defRPr>
+                      </a:pPr>
+                      <a:r>
+                        <a:rPr sz="1050">
+                          <a:solidFill>
+                            <a:srgbClr val="25342A"/>
+                          </a:solidFill>
+                          <a:latin typeface="Roboto"/>
+                        </a:rPr>
+                        <a:t>$0</a:t>
+                      </a:r>
+                    </a:p>
+                  </a:txBody>
+                  <a:tcPr>
+                    <a:solidFill>
+                      <a:srgbClr val="F7FAF7"/>
+                    </a:solidFill>
+                  </a:tcPr>
+                </a:tc>
+                <a:tc>
+                  <a:txBody>
+                    <a:bodyPr/>
+                    <a:lstStyle/>
+                    <a:p>
+                      <a:pPr algn="r">
+                        <a:defRPr>
+                          <a:latin typeface="Roboto"/>
+                        </a:defRPr>
+                      </a:pPr>
+                      <a:r>
+                        <a:rPr sz="1050">
+                          <a:solidFill>
+                            <a:srgbClr val="25342A"/>
+                          </a:solidFill>
+                          <a:latin typeface="Roboto"/>
+                        </a:rPr>
+                        <a:t>$232,043</a:t>
+                      </a:r>
+                    </a:p>
+                  </a:txBody>
+                  <a:tcPr>
+                    <a:solidFill>
+                      <a:srgbClr val="F7FAF7"/>
+                    </a:solidFill>
+                  </a:tcPr>
+                </a:tc>
+                <a:tc>
+                  <a:txBody>
+                    <a:bodyPr/>
+                    <a:lstStyle/>
+                    <a:p>
+                      <a:pPr algn="r">
+                        <a:defRPr>
+                          <a:latin typeface="Roboto"/>
+                        </a:defRPr>
+                      </a:pPr>
+                      <a:r>
+                        <a:rPr sz="1050">
+                          <a:solidFill>
+                            <a:srgbClr val="25342A"/>
+                          </a:solidFill>
+                          <a:latin typeface="Roboto"/>
+                        </a:rPr>
+                        <a:t>$202,904</a:t>
+                      </a:r>
+                    </a:p>
+                  </a:txBody>
+                  <a:tcPr>
+                    <a:solidFill>
+                      <a:srgbClr val="F7FAF7"/>
+                    </a:solidFill>
+                  </a:tcPr>
+                </a:tc>
+              </a:tr>
+              <a:tr h="310896">
+                <a:tc>
+                  <a:txBody>
+                    <a:bodyPr/>
+                    <a:lstStyle/>
+                    <a:p>
+                      <a:pPr algn="l">
+                        <a:defRPr>
+                          <a:latin typeface="Roboto"/>
+                        </a:defRPr>
+                      </a:pPr>
+                      <a:r>
+                        <a:rPr sz="1050">
+                          <a:solidFill>
+                            <a:srgbClr val="25342A"/>
+                          </a:solidFill>
+                          <a:latin typeface="Roboto"/>
+                        </a:rPr>
+                        <a:t>21 Oct</a:t>
+                      </a:r>
+                    </a:p>
+                  </a:txBody>
+                  <a:tcPr>
+                    <a:solidFill>
+                      <a:srgbClr val="FFFFFF"/>
+                    </a:solidFill>
+                  </a:tcPr>
+                </a:tc>
+                <a:tc>
+                  <a:txBody>
+                    <a:bodyPr/>
+                    <a:lstStyle/>
+                    <a:p>
+                      <a:pPr algn="r">
+                        <a:defRPr>
+                          <a:latin typeface="Roboto"/>
+                        </a:defRPr>
+                      </a:pPr>
+                      <a:r>
+                        <a:rPr sz="1050">
+                          <a:solidFill>
+                            <a:srgbClr val="25342A"/>
+                          </a:solidFill>
+                          <a:latin typeface="Roboto"/>
+                        </a:rPr>
+                        <a:t>$232,043</a:t>
+                      </a:r>
+                    </a:p>
+                  </a:txBody>
+                  <a:tcPr>
+                    <a:solidFill>
+                      <a:srgbClr val="FFFFFF"/>
+                    </a:solidFill>
+                  </a:tcPr>
+                </a:tc>
+                <a:tc>
+                  <a:txBody>
+                    <a:bodyPr/>
+                    <a:lstStyle/>
+                    <a:p>
+                      <a:pPr algn="r">
+                        <a:defRPr>
+                          <a:latin typeface="Roboto"/>
+                        </a:defRPr>
+                      </a:pPr>
+                      <a:r>
+                        <a:rPr sz="1050">
+                          <a:solidFill>
+                            <a:srgbClr val="25342A"/>
+                          </a:solidFill>
+                          <a:latin typeface="Roboto"/>
+                        </a:rPr>
+                        <a:t>$15,840</a:t>
+                      </a:r>
+                    </a:p>
+                  </a:txBody>
+                  <a:tcPr>
+                    <a:solidFill>
+                      <a:srgbClr val="FFFFFF"/>
+                    </a:solidFill>
+                  </a:tcPr>
+                </a:tc>
+                <a:tc>
+                  <a:txBody>
+                    <a:bodyPr/>
+                    <a:lstStyle/>
+                    <a:p>
+                      <a:pPr algn="r">
+                        <a:defRPr>
+                          <a:latin typeface="Roboto"/>
+                        </a:defRPr>
+                      </a:pPr>
+                      <a:r>
+                        <a:rPr sz="1050">
+                          <a:solidFill>
+                            <a:srgbClr val="25342A"/>
+                          </a:solidFill>
+                          <a:latin typeface="Roboto"/>
+                        </a:rPr>
+                        <a:t>$7,824</a:t>
+                      </a:r>
+                    </a:p>
+                  </a:txBody>
+                  <a:tcPr>
+                    <a:solidFill>
+                      <a:srgbClr val="FFFFFF"/>
+                    </a:solidFill>
+                  </a:tcPr>
+                </a:tc>
+                <a:tc>
+                  <a:txBody>
+                    <a:bodyPr/>
+                    <a:lstStyle/>
+                    <a:p>
+                      <a:pPr algn="r">
+                        <a:defRPr>
+                          <a:latin typeface="Roboto"/>
+                        </a:defRPr>
+                      </a:pPr>
+                      <a:r>
+                        <a:rPr sz="1050">
+                          <a:solidFill>
+                            <a:srgbClr val="B42318"/>
+                          </a:solidFill>
+                          <a:latin typeface="Roboto"/>
+                        </a:rPr>
+                        <a:t>($36,611)</a:t>
+                      </a:r>
+                    </a:p>
+                  </a:txBody>
+                  <a:tcPr>
+                    <a:solidFill>
+                      <a:srgbClr val="FFFFFF"/>
+                    </a:solidFill>
+                  </a:tcPr>
+                </a:tc>
+                <a:tc>
+                  <a:txBody>
+                    <a:bodyPr/>
+                    <a:lstStyle/>
+                    <a:p>
+                      <a:pPr algn="r">
+                        <a:defRPr>
+                          <a:latin typeface="Roboto"/>
+                        </a:defRPr>
+                      </a:pPr>
+                      <a:r>
+                        <a:rPr sz="1050">
+                          <a:solidFill>
+                            <a:srgbClr val="B42318"/>
+                          </a:solidFill>
+                          <a:latin typeface="Roboto"/>
+                        </a:rPr>
+                        <a:t>($60,588)</a:t>
+                      </a:r>
+                    </a:p>
+                  </a:txBody>
+                  <a:tcPr>
+                    <a:solidFill>
+                      <a:srgbClr val="FFFFFF"/>
+                    </a:solidFill>
+                  </a:tcPr>
+                </a:tc>
+                <a:tc>
+                  <a:txBody>
+                    <a:bodyPr/>
+                    <a:lstStyle/>
+                    <a:p>
+                      <a:pPr algn="r">
+                        <a:defRPr>
+                          <a:latin typeface="Roboto"/>
+                        </a:defRPr>
+                      </a:pPr>
+                      <a:r>
+                        <a:rPr sz="1050">
+                          <a:solidFill>
+                            <a:srgbClr val="25342A"/>
+                          </a:solidFill>
+                          <a:latin typeface="Roboto"/>
+                        </a:rPr>
+                        <a:t>$0</a:t>
+                      </a:r>
+                    </a:p>
+                  </a:txBody>
+                  <a:tcPr>
+                    <a:solidFill>
+                      <a:srgbClr val="FFFFFF"/>
+                    </a:solidFill>
+                  </a:tcPr>
+                </a:tc>
+                <a:tc>
+                  <a:txBody>
+                    <a:bodyPr/>
+                    <a:lstStyle/>
+                    <a:p>
+                      <a:pPr algn="r">
+                        <a:defRPr>
+                          <a:latin typeface="Roboto"/>
+                        </a:defRPr>
+                      </a:pPr>
+                      <a:r>
+                        <a:rPr sz="1050">
+                          <a:solidFill>
+                            <a:srgbClr val="25342A"/>
+                          </a:solidFill>
+                          <a:latin typeface="Roboto"/>
+                        </a:rPr>
+                        <a:t>$0</a:t>
+                      </a:r>
+                    </a:p>
+                  </a:txBody>
+                  <a:tcPr>
+                    <a:solidFill>
+                      <a:srgbClr val="FFFFFF"/>
+                    </a:solidFill>
+                  </a:tcPr>
+                </a:tc>
+                <a:tc>
+                  <a:txBody>
+                    <a:bodyPr/>
+                    <a:lstStyle/>
+                    <a:p>
+                      <a:pPr algn="r">
+                        <a:defRPr>
+                          <a:latin typeface="Roboto"/>
+                        </a:defRPr>
+                      </a:pPr>
+                      <a:r>
+                        <a:rPr sz="1050">
+                          <a:solidFill>
+                            <a:srgbClr val="25342A"/>
+                          </a:solidFill>
+                          <a:latin typeface="Roboto"/>
+                        </a:rPr>
+                        <a:t>$158,508</a:t>
+                      </a:r>
+                    </a:p>
+                  </a:txBody>
+                  <a:tcPr>
+                    <a:solidFill>
+                      <a:srgbClr val="FFFFFF"/>
+                    </a:solidFill>
+                  </a:tcPr>
+                </a:tc>
+                <a:tc>
+                  <a:txBody>
+                    <a:bodyPr/>
+                    <a:lstStyle/>
+                    <a:p>
+                      <a:pPr algn="r">
+                        <a:defRPr>
+                          <a:latin typeface="Roboto"/>
+                        </a:defRPr>
+                      </a:pPr>
+                      <a:r>
+                        <a:rPr sz="1050">
+                          <a:solidFill>
+                            <a:srgbClr val="25342A"/>
+                          </a:solidFill>
+                          <a:latin typeface="Roboto"/>
+                        </a:rPr>
+                        <a:t>$134,844</a:t>
+                      </a:r>
+                    </a:p>
+                  </a:txBody>
+                  <a:tcPr>
+                    <a:solidFill>
+                      <a:srgbClr val="FFFFFF"/>
+                    </a:solidFill>
+                  </a:tcPr>
+                </a:tc>
+              </a:tr>
+              <a:tr h="310896">
+                <a:tc>
+                  <a:txBody>
+                    <a:bodyPr/>
+                    <a:lstStyle/>
+                    <a:p>
+                      <a:pPr algn="l">
+                        <a:defRPr>
+                          <a:latin typeface="Roboto"/>
+                        </a:defRPr>
+                      </a:pPr>
+                      <a:r>
+                        <a:rPr sz="1050">
+                          <a:solidFill>
+                            <a:srgbClr val="25342A"/>
+                          </a:solidFill>
+                          <a:latin typeface="Roboto"/>
+                        </a:rPr>
+                        <a:t>28 Oct</a:t>
+                      </a:r>
+                    </a:p>
+                  </a:txBody>
+                  <a:tcPr>
+                    <a:solidFill>
+                      <a:srgbClr val="F7FAF7"/>
+                    </a:solidFill>
+                  </a:tcPr>
+                </a:tc>
+                <a:tc>
+                  <a:txBody>
+                    <a:bodyPr/>
+                    <a:lstStyle/>
+                    <a:p>
+                      <a:pPr algn="r">
+                        <a:defRPr>
+                          <a:latin typeface="Roboto"/>
+                        </a:defRPr>
+                      </a:pPr>
+                      <a:r>
+                        <a:rPr sz="1050">
+                          <a:solidFill>
+                            <a:srgbClr val="25342A"/>
+                          </a:solidFill>
+                          <a:latin typeface="Roboto"/>
+                        </a:rPr>
+                        <a:t>$158,508</a:t>
+                      </a:r>
+                    </a:p>
+                  </a:txBody>
+                  <a:tcPr>
+                    <a:solidFill>
+                      <a:srgbClr val="F7FAF7"/>
+                    </a:solidFill>
+                  </a:tcPr>
+                </a:tc>
+                <a:tc>
+                  <a:txBody>
+                    <a:bodyPr/>
+                    <a:lstStyle/>
+                    <a:p>
+                      <a:pPr algn="r">
+                        <a:defRPr>
+                          <a:latin typeface="Roboto"/>
+                        </a:defRPr>
+                      </a:pPr>
+                      <a:r>
+                        <a:rPr sz="1050">
+                          <a:solidFill>
+                            <a:srgbClr val="25342A"/>
+                          </a:solidFill>
+                          <a:latin typeface="Roboto"/>
+                        </a:rPr>
+                        <a:t>$12,100</a:t>
+                      </a:r>
+                    </a:p>
+                  </a:txBody>
+                  <a:tcPr>
+                    <a:solidFill>
+                      <a:srgbClr val="F7FAF7"/>
+                    </a:solidFill>
+                  </a:tcPr>
+                </a:tc>
+                <a:tc>
+                  <a:txBody>
+                    <a:bodyPr/>
+                    <a:lstStyle/>
+                    <a:p>
+                      <a:pPr algn="r">
+                        <a:defRPr>
+                          <a:latin typeface="Roboto"/>
+                        </a:defRPr>
+                      </a:pPr>
+                      <a:r>
+                        <a:rPr sz="1050">
+                          <a:solidFill>
+                            <a:srgbClr val="25342A"/>
+                          </a:solidFill>
+                          <a:latin typeface="Roboto"/>
+                        </a:rPr>
+                        <a:t>$7,823</a:t>
+                      </a:r>
+                    </a:p>
+                  </a:txBody>
+                  <a:tcPr>
+                    <a:solidFill>
+                      <a:srgbClr val="F7FAF7"/>
+                    </a:solidFill>
+                  </a:tcPr>
+                </a:tc>
+                <a:tc>
+                  <a:txBody>
+                    <a:bodyPr/>
+                    <a:lstStyle/>
+                    <a:p>
+                      <a:pPr algn="r">
+                        <a:defRPr>
+                          <a:latin typeface="Roboto"/>
+                        </a:defRPr>
+                      </a:pPr>
+                      <a:r>
+                        <a:rPr sz="1050">
+                          <a:solidFill>
+                            <a:srgbClr val="25342A"/>
+                          </a:solidFill>
+                          <a:latin typeface="Roboto"/>
+                        </a:rPr>
+                        <a:t>$0</a:t>
+                      </a:r>
+                    </a:p>
+                  </a:txBody>
+                  <a:tcPr>
+                    <a:solidFill>
+                      <a:srgbClr val="F7FAF7"/>
+                    </a:solidFill>
+                  </a:tcPr>
+                </a:tc>
+                <a:tc>
+                  <a:txBody>
+                    <a:bodyPr/>
+                    <a:lstStyle/>
+                    <a:p>
+                      <a:pPr algn="r">
+                        <a:defRPr>
+                          <a:latin typeface="Roboto"/>
+                        </a:defRPr>
+                      </a:pPr>
+                      <a:r>
+                        <a:rPr sz="1050">
+                          <a:solidFill>
+                            <a:srgbClr val="25342A"/>
+                          </a:solidFill>
+                          <a:latin typeface="Roboto"/>
+                        </a:rPr>
+                        <a:t>$0</a:t>
+                      </a:r>
+                    </a:p>
+                  </a:txBody>
+                  <a:tcPr>
+                    <a:solidFill>
+                      <a:srgbClr val="F7FAF7"/>
+                    </a:solidFill>
+                  </a:tcPr>
+                </a:tc>
+                <a:tc>
+                  <a:txBody>
+                    <a:bodyPr/>
+                    <a:lstStyle/>
+                    <a:p>
+                      <a:pPr algn="r">
+                        <a:defRPr>
+                          <a:latin typeface="Roboto"/>
+                        </a:defRPr>
+                      </a:pPr>
+                      <a:r>
+                        <a:rPr sz="1050">
+                          <a:solidFill>
+                            <a:srgbClr val="B42318"/>
+                          </a:solidFill>
+                          <a:latin typeface="Roboto"/>
+                        </a:rPr>
+                        <a:t>($86,253)</a:t>
+                      </a:r>
+                    </a:p>
+                  </a:txBody>
+                  <a:tcPr>
+                    <a:solidFill>
+                      <a:srgbClr val="F7FAF7"/>
+                    </a:solidFill>
+                  </a:tcPr>
+                </a:tc>
+                <a:tc>
+                  <a:txBody>
+                    <a:bodyPr/>
+                    <a:lstStyle/>
+                    <a:p>
+                      <a:pPr algn="r">
+                        <a:defRPr>
+                          <a:latin typeface="Roboto"/>
+                        </a:defRPr>
+                      </a:pPr>
+                      <a:r>
+                        <a:rPr sz="1050">
+                          <a:solidFill>
+                            <a:srgbClr val="B42318"/>
+                          </a:solidFill>
+                          <a:latin typeface="Roboto"/>
+                        </a:rPr>
+                        <a:t>($5,000)</a:t>
+                      </a:r>
+                    </a:p>
+                  </a:txBody>
+                  <a:tcPr>
+                    <a:solidFill>
+                      <a:srgbClr val="F7FAF7"/>
+                    </a:solidFill>
+                  </a:tcPr>
+                </a:tc>
+                <a:tc>
+                  <a:txBody>
+                    <a:bodyPr/>
+                    <a:lstStyle/>
+                    <a:p>
+                      <a:pPr algn="r">
+                        <a:defRPr>
+                          <a:latin typeface="Roboto"/>
+                        </a:defRPr>
+                      </a:pPr>
+                      <a:r>
+                        <a:rPr sz="1050">
+                          <a:solidFill>
+                            <a:srgbClr val="25342A"/>
+                          </a:solidFill>
+                          <a:latin typeface="Roboto"/>
+                        </a:rPr>
+                        <a:t>$87,178</a:t>
+                      </a:r>
+                    </a:p>
+                  </a:txBody>
+                  <a:tcPr>
+                    <a:solidFill>
+                      <a:srgbClr val="F7FAF7"/>
+                    </a:solidFill>
+                  </a:tcPr>
+                </a:tc>
+                <a:tc>
+                  <a:txBody>
+                    <a:bodyPr/>
+                    <a:lstStyle/>
+                    <a:p>
+                      <a:pPr algn="r">
+                        <a:defRPr>
+                          <a:latin typeface="Roboto"/>
+                        </a:defRPr>
+                      </a:pPr>
+                      <a:r>
+                        <a:rPr sz="1050">
+                          <a:solidFill>
+                            <a:srgbClr val="25342A"/>
+                          </a:solidFill>
+                          <a:latin typeface="Roboto"/>
+                        </a:rPr>
+                        <a:t>$87,178</a:t>
+                      </a:r>
+                    </a:p>
+                  </a:txBody>
+                  <a:tcPr>
+                    <a:solidFill>
+                      <a:srgbClr val="F7FAF7"/>
+                    </a:solidFill>
+                  </a:tcPr>
+                </a:tc>
+              </a:tr>
+              <a:tr h="310896">
+                <a:tc>
+                  <a:txBody>
+                    <a:bodyPr/>
+                    <a:lstStyle/>
+                    <a:p>
+                      <a:pPr algn="l">
+                        <a:defRPr>
+                          <a:latin typeface="Roboto"/>
+                        </a:defRPr>
+                      </a:pPr>
+                      <a:r>
+                        <a:rPr sz="1050">
+                          <a:solidFill>
+                            <a:srgbClr val="25342A"/>
+                          </a:solidFill>
+                          <a:latin typeface="Roboto"/>
+                        </a:rPr>
+                        <a:t>4 Nov</a:t>
+                      </a:r>
+                    </a:p>
+                  </a:txBody>
+                  <a:tcPr>
+                    <a:solidFill>
+                      <a:srgbClr val="FFFFFF"/>
+                    </a:solidFill>
+                  </a:tcPr>
+                </a:tc>
+                <a:tc>
+                  <a:txBody>
+                    <a:bodyPr/>
+                    <a:lstStyle/>
+                    <a:p>
+                      <a:pPr algn="r">
+                        <a:defRPr>
+                          <a:latin typeface="Roboto"/>
+                        </a:defRPr>
+                      </a:pPr>
+                      <a:r>
+                        <a:rPr sz="1050">
+                          <a:solidFill>
+                            <a:srgbClr val="25342A"/>
+                          </a:solidFill>
+                          <a:latin typeface="Roboto"/>
+                        </a:rPr>
+                        <a:t>$87,178</a:t>
+                      </a:r>
+                    </a:p>
+                  </a:txBody>
+                  <a:tcPr>
+                    <a:solidFill>
+                      <a:srgbClr val="FFFFFF"/>
+                    </a:solidFill>
+                  </a:tcPr>
+                </a:tc>
+                <a:tc>
+                  <a:txBody>
+                    <a:bodyPr/>
+                    <a:lstStyle/>
+                    <a:p>
+                      <a:pPr algn="r">
+                        <a:defRPr>
+                          <a:latin typeface="Roboto"/>
+                        </a:defRPr>
+                      </a:pPr>
+                      <a:r>
+                        <a:rPr sz="1050">
+                          <a:solidFill>
+                            <a:srgbClr val="25342A"/>
+                          </a:solidFill>
+                          <a:latin typeface="Roboto"/>
+                        </a:rPr>
+                        <a:t>$18,700</a:t>
+                      </a:r>
+                    </a:p>
+                  </a:txBody>
+                  <a:tcPr>
+                    <a:solidFill>
+                      <a:srgbClr val="FFFFFF"/>
+                    </a:solidFill>
+                  </a:tcPr>
+                </a:tc>
+                <a:tc>
+                  <a:txBody>
+                    <a:bodyPr/>
+                    <a:lstStyle/>
+                    <a:p>
+                      <a:pPr algn="r">
+                        <a:defRPr>
+                          <a:latin typeface="Roboto"/>
+                        </a:defRPr>
+                      </a:pPr>
+                      <a:r>
+                        <a:rPr sz="1050">
+                          <a:solidFill>
+                            <a:srgbClr val="25342A"/>
+                          </a:solidFill>
+                          <a:latin typeface="Roboto"/>
+                        </a:rPr>
+                        <a:t>$71,657</a:t>
+                      </a:r>
+                    </a:p>
+                  </a:txBody>
+                  <a:tcPr>
+                    <a:solidFill>
+                      <a:srgbClr val="FFFFFF"/>
+                    </a:solidFill>
+                  </a:tcPr>
+                </a:tc>
+                <a:tc>
+                  <a:txBody>
+                    <a:bodyPr/>
+                    <a:lstStyle/>
+                    <a:p>
+                      <a:pPr algn="r">
+                        <a:defRPr>
+                          <a:latin typeface="Roboto"/>
+                        </a:defRPr>
+                      </a:pPr>
+                      <a:r>
+                        <a:rPr sz="1050">
+                          <a:solidFill>
+                            <a:srgbClr val="B42318"/>
+                          </a:solidFill>
+                          <a:latin typeface="Roboto"/>
+                        </a:rPr>
+                        <a:t>($36,611)</a:t>
+                      </a:r>
+                    </a:p>
+                  </a:txBody>
+                  <a:tcPr>
+                    <a:solidFill>
+                      <a:srgbClr val="FFFFFF"/>
+                    </a:solidFill>
+                  </a:tcPr>
+                </a:tc>
+                <a:tc>
+                  <a:txBody>
+                    <a:bodyPr/>
+                    <a:lstStyle/>
+                    <a:p>
+                      <a:pPr algn="r">
+                        <a:defRPr>
+                          <a:latin typeface="Roboto"/>
+                        </a:defRPr>
+                      </a:pPr>
+                      <a:r>
+                        <a:rPr sz="1050">
+                          <a:solidFill>
+                            <a:srgbClr val="B42318"/>
+                          </a:solidFill>
+                          <a:latin typeface="Roboto"/>
+                        </a:rPr>
+                        <a:t>($60,588)</a:t>
+                      </a:r>
+                    </a:p>
+                  </a:txBody>
+                  <a:tcPr>
+                    <a:solidFill>
+                      <a:srgbClr val="FFFFFF"/>
+                    </a:solidFill>
+                  </a:tcPr>
+                </a:tc>
+                <a:tc>
+                  <a:txBody>
+                    <a:bodyPr/>
+                    <a:lstStyle/>
+                    <a:p>
+                      <a:pPr algn="r">
+                        <a:defRPr>
+                          <a:latin typeface="Roboto"/>
+                        </a:defRPr>
+                      </a:pPr>
+                      <a:r>
+                        <a:rPr sz="1050">
+                          <a:solidFill>
+                            <a:srgbClr val="25342A"/>
+                          </a:solidFill>
+                          <a:latin typeface="Roboto"/>
+                        </a:rPr>
+                        <a:t>$0</a:t>
+                      </a:r>
+                    </a:p>
+                  </a:txBody>
+                  <a:tcPr>
+                    <a:solidFill>
+                      <a:srgbClr val="FFFFFF"/>
+                    </a:solidFill>
+                  </a:tcPr>
+                </a:tc>
+                <a:tc>
+                  <a:txBody>
+                    <a:bodyPr/>
+                    <a:lstStyle/>
+                    <a:p>
+                      <a:pPr algn="r">
+                        <a:defRPr>
+                          <a:latin typeface="Roboto"/>
+                        </a:defRPr>
+                      </a:pPr>
+                      <a:r>
+                        <a:rPr sz="1050">
+                          <a:solidFill>
+                            <a:srgbClr val="B42318"/>
+                          </a:solidFill>
+                          <a:latin typeface="Roboto"/>
+                        </a:rPr>
+                        <a:t>($1,080)</a:t>
+                      </a:r>
+                    </a:p>
+                  </a:txBody>
+                  <a:tcPr>
+                    <a:solidFill>
+                      <a:srgbClr val="FFFFFF"/>
+                    </a:solidFill>
+                  </a:tcPr>
+                </a:tc>
+                <a:tc>
+                  <a:txBody>
+                    <a:bodyPr/>
+                    <a:lstStyle/>
+                    <a:p>
+                      <a:pPr algn="r">
+                        <a:defRPr>
+                          <a:latin typeface="Roboto"/>
+                        </a:defRPr>
+                      </a:pPr>
+                      <a:r>
+                        <a:rPr sz="1050">
+                          <a:solidFill>
+                            <a:srgbClr val="25342A"/>
+                          </a:solidFill>
+                          <a:latin typeface="Roboto"/>
+                        </a:rPr>
+                        <a:t>$79,256</a:t>
+                      </a:r>
+                    </a:p>
+                  </a:txBody>
+                  <a:tcPr>
+                    <a:solidFill>
+                      <a:srgbClr val="FFFFFF"/>
+                    </a:solidFill>
+                  </a:tcPr>
+                </a:tc>
+                <a:tc>
+                  <a:txBody>
+                    <a:bodyPr/>
+                    <a:lstStyle/>
+                    <a:p>
+                      <a:pPr algn="r">
+                        <a:defRPr>
+                          <a:latin typeface="Roboto"/>
+                        </a:defRPr>
+                      </a:pPr>
+                      <a:r>
+                        <a:rPr sz="1050">
+                          <a:solidFill>
+                            <a:srgbClr val="25342A"/>
+                          </a:solidFill>
+                          <a:latin typeface="Roboto"/>
+                        </a:rPr>
+                        <a:t>$69,267</a:t>
+                      </a:r>
+                    </a:p>
+                  </a:txBody>
+                  <a:tcPr>
+                    <a:solidFill>
+                      <a:srgbClr val="FFFFFF"/>
+                    </a:solidFill>
+                  </a:tcPr>
+                </a:tc>
+              </a:tr>
+              <a:tr h="310896">
+                <a:tc>
+                  <a:txBody>
+                    <a:bodyPr/>
+                    <a:lstStyle/>
+                    <a:p>
+                      <a:pPr algn="l">
+                        <a:defRPr>
+                          <a:latin typeface="Roboto"/>
+                        </a:defRPr>
+                      </a:pPr>
+                      <a:r>
+                        <a:rPr sz="1050">
+                          <a:solidFill>
+                            <a:srgbClr val="25342A"/>
+                          </a:solidFill>
+                          <a:latin typeface="Roboto"/>
+                        </a:rPr>
+                        <a:t>11 Nov</a:t>
+                      </a:r>
+                    </a:p>
+                  </a:txBody>
+                  <a:tcPr>
+                    <a:solidFill>
+                      <a:srgbClr val="F7FAF7"/>
+                    </a:solidFill>
+                  </a:tcPr>
+                </a:tc>
+                <a:tc>
+                  <a:txBody>
+                    <a:bodyPr/>
+                    <a:lstStyle/>
+                    <a:p>
+                      <a:pPr algn="r">
+                        <a:defRPr>
+                          <a:latin typeface="Roboto"/>
+                        </a:defRPr>
+                      </a:pPr>
+                      <a:r>
+                        <a:rPr sz="1050">
+                          <a:solidFill>
+                            <a:srgbClr val="25342A"/>
+                          </a:solidFill>
+                          <a:latin typeface="Roboto"/>
+                        </a:rPr>
+                        <a:t>$79,256</a:t>
+                      </a:r>
+                    </a:p>
+                  </a:txBody>
+                  <a:tcPr>
+                    <a:solidFill>
+                      <a:srgbClr val="F7FAF7"/>
+                    </a:solidFill>
+                  </a:tcPr>
+                </a:tc>
+                <a:tc>
+                  <a:txBody>
+                    <a:bodyPr/>
+                    <a:lstStyle/>
+                    <a:p>
+                      <a:pPr algn="r">
+                        <a:defRPr>
+                          <a:latin typeface="Roboto"/>
+                        </a:defRPr>
+                      </a:pPr>
+                      <a:r>
+                        <a:rPr sz="1050">
+                          <a:solidFill>
+                            <a:srgbClr val="25342A"/>
+                          </a:solidFill>
+                          <a:latin typeface="Roboto"/>
+                        </a:rPr>
+                        <a:t>$0</a:t>
+                      </a:r>
+                    </a:p>
+                  </a:txBody>
+                  <a:tcPr>
+                    <a:solidFill>
+                      <a:srgbClr val="F7FAF7"/>
+                    </a:solidFill>
+                  </a:tcPr>
+                </a:tc>
+                <a:tc>
+                  <a:txBody>
+                    <a:bodyPr/>
+                    <a:lstStyle/>
+                    <a:p>
+                      <a:pPr algn="r">
+                        <a:defRPr>
+                          <a:latin typeface="Roboto"/>
+                        </a:defRPr>
+                      </a:pPr>
+                      <a:r>
+                        <a:rPr sz="1050">
+                          <a:solidFill>
+                            <a:srgbClr val="25342A"/>
+                          </a:solidFill>
+                          <a:latin typeface="Roboto"/>
+                        </a:rPr>
+                        <a:t>$42,693</a:t>
+                      </a:r>
+                    </a:p>
+                  </a:txBody>
+                  <a:tcPr>
+                    <a:solidFill>
+                      <a:srgbClr val="F7FAF7"/>
+                    </a:solidFill>
+                  </a:tcPr>
+                </a:tc>
+                <a:tc>
+                  <a:txBody>
+                    <a:bodyPr/>
+                    <a:lstStyle/>
+                    <a:p>
+                      <a:pPr algn="r">
+                        <a:defRPr>
+                          <a:latin typeface="Roboto"/>
+                        </a:defRPr>
+                      </a:pPr>
+                      <a:r>
+                        <a:rPr sz="1050">
+                          <a:solidFill>
+                            <a:srgbClr val="25342A"/>
+                          </a:solidFill>
+                          <a:latin typeface="Roboto"/>
+                        </a:rPr>
+                        <a:t>$0</a:t>
+                      </a:r>
+                    </a:p>
+                  </a:txBody>
+                  <a:tcPr>
+                    <a:solidFill>
+                      <a:srgbClr val="F7FAF7"/>
+                    </a:solidFill>
+                  </a:tcPr>
+                </a:tc>
+                <a:tc>
+                  <a:txBody>
+                    <a:bodyPr/>
+                    <a:lstStyle/>
+                    <a:p>
+                      <a:pPr algn="r">
+                        <a:defRPr>
+                          <a:latin typeface="Roboto"/>
+                        </a:defRPr>
+                      </a:pPr>
+                      <a:r>
+                        <a:rPr sz="1050">
+                          <a:solidFill>
+                            <a:srgbClr val="25342A"/>
+                          </a:solidFill>
+                          <a:latin typeface="Roboto"/>
+                        </a:rPr>
+                        <a:t>$0</a:t>
+                      </a:r>
+                    </a:p>
+                  </a:txBody>
+                  <a:tcPr>
+                    <a:solidFill>
+                      <a:srgbClr val="F7FAF7"/>
+                    </a:solidFill>
+                  </a:tcPr>
+                </a:tc>
+                <a:tc>
+                  <a:txBody>
+                    <a:bodyPr/>
+                    <a:lstStyle/>
+                    <a:p>
+                      <a:pPr algn="r">
+                        <a:defRPr>
+                          <a:latin typeface="Roboto"/>
+                        </a:defRPr>
+                      </a:pPr>
+                      <a:r>
+                        <a:rPr sz="1050">
+                          <a:solidFill>
+                            <a:srgbClr val="25342A"/>
+                          </a:solidFill>
+                          <a:latin typeface="Roboto"/>
+                        </a:rPr>
+                        <a:t>$0</a:t>
+                      </a:r>
+                    </a:p>
+                  </a:txBody>
+                  <a:tcPr>
+                    <a:solidFill>
+                      <a:srgbClr val="F7FAF7"/>
+                    </a:solidFill>
+                  </a:tcPr>
+                </a:tc>
+                <a:tc>
+                  <a:txBody>
+                    <a:bodyPr/>
+                    <a:lstStyle/>
+                    <a:p>
+                      <a:pPr algn="r">
+                        <a:defRPr>
+                          <a:latin typeface="Roboto"/>
+                        </a:defRPr>
+                      </a:pPr>
+                      <a:r>
+                        <a:rPr sz="1050">
+                          <a:solidFill>
+                            <a:srgbClr val="25342A"/>
+                          </a:solidFill>
+                          <a:latin typeface="Roboto"/>
+                        </a:rPr>
+                        <a:t>$0</a:t>
+                      </a:r>
+                    </a:p>
+                  </a:txBody>
+                  <a:tcPr>
+                    <a:solidFill>
+                      <a:srgbClr val="F7FAF7"/>
+                    </a:solidFill>
+                  </a:tcPr>
+                </a:tc>
+                <a:tc>
+                  <a:txBody>
+                    <a:bodyPr/>
+                    <a:lstStyle/>
+                    <a:p>
+                      <a:pPr algn="r">
+                        <a:defRPr>
+                          <a:latin typeface="Roboto"/>
+                        </a:defRPr>
+                      </a:pPr>
+                      <a:r>
+                        <a:rPr sz="1050">
+                          <a:solidFill>
+                            <a:srgbClr val="25342A"/>
+                          </a:solidFill>
+                          <a:latin typeface="Roboto"/>
+                        </a:rPr>
+                        <a:t>$121,949</a:t>
+                      </a:r>
+                    </a:p>
+                  </a:txBody>
+                  <a:tcPr>
+                    <a:solidFill>
+                      <a:srgbClr val="F7FAF7"/>
+                    </a:solidFill>
+                  </a:tcPr>
+                </a:tc>
+                <a:tc>
+                  <a:txBody>
+                    <a:bodyPr/>
+                    <a:lstStyle/>
+                    <a:p>
+                      <a:pPr algn="r">
+                        <a:defRPr>
+                          <a:latin typeface="Roboto"/>
+                        </a:defRPr>
+                      </a:pPr>
+                      <a:r>
+                        <a:rPr sz="1050">
+                          <a:solidFill>
+                            <a:srgbClr val="25342A"/>
+                          </a:solidFill>
+                          <a:latin typeface="Roboto"/>
+                        </a:rPr>
+                        <a:t>$86,230</a:t>
+                      </a:r>
+                    </a:p>
+                  </a:txBody>
+                  <a:tcPr>
+                    <a:solidFill>
+                      <a:srgbClr val="F7FAF7"/>
+                    </a:solidFill>
+                  </a:tcPr>
+                </a:tc>
+              </a:tr>
+              <a:tr h="310896">
+                <a:tc>
+                  <a:txBody>
+                    <a:bodyPr/>
+                    <a:lstStyle/>
+                    <a:p>
+                      <a:pPr algn="l">
+                        <a:defRPr>
+                          <a:latin typeface="Roboto"/>
+                        </a:defRPr>
+                      </a:pPr>
+                      <a:r>
+                        <a:rPr sz="1050">
+                          <a:solidFill>
+                            <a:srgbClr val="25342A"/>
+                          </a:solidFill>
+                          <a:latin typeface="Roboto"/>
+                        </a:rPr>
+                        <a:t>18 Nov</a:t>
+                      </a:r>
+                    </a:p>
+                  </a:txBody>
+                  <a:tcPr>
+                    <a:solidFill>
+                      <a:srgbClr val="FFFFFF"/>
+                    </a:solidFill>
+                  </a:tcPr>
+                </a:tc>
+                <a:tc>
+                  <a:txBody>
+                    <a:bodyPr/>
+                    <a:lstStyle/>
+                    <a:p>
+                      <a:pPr algn="r">
+                        <a:defRPr>
+                          <a:latin typeface="Roboto"/>
+                        </a:defRPr>
+                      </a:pPr>
+                      <a:r>
+                        <a:rPr sz="1050">
+                          <a:solidFill>
+                            <a:srgbClr val="25342A"/>
+                          </a:solidFill>
+                          <a:latin typeface="Roboto"/>
+                        </a:rPr>
+                        <a:t>$121,949</a:t>
+                      </a:r>
+                    </a:p>
+                  </a:txBody>
+                  <a:tcPr>
+                    <a:solidFill>
+                      <a:srgbClr val="FFFFFF"/>
+                    </a:solidFill>
+                  </a:tcPr>
+                </a:tc>
+                <a:tc>
+                  <a:txBody>
+                    <a:bodyPr/>
+                    <a:lstStyle/>
+                    <a:p>
+                      <a:pPr algn="r">
+                        <a:defRPr>
+                          <a:latin typeface="Roboto"/>
+                        </a:defRPr>
+                      </a:pPr>
+                      <a:r>
+                        <a:rPr sz="1050">
+                          <a:solidFill>
+                            <a:srgbClr val="25342A"/>
+                          </a:solidFill>
+                          <a:latin typeface="Roboto"/>
+                        </a:rPr>
+                        <a:t>$0</a:t>
+                      </a:r>
+                    </a:p>
+                  </a:txBody>
+                  <a:tcPr>
+                    <a:solidFill>
+                      <a:srgbClr val="FFFFFF"/>
+                    </a:solidFill>
+                  </a:tcPr>
+                </a:tc>
+                <a:tc>
+                  <a:txBody>
+                    <a:bodyPr/>
+                    <a:lstStyle/>
+                    <a:p>
+                      <a:pPr algn="r">
+                        <a:defRPr>
+                          <a:latin typeface="Roboto"/>
+                        </a:defRPr>
+                      </a:pPr>
+                      <a:r>
+                        <a:rPr sz="1050">
+                          <a:solidFill>
+                            <a:srgbClr val="25342A"/>
+                          </a:solidFill>
+                          <a:latin typeface="Roboto"/>
+                        </a:rPr>
+                        <a:t>$42,693</a:t>
+                      </a:r>
+                    </a:p>
+                  </a:txBody>
+                  <a:tcPr>
+                    <a:solidFill>
+                      <a:srgbClr val="FFFFFF"/>
+                    </a:solidFill>
+                  </a:tcPr>
+                </a:tc>
+                <a:tc>
+                  <a:txBody>
+                    <a:bodyPr/>
+                    <a:lstStyle/>
+                    <a:p>
+                      <a:pPr algn="r">
+                        <a:defRPr>
+                          <a:latin typeface="Roboto"/>
+                        </a:defRPr>
+                      </a:pPr>
+                      <a:r>
+                        <a:rPr sz="1050">
+                          <a:solidFill>
+                            <a:srgbClr val="B42318"/>
+                          </a:solidFill>
+                          <a:latin typeface="Roboto"/>
+                        </a:rPr>
+                        <a:t>($36,611)</a:t>
+                      </a:r>
+                    </a:p>
+                  </a:txBody>
+                  <a:tcPr>
+                    <a:solidFill>
+                      <a:srgbClr val="FFFFFF"/>
+                    </a:solidFill>
+                  </a:tcPr>
+                </a:tc>
+                <a:tc>
+                  <a:txBody>
+                    <a:bodyPr/>
+                    <a:lstStyle/>
+                    <a:p>
+                      <a:pPr algn="r">
+                        <a:defRPr>
+                          <a:latin typeface="Roboto"/>
+                        </a:defRPr>
+                      </a:pPr>
+                      <a:r>
+                        <a:rPr sz="1050">
+                          <a:solidFill>
+                            <a:srgbClr val="B42318"/>
+                          </a:solidFill>
+                          <a:latin typeface="Roboto"/>
+                        </a:rPr>
+                        <a:t>($60,588)</a:t>
+                      </a:r>
+                    </a:p>
+                  </a:txBody>
+                  <a:tcPr>
+                    <a:solidFill>
+                      <a:srgbClr val="FFFFFF"/>
+                    </a:solidFill>
+                  </a:tcPr>
+                </a:tc>
+                <a:tc>
+                  <a:txBody>
+                    <a:bodyPr/>
+                    <a:lstStyle/>
+                    <a:p>
+                      <a:pPr algn="r">
+                        <a:defRPr>
+                          <a:latin typeface="Roboto"/>
+                        </a:defRPr>
+                      </a:pPr>
+                      <a:r>
+                        <a:rPr sz="1050">
+                          <a:solidFill>
+                            <a:srgbClr val="25342A"/>
+                          </a:solidFill>
+                          <a:latin typeface="Roboto"/>
+                        </a:rPr>
+                        <a:t>$0</a:t>
+                      </a:r>
+                    </a:p>
+                  </a:txBody>
+                  <a:tcPr>
+                    <a:solidFill>
+                      <a:srgbClr val="FFFFFF"/>
+                    </a:solidFill>
+                  </a:tcPr>
+                </a:tc>
+                <a:tc>
+                  <a:txBody>
+                    <a:bodyPr/>
+                    <a:lstStyle/>
+                    <a:p>
+                      <a:pPr algn="r">
+                        <a:defRPr>
+                          <a:latin typeface="Roboto"/>
+                        </a:defRPr>
+                      </a:pPr>
+                      <a:r>
+                        <a:rPr sz="1050">
+                          <a:solidFill>
+                            <a:srgbClr val="25342A"/>
+                          </a:solidFill>
+                          <a:latin typeface="Roboto"/>
+                        </a:rPr>
+                        <a:t>$0</a:t>
+                      </a:r>
+                    </a:p>
+                  </a:txBody>
+                  <a:tcPr>
+                    <a:solidFill>
+                      <a:srgbClr val="FFFFFF"/>
+                    </a:solidFill>
+                  </a:tcPr>
+                </a:tc>
+                <a:tc>
+                  <a:txBody>
+                    <a:bodyPr/>
+                    <a:lstStyle/>
+                    <a:p>
+                      <a:pPr algn="r">
+                        <a:defRPr>
+                          <a:latin typeface="Roboto"/>
+                        </a:defRPr>
+                      </a:pPr>
+                      <a:r>
+                        <a:rPr sz="1050">
+                          <a:solidFill>
+                            <a:srgbClr val="25342A"/>
+                          </a:solidFill>
+                          <a:latin typeface="Roboto"/>
+                        </a:rPr>
+                        <a:t>$67,443</a:t>
+                      </a:r>
+                    </a:p>
+                  </a:txBody>
+                  <a:tcPr>
+                    <a:solidFill>
+                      <a:srgbClr val="FFFFFF"/>
+                    </a:solidFill>
+                  </a:tcPr>
+                </a:tc>
+                <a:tc>
+                  <a:txBody>
+                    <a:bodyPr/>
+                    <a:lstStyle/>
+                    <a:p>
+                      <a:pPr algn="r">
+                        <a:defRPr>
+                          <a:latin typeface="Roboto"/>
+                        </a:defRPr>
+                      </a:pPr>
+                      <a:r>
+                        <a:rPr sz="1050">
+                          <a:solidFill>
+                            <a:srgbClr val="25342A"/>
+                          </a:solidFill>
+                          <a:latin typeface="Roboto"/>
+                        </a:rPr>
+                        <a:t>$58,905</a:t>
+                      </a:r>
+                    </a:p>
+                  </a:txBody>
+                  <a:tcPr>
+                    <a:solidFill>
+                      <a:srgbClr val="FFFFFF"/>
+                    </a:solidFill>
+                  </a:tcPr>
+                </a:tc>
+              </a:tr>
+              <a:tr h="310896">
+                <a:tc>
+                  <a:txBody>
+                    <a:bodyPr/>
+                    <a:lstStyle/>
+                    <a:p>
+                      <a:pPr algn="l">
+                        <a:defRPr>
+                          <a:latin typeface="Roboto"/>
+                        </a:defRPr>
+                      </a:pPr>
+                      <a:r>
+                        <a:rPr sz="1050">
+                          <a:solidFill>
+                            <a:srgbClr val="25342A"/>
+                          </a:solidFill>
+                          <a:latin typeface="Roboto"/>
+                        </a:rPr>
+                        <a:t>25 Nov</a:t>
+                      </a:r>
+                    </a:p>
+                  </a:txBody>
+                  <a:tcPr>
+                    <a:solidFill>
+                      <a:srgbClr val="F7FAF7"/>
+                    </a:solidFill>
+                  </a:tcPr>
+                </a:tc>
+                <a:tc>
+                  <a:txBody>
+                    <a:bodyPr/>
+                    <a:lstStyle/>
+                    <a:p>
+                      <a:pPr algn="r">
+                        <a:defRPr>
+                          <a:latin typeface="Roboto"/>
+                        </a:defRPr>
+                      </a:pPr>
+                      <a:r>
+                        <a:rPr sz="1050">
+                          <a:solidFill>
+                            <a:srgbClr val="25342A"/>
+                          </a:solidFill>
+                          <a:latin typeface="Roboto"/>
+                        </a:rPr>
+                        <a:t>$67,443</a:t>
+                      </a:r>
+                    </a:p>
+                  </a:txBody>
+                  <a:tcPr>
+                    <a:solidFill>
+                      <a:srgbClr val="F7FAF7"/>
+                    </a:solidFill>
+                  </a:tcPr>
+                </a:tc>
+                <a:tc>
+                  <a:txBody>
+                    <a:bodyPr/>
+                    <a:lstStyle/>
+                    <a:p>
+                      <a:pPr algn="r">
+                        <a:defRPr>
+                          <a:latin typeface="Roboto"/>
+                        </a:defRPr>
+                      </a:pPr>
+                      <a:r>
+                        <a:rPr sz="1050">
+                          <a:solidFill>
+                            <a:srgbClr val="25342A"/>
+                          </a:solidFill>
+                          <a:latin typeface="Roboto"/>
+                        </a:rPr>
+                        <a:t>$0</a:t>
+                      </a:r>
+                    </a:p>
+                  </a:txBody>
+                  <a:tcPr>
+                    <a:solidFill>
+                      <a:srgbClr val="F7FAF7"/>
+                    </a:solidFill>
+                  </a:tcPr>
+                </a:tc>
+                <a:tc>
+                  <a:txBody>
+                    <a:bodyPr/>
+                    <a:lstStyle/>
+                    <a:p>
+                      <a:pPr algn="r">
+                        <a:defRPr>
+                          <a:latin typeface="Roboto"/>
+                        </a:defRPr>
+                      </a:pPr>
+                      <a:r>
+                        <a:rPr sz="1050">
+                          <a:solidFill>
+                            <a:srgbClr val="25342A"/>
+                          </a:solidFill>
+                          <a:latin typeface="Roboto"/>
+                        </a:rPr>
+                        <a:t>$42,694</a:t>
+                      </a:r>
+                    </a:p>
+                  </a:txBody>
+                  <a:tcPr>
+                    <a:solidFill>
+                      <a:srgbClr val="F7FAF7"/>
+                    </a:solidFill>
+                  </a:tcPr>
+                </a:tc>
+                <a:tc>
+                  <a:txBody>
+                    <a:bodyPr/>
+                    <a:lstStyle/>
+                    <a:p>
+                      <a:pPr algn="r">
+                        <a:defRPr>
+                          <a:latin typeface="Roboto"/>
+                        </a:defRPr>
+                      </a:pPr>
+                      <a:r>
+                        <a:rPr sz="1050">
+                          <a:solidFill>
+                            <a:srgbClr val="25342A"/>
+                          </a:solidFill>
+                          <a:latin typeface="Roboto"/>
+                        </a:rPr>
+                        <a:t>$0</a:t>
+                      </a:r>
+                    </a:p>
+                  </a:txBody>
+                  <a:tcPr>
+                    <a:solidFill>
+                      <a:srgbClr val="F7FAF7"/>
+                    </a:solidFill>
+                  </a:tcPr>
+                </a:tc>
+                <a:tc>
+                  <a:txBody>
+                    <a:bodyPr/>
+                    <a:lstStyle/>
+                    <a:p>
+                      <a:pPr algn="r">
+                        <a:defRPr>
+                          <a:latin typeface="Roboto"/>
+                        </a:defRPr>
+                      </a:pPr>
+                      <a:r>
+                        <a:rPr sz="1050">
+                          <a:solidFill>
+                            <a:srgbClr val="25342A"/>
+                          </a:solidFill>
+                          <a:latin typeface="Roboto"/>
+                        </a:rPr>
+                        <a:t>$0</a:t>
+                      </a:r>
+                    </a:p>
+                  </a:txBody>
+                  <a:tcPr>
+                    <a:solidFill>
+                      <a:srgbClr val="F7FAF7"/>
+                    </a:solidFill>
+                  </a:tcPr>
+                </a:tc>
+                <a:tc>
+                  <a:txBody>
+                    <a:bodyPr/>
+                    <a:lstStyle/>
+                    <a:p>
+                      <a:pPr algn="r">
+                        <a:defRPr>
+                          <a:latin typeface="Roboto"/>
+                        </a:defRPr>
+                      </a:pPr>
+                      <a:r>
+                        <a:rPr sz="1050">
+                          <a:solidFill>
+                            <a:srgbClr val="25342A"/>
+                          </a:solidFill>
+                          <a:latin typeface="Roboto"/>
+                        </a:rPr>
+                        <a:t>$0</a:t>
+                      </a:r>
+                    </a:p>
+                  </a:txBody>
+                  <a:tcPr>
+                    <a:solidFill>
+                      <a:srgbClr val="F7FAF7"/>
+                    </a:solidFill>
+                  </a:tcPr>
+                </a:tc>
+                <a:tc>
+                  <a:txBody>
+                    <a:bodyPr/>
+                    <a:lstStyle/>
+                    <a:p>
+                      <a:pPr algn="r">
+                        <a:defRPr>
+                          <a:latin typeface="Roboto"/>
+                        </a:defRPr>
+                      </a:pPr>
+                      <a:r>
+                        <a:rPr sz="1050">
+                          <a:solidFill>
+                            <a:srgbClr val="25342A"/>
+                          </a:solidFill>
+                          <a:latin typeface="Roboto"/>
+                        </a:rPr>
+                        <a:t>$0</a:t>
+                      </a:r>
+                    </a:p>
+                  </a:txBody>
+                  <a:tcPr>
+                    <a:solidFill>
+                      <a:srgbClr val="F7FAF7"/>
+                    </a:solidFill>
+                  </a:tcPr>
+                </a:tc>
+                <a:tc>
+                  <a:txBody>
+                    <a:bodyPr/>
+                    <a:lstStyle/>
+                    <a:p>
+                      <a:pPr algn="r">
+                        <a:defRPr>
+                          <a:latin typeface="Roboto"/>
+                        </a:defRPr>
+                      </a:pPr>
+                      <a:r>
+                        <a:rPr sz="1050">
+                          <a:solidFill>
+                            <a:srgbClr val="25342A"/>
+                          </a:solidFill>
+                          <a:latin typeface="Roboto"/>
+                        </a:rPr>
+                        <a:t>$110,137</a:t>
+                      </a:r>
+                    </a:p>
+                  </a:txBody>
+                  <a:tcPr>
+                    <a:solidFill>
+                      <a:srgbClr val="F7FAF7"/>
+                    </a:solidFill>
+                  </a:tcPr>
+                </a:tc>
+                <a:tc>
+                  <a:txBody>
+                    <a:bodyPr/>
+                    <a:lstStyle/>
+                    <a:p>
+                      <a:pPr algn="r">
+                        <a:defRPr>
+                          <a:latin typeface="Roboto"/>
+                        </a:defRPr>
+                      </a:pPr>
+                      <a:r>
+                        <a:rPr sz="1050">
+                          <a:solidFill>
+                            <a:srgbClr val="25342A"/>
+                          </a:solidFill>
+                          <a:latin typeface="Roboto"/>
+                        </a:rPr>
+                        <a:t>$74,417</a:t>
+                      </a:r>
+                    </a:p>
+                  </a:txBody>
+                  <a:tcPr>
+                    <a:solidFill>
+                      <a:srgbClr val="F7FAF7"/>
+                    </a:solidFill>
+                  </a:tcPr>
+                </a:tc>
+              </a:tr>
+              <a:tr h="310896">
+                <a:tc>
+                  <a:txBody>
+                    <a:bodyPr/>
+                    <a:lstStyle/>
+                    <a:p>
+                      <a:pPr algn="l">
+                        <a:defRPr>
+                          <a:latin typeface="Roboto"/>
+                        </a:defRPr>
+                      </a:pPr>
+                      <a:r>
+                        <a:rPr sz="1050">
+                          <a:solidFill>
+                            <a:srgbClr val="25342A"/>
+                          </a:solidFill>
+                          <a:latin typeface="Roboto"/>
+                        </a:rPr>
+                        <a:t>2 Dec</a:t>
+                      </a:r>
+                    </a:p>
+                  </a:txBody>
+                  <a:tcPr>
+                    <a:solidFill>
+                      <a:srgbClr val="FFFFFF"/>
+                    </a:solidFill>
+                  </a:tcPr>
+                </a:tc>
+                <a:tc>
+                  <a:txBody>
+                    <a:bodyPr/>
+                    <a:lstStyle/>
+                    <a:p>
+                      <a:pPr algn="r">
+                        <a:defRPr>
+                          <a:latin typeface="Roboto"/>
+                        </a:defRPr>
+                      </a:pPr>
+                      <a:r>
+                        <a:rPr sz="1050">
+                          <a:solidFill>
+                            <a:srgbClr val="25342A"/>
+                          </a:solidFill>
+                          <a:latin typeface="Roboto"/>
+                        </a:rPr>
+                        <a:t>$110,137</a:t>
+                      </a:r>
+                    </a:p>
+                  </a:txBody>
+                  <a:tcPr>
+                    <a:solidFill>
+                      <a:srgbClr val="FFFFFF"/>
+                    </a:solidFill>
+                  </a:tcPr>
+                </a:tc>
+                <a:tc>
+                  <a:txBody>
+                    <a:bodyPr/>
+                    <a:lstStyle/>
+                    <a:p>
+                      <a:pPr algn="r">
+                        <a:defRPr>
+                          <a:latin typeface="Roboto"/>
+                        </a:defRPr>
+                      </a:pPr>
+                      <a:r>
+                        <a:rPr sz="1050">
+                          <a:solidFill>
+                            <a:srgbClr val="25342A"/>
+                          </a:solidFill>
+                          <a:latin typeface="Roboto"/>
+                        </a:rPr>
+                        <a:t>$0</a:t>
+                      </a:r>
+                    </a:p>
+                  </a:txBody>
+                  <a:tcPr>
+                    <a:solidFill>
+                      <a:srgbClr val="FFFFFF"/>
+                    </a:solidFill>
+                  </a:tcPr>
+                </a:tc>
+                <a:tc>
+                  <a:txBody>
+                    <a:bodyPr/>
+                    <a:lstStyle/>
+                    <a:p>
+                      <a:pPr algn="r">
+                        <a:defRPr>
+                          <a:latin typeface="Roboto"/>
+                        </a:defRPr>
+                      </a:pPr>
+                      <a:r>
+                        <a:rPr sz="1050">
+                          <a:solidFill>
+                            <a:srgbClr val="25342A"/>
+                          </a:solidFill>
+                          <a:latin typeface="Roboto"/>
+                        </a:rPr>
+                        <a:t>$92,578</a:t>
+                      </a:r>
+                    </a:p>
+                  </a:txBody>
+                  <a:tcPr>
+                    <a:solidFill>
+                      <a:srgbClr val="FFFFFF"/>
+                    </a:solidFill>
+                  </a:tcPr>
+                </a:tc>
+                <a:tc>
+                  <a:txBody>
+                    <a:bodyPr/>
+                    <a:lstStyle/>
+                    <a:p>
+                      <a:pPr algn="r">
+                        <a:defRPr>
+                          <a:latin typeface="Roboto"/>
+                        </a:defRPr>
+                      </a:pPr>
+                      <a:r>
+                        <a:rPr sz="1050">
+                          <a:solidFill>
+                            <a:srgbClr val="B42318"/>
+                          </a:solidFill>
+                          <a:latin typeface="Roboto"/>
+                        </a:rPr>
+                        <a:t>($36,611)</a:t>
+                      </a:r>
+                    </a:p>
+                  </a:txBody>
+                  <a:tcPr>
+                    <a:solidFill>
+                      <a:srgbClr val="FFFFFF"/>
+                    </a:solidFill>
+                  </a:tcPr>
+                </a:tc>
+                <a:tc>
+                  <a:txBody>
+                    <a:bodyPr/>
+                    <a:lstStyle/>
+                    <a:p>
+                      <a:pPr algn="r">
+                        <a:defRPr>
+                          <a:latin typeface="Roboto"/>
+                        </a:defRPr>
+                      </a:pPr>
+                      <a:r>
+                        <a:rPr sz="1050">
+                          <a:solidFill>
+                            <a:srgbClr val="B42318"/>
+                          </a:solidFill>
+                          <a:latin typeface="Roboto"/>
+                        </a:rPr>
+                        <a:t>($60,588)</a:t>
+                      </a:r>
+                    </a:p>
+                  </a:txBody>
+                  <a:tcPr>
+                    <a:solidFill>
+                      <a:srgbClr val="FFFFFF"/>
+                    </a:solidFill>
+                  </a:tcPr>
+                </a:tc>
+                <a:tc>
+                  <a:txBody>
+                    <a:bodyPr/>
+                    <a:lstStyle/>
+                    <a:p>
+                      <a:pPr algn="r">
+                        <a:defRPr>
+                          <a:latin typeface="Roboto"/>
+                        </a:defRPr>
+                      </a:pPr>
+                      <a:r>
+                        <a:rPr sz="1050">
+                          <a:solidFill>
+                            <a:srgbClr val="25342A"/>
+                          </a:solidFill>
+                          <a:latin typeface="Roboto"/>
+                        </a:rPr>
+                        <a:t>$0</a:t>
+                      </a:r>
+                    </a:p>
+                  </a:txBody>
+                  <a:tcPr>
+                    <a:solidFill>
+                      <a:srgbClr val="FFFFFF"/>
+                    </a:solidFill>
+                  </a:tcPr>
+                </a:tc>
+                <a:tc>
+                  <a:txBody>
+                    <a:bodyPr/>
+                    <a:lstStyle/>
+                    <a:p>
+                      <a:pPr algn="r">
+                        <a:defRPr>
+                          <a:latin typeface="Roboto"/>
+                        </a:defRPr>
+                      </a:pPr>
+                      <a:r>
+                        <a:rPr sz="1050">
+                          <a:solidFill>
+                            <a:srgbClr val="B42318"/>
+                          </a:solidFill>
+                          <a:latin typeface="Roboto"/>
+                        </a:rPr>
+                        <a:t>($6,080)</a:t>
+                      </a:r>
+                    </a:p>
+                  </a:txBody>
+                  <a:tcPr>
+                    <a:solidFill>
+                      <a:srgbClr val="FFFFFF"/>
+                    </a:solidFill>
+                  </a:tcPr>
+                </a:tc>
+                <a:tc>
+                  <a:txBody>
+                    <a:bodyPr/>
+                    <a:lstStyle/>
+                    <a:p>
+                      <a:pPr algn="r">
+                        <a:defRPr>
+                          <a:latin typeface="Roboto"/>
+                        </a:defRPr>
+                      </a:pPr>
+                      <a:r>
+                        <a:rPr sz="1050">
+                          <a:solidFill>
+                            <a:srgbClr val="25342A"/>
+                          </a:solidFill>
+                          <a:latin typeface="Roboto"/>
+                        </a:rPr>
+                        <a:t>$99,436</a:t>
+                      </a:r>
+                    </a:p>
+                  </a:txBody>
+                  <a:tcPr>
+                    <a:solidFill>
+                      <a:srgbClr val="FFFFFF"/>
+                    </a:solidFill>
+                  </a:tcPr>
+                </a:tc>
+                <a:tc>
+                  <a:txBody>
+                    <a:bodyPr/>
+                    <a:lstStyle/>
+                    <a:p>
+                      <a:pPr algn="r">
+                        <a:defRPr>
+                          <a:latin typeface="Roboto"/>
+                        </a:defRPr>
+                      </a:pPr>
+                      <a:r>
+                        <a:rPr sz="1050">
+                          <a:solidFill>
+                            <a:srgbClr val="25342A"/>
+                          </a:solidFill>
+                          <a:latin typeface="Roboto"/>
+                        </a:rPr>
+                        <a:t>$41,013</a:t>
+                      </a:r>
+                    </a:p>
+                  </a:txBody>
+                  <a:tcPr>
+                    <a:solidFill>
+                      <a:srgbClr val="FFFFFF"/>
+                    </a:solidFill>
+                  </a:tcPr>
+                </a:tc>
+              </a:tr>
+              <a:tr h="310896">
+                <a:tc>
+                  <a:txBody>
+                    <a:bodyPr/>
+                    <a:lstStyle/>
+                    <a:p>
+                      <a:pPr algn="l">
+                        <a:defRPr>
+                          <a:latin typeface="Roboto"/>
+                        </a:defRPr>
+                      </a:pPr>
+                      <a:r>
+                        <a:rPr sz="1050">
+                          <a:solidFill>
+                            <a:srgbClr val="25342A"/>
+                          </a:solidFill>
+                          <a:latin typeface="Roboto"/>
+                        </a:rPr>
+                        <a:t>9 Dec</a:t>
+                      </a:r>
+                    </a:p>
+                  </a:txBody>
+                  <a:tcPr>
+                    <a:solidFill>
+                      <a:srgbClr val="F7FAF7"/>
+                    </a:solidFill>
+                  </a:tcPr>
+                </a:tc>
+                <a:tc>
+                  <a:txBody>
+                    <a:bodyPr/>
+                    <a:lstStyle/>
+                    <a:p>
+                      <a:pPr algn="r">
+                        <a:defRPr>
+                          <a:latin typeface="Roboto"/>
+                        </a:defRPr>
+                      </a:pPr>
+                      <a:r>
+                        <a:rPr sz="1050">
+                          <a:solidFill>
+                            <a:srgbClr val="25342A"/>
+                          </a:solidFill>
+                          <a:latin typeface="Roboto"/>
+                        </a:rPr>
+                        <a:t>$99,436</a:t>
+                      </a:r>
+                    </a:p>
+                  </a:txBody>
+                  <a:tcPr>
+                    <a:solidFill>
+                      <a:srgbClr val="F7FAF7"/>
+                    </a:solidFill>
+                  </a:tcPr>
+                </a:tc>
+                <a:tc>
+                  <a:txBody>
+                    <a:bodyPr/>
+                    <a:lstStyle/>
+                    <a:p>
+                      <a:pPr algn="r">
+                        <a:defRPr>
+                          <a:latin typeface="Roboto"/>
+                        </a:defRPr>
+                      </a:pPr>
+                      <a:r>
+                        <a:rPr sz="1050">
+                          <a:solidFill>
+                            <a:srgbClr val="25342A"/>
+                          </a:solidFill>
+                          <a:latin typeface="Roboto"/>
+                        </a:rPr>
+                        <a:t>$0</a:t>
+                      </a:r>
+                    </a:p>
+                  </a:txBody>
+                  <a:tcPr>
+                    <a:solidFill>
+                      <a:srgbClr val="F7FAF7"/>
+                    </a:solidFill>
+                  </a:tcPr>
+                </a:tc>
+                <a:tc>
+                  <a:txBody>
+                    <a:bodyPr/>
+                    <a:lstStyle/>
+                    <a:p>
+                      <a:pPr algn="r">
+                        <a:defRPr>
+                          <a:latin typeface="Roboto"/>
+                        </a:defRPr>
+                      </a:pPr>
+                      <a:r>
+                        <a:rPr sz="1050">
+                          <a:solidFill>
+                            <a:srgbClr val="25342A"/>
+                          </a:solidFill>
+                          <a:latin typeface="Roboto"/>
+                        </a:rPr>
+                        <a:t>$42,694</a:t>
+                      </a:r>
+                    </a:p>
+                  </a:txBody>
+                  <a:tcPr>
+                    <a:solidFill>
+                      <a:srgbClr val="F7FAF7"/>
+                    </a:solidFill>
+                  </a:tcPr>
+                </a:tc>
+                <a:tc>
+                  <a:txBody>
+                    <a:bodyPr/>
+                    <a:lstStyle/>
+                    <a:p>
+                      <a:pPr algn="r">
+                        <a:defRPr>
+                          <a:latin typeface="Roboto"/>
+                        </a:defRPr>
+                      </a:pPr>
+                      <a:r>
+                        <a:rPr sz="1050">
+                          <a:solidFill>
+                            <a:srgbClr val="25342A"/>
+                          </a:solidFill>
+                          <a:latin typeface="Roboto"/>
+                        </a:rPr>
+                        <a:t>$0</a:t>
+                      </a:r>
+                    </a:p>
+                  </a:txBody>
+                  <a:tcPr>
+                    <a:solidFill>
+                      <a:srgbClr val="F7FAF7"/>
+                    </a:solidFill>
+                  </a:tcPr>
+                </a:tc>
+                <a:tc>
+                  <a:txBody>
+                    <a:bodyPr/>
+                    <a:lstStyle/>
+                    <a:p>
+                      <a:pPr algn="r">
+                        <a:defRPr>
+                          <a:latin typeface="Roboto"/>
+                        </a:defRPr>
+                      </a:pPr>
+                      <a:r>
+                        <a:rPr sz="1050">
+                          <a:solidFill>
+                            <a:srgbClr val="25342A"/>
+                          </a:solidFill>
+                          <a:latin typeface="Roboto"/>
+                        </a:rPr>
+                        <a:t>$0</a:t>
+                      </a:r>
+                    </a:p>
+                  </a:txBody>
+                  <a:tcPr>
+                    <a:solidFill>
+                      <a:srgbClr val="F7FAF7"/>
+                    </a:solidFill>
+                  </a:tcPr>
+                </a:tc>
+                <a:tc>
+                  <a:txBody>
+                    <a:bodyPr/>
+                    <a:lstStyle/>
+                    <a:p>
+                      <a:pPr algn="r">
+                        <a:defRPr>
+                          <a:latin typeface="Roboto"/>
+                        </a:defRPr>
+                      </a:pPr>
+                      <a:r>
+                        <a:rPr sz="1050">
+                          <a:solidFill>
+                            <a:srgbClr val="25342A"/>
+                          </a:solidFill>
+                          <a:latin typeface="Roboto"/>
+                        </a:rPr>
+                        <a:t>$0</a:t>
+                      </a:r>
+                    </a:p>
+                  </a:txBody>
+                  <a:tcPr>
+                    <a:solidFill>
+                      <a:srgbClr val="F7FAF7"/>
+                    </a:solidFill>
+                  </a:tcPr>
+                </a:tc>
+                <a:tc>
+                  <a:txBody>
+                    <a:bodyPr/>
+                    <a:lstStyle/>
+                    <a:p>
+                      <a:pPr algn="r">
+                        <a:defRPr>
+                          <a:latin typeface="Roboto"/>
+                        </a:defRPr>
+                      </a:pPr>
+                      <a:r>
+                        <a:rPr sz="1050">
+                          <a:solidFill>
+                            <a:srgbClr val="25342A"/>
+                          </a:solidFill>
+                          <a:latin typeface="Roboto"/>
+                        </a:rPr>
+                        <a:t>$0</a:t>
+                      </a:r>
+                    </a:p>
+                  </a:txBody>
+                  <a:tcPr>
+                    <a:solidFill>
+                      <a:srgbClr val="F7FAF7"/>
+                    </a:solidFill>
+                  </a:tcPr>
+                </a:tc>
+                <a:tc>
+                  <a:txBody>
+                    <a:bodyPr/>
+                    <a:lstStyle/>
+                    <a:p>
+                      <a:pPr algn="r">
+                        <a:defRPr>
+                          <a:latin typeface="Roboto"/>
+                        </a:defRPr>
+                      </a:pPr>
+                      <a:r>
+                        <a:rPr sz="1050">
+                          <a:solidFill>
+                            <a:srgbClr val="25342A"/>
+                          </a:solidFill>
+                          <a:latin typeface="Roboto"/>
+                        </a:rPr>
+                        <a:t>$142,130</a:t>
+                      </a:r>
+                    </a:p>
+                  </a:txBody>
+                  <a:tcPr>
+                    <a:solidFill>
+                      <a:srgbClr val="F7FAF7"/>
+                    </a:solidFill>
+                  </a:tcPr>
+                </a:tc>
+                <a:tc>
+                  <a:txBody>
+                    <a:bodyPr/>
+                    <a:lstStyle/>
+                    <a:p>
+                      <a:pPr algn="r">
+                        <a:defRPr>
+                          <a:latin typeface="Roboto"/>
+                        </a:defRPr>
+                      </a:pPr>
+                      <a:r>
+                        <a:rPr sz="1050">
+                          <a:solidFill>
+                            <a:srgbClr val="25342A"/>
+                          </a:solidFill>
+                          <a:latin typeface="Roboto"/>
+                        </a:rPr>
+                        <a:t>$106,410</a:t>
+                      </a:r>
+                    </a:p>
+                  </a:txBody>
+                  <a:tcPr>
+                    <a:solidFill>
+                      <a:srgbClr val="F7FAF7"/>
+                    </a:solidFill>
+                  </a:tcPr>
+                </a:tc>
+              </a:tr>
+              <a:tr h="310896">
+                <a:tc>
+                  <a:txBody>
+                    <a:bodyPr/>
+                    <a:lstStyle/>
+                    <a:p>
+                      <a:pPr algn="l">
+                        <a:defRPr>
+                          <a:latin typeface="Roboto"/>
+                        </a:defRPr>
+                      </a:pPr>
+                      <a:r>
+                        <a:rPr sz="1050">
+                          <a:solidFill>
+                            <a:srgbClr val="25342A"/>
+                          </a:solidFill>
+                          <a:latin typeface="Roboto"/>
+                        </a:rPr>
+                        <a:t>16 Dec</a:t>
+                      </a:r>
+                    </a:p>
+                  </a:txBody>
+                  <a:tcPr>
+                    <a:solidFill>
+                      <a:srgbClr val="FFFFFF"/>
+                    </a:solidFill>
+                  </a:tcPr>
+                </a:tc>
+                <a:tc>
+                  <a:txBody>
+                    <a:bodyPr/>
+                    <a:lstStyle/>
+                    <a:p>
+                      <a:pPr algn="r">
+                        <a:defRPr>
+                          <a:latin typeface="Roboto"/>
+                        </a:defRPr>
+                      </a:pPr>
+                      <a:r>
+                        <a:rPr sz="1050">
+                          <a:solidFill>
+                            <a:srgbClr val="25342A"/>
+                          </a:solidFill>
+                          <a:latin typeface="Roboto"/>
+                        </a:rPr>
+                        <a:t>$142,130</a:t>
+                      </a:r>
+                    </a:p>
+                  </a:txBody>
+                  <a:tcPr>
+                    <a:solidFill>
+                      <a:srgbClr val="FFFFFF"/>
+                    </a:solidFill>
+                  </a:tcPr>
+                </a:tc>
+                <a:tc>
+                  <a:txBody>
+                    <a:bodyPr/>
+                    <a:lstStyle/>
+                    <a:p>
+                      <a:pPr algn="r">
+                        <a:defRPr>
+                          <a:latin typeface="Roboto"/>
+                        </a:defRPr>
+                      </a:pPr>
+                      <a:r>
+                        <a:rPr sz="1050">
+                          <a:solidFill>
+                            <a:srgbClr val="25342A"/>
+                          </a:solidFill>
+                          <a:latin typeface="Roboto"/>
+                        </a:rPr>
+                        <a:t>$0</a:t>
+                      </a:r>
+                    </a:p>
+                  </a:txBody>
+                  <a:tcPr>
+                    <a:solidFill>
+                      <a:srgbClr val="FFFFFF"/>
+                    </a:solidFill>
+                  </a:tcPr>
+                </a:tc>
+                <a:tc>
+                  <a:txBody>
+                    <a:bodyPr/>
+                    <a:lstStyle/>
+                    <a:p>
+                      <a:pPr algn="r">
+                        <a:defRPr>
+                          <a:latin typeface="Roboto"/>
+                        </a:defRPr>
+                      </a:pPr>
+                      <a:r>
+                        <a:rPr sz="1050">
+                          <a:solidFill>
+                            <a:srgbClr val="25342A"/>
+                          </a:solidFill>
+                          <a:latin typeface="Roboto"/>
+                        </a:rPr>
+                        <a:t>$42,693</a:t>
+                      </a:r>
+                    </a:p>
+                  </a:txBody>
+                  <a:tcPr>
+                    <a:solidFill>
+                      <a:srgbClr val="FFFFFF"/>
+                    </a:solidFill>
+                  </a:tcPr>
+                </a:tc>
+                <a:tc>
+                  <a:txBody>
+                    <a:bodyPr/>
+                    <a:lstStyle/>
+                    <a:p>
+                      <a:pPr algn="r">
+                        <a:defRPr>
+                          <a:latin typeface="Roboto"/>
+                        </a:defRPr>
+                      </a:pPr>
+                      <a:r>
+                        <a:rPr sz="1050">
+                          <a:solidFill>
+                            <a:srgbClr val="B42318"/>
+                          </a:solidFill>
+                          <a:latin typeface="Roboto"/>
+                        </a:rPr>
+                        <a:t>($36,611)</a:t>
+                      </a:r>
+                    </a:p>
+                  </a:txBody>
+                  <a:tcPr>
+                    <a:solidFill>
+                      <a:srgbClr val="FFFFFF"/>
+                    </a:solidFill>
+                  </a:tcPr>
+                </a:tc>
+                <a:tc>
+                  <a:txBody>
+                    <a:bodyPr/>
+                    <a:lstStyle/>
+                    <a:p>
+                      <a:pPr algn="r">
+                        <a:defRPr>
+                          <a:latin typeface="Roboto"/>
+                        </a:defRPr>
+                      </a:pPr>
+                      <a:r>
+                        <a:rPr sz="1050">
+                          <a:solidFill>
+                            <a:srgbClr val="B42318"/>
+                          </a:solidFill>
+                          <a:latin typeface="Roboto"/>
+                        </a:rPr>
+                        <a:t>($60,588)</a:t>
+                      </a:r>
+                    </a:p>
+                  </a:txBody>
+                  <a:tcPr>
+                    <a:solidFill>
+                      <a:srgbClr val="FFFFFF"/>
+                    </a:solidFill>
+                  </a:tcPr>
+                </a:tc>
+                <a:tc>
+                  <a:txBody>
+                    <a:bodyPr/>
+                    <a:lstStyle/>
+                    <a:p>
+                      <a:pPr algn="r">
+                        <a:defRPr>
+                          <a:latin typeface="Roboto"/>
+                        </a:defRPr>
+                      </a:pPr>
+                      <a:r>
+                        <a:rPr sz="1050">
+                          <a:solidFill>
+                            <a:srgbClr val="25342A"/>
+                          </a:solidFill>
+                          <a:latin typeface="Roboto"/>
+                        </a:rPr>
+                        <a:t>$0</a:t>
+                      </a:r>
+                    </a:p>
+                  </a:txBody>
+                  <a:tcPr>
+                    <a:solidFill>
+                      <a:srgbClr val="FFFFFF"/>
+                    </a:solidFill>
+                  </a:tcPr>
+                </a:tc>
+                <a:tc>
+                  <a:txBody>
+                    <a:bodyPr/>
+                    <a:lstStyle/>
+                    <a:p>
+                      <a:pPr algn="r">
+                        <a:defRPr>
+                          <a:latin typeface="Roboto"/>
+                        </a:defRPr>
+                      </a:pPr>
+                      <a:r>
+                        <a:rPr sz="1050">
+                          <a:solidFill>
+                            <a:srgbClr val="25342A"/>
+                          </a:solidFill>
+                          <a:latin typeface="Roboto"/>
+                        </a:rPr>
+                        <a:t>$0</a:t>
+                      </a:r>
+                    </a:p>
+                  </a:txBody>
+                  <a:tcPr>
+                    <a:solidFill>
+                      <a:srgbClr val="FFFFFF"/>
+                    </a:solidFill>
+                  </a:tcPr>
+                </a:tc>
+                <a:tc>
+                  <a:txBody>
+                    <a:bodyPr/>
+                    <a:lstStyle/>
+                    <a:p>
+                      <a:pPr algn="r">
+                        <a:defRPr>
+                          <a:latin typeface="Roboto"/>
+                        </a:defRPr>
+                      </a:pPr>
+                      <a:r>
+                        <a:rPr sz="1050">
+                          <a:solidFill>
+                            <a:srgbClr val="25342A"/>
+                          </a:solidFill>
+                          <a:latin typeface="Roboto"/>
+                        </a:rPr>
+                        <a:t>$87,624</a:t>
+                      </a:r>
+                    </a:p>
+                  </a:txBody>
+                  <a:tcPr>
+                    <a:solidFill>
+                      <a:srgbClr val="FFFFFF"/>
+                    </a:solidFill>
+                  </a:tcPr>
+                </a:tc>
+                <a:tc>
+                  <a:txBody>
+                    <a:bodyPr/>
+                    <a:lstStyle/>
+                    <a:p>
+                      <a:pPr algn="r">
+                        <a:defRPr>
+                          <a:latin typeface="Roboto"/>
+                        </a:defRPr>
+                      </a:pPr>
+                      <a:r>
+                        <a:rPr sz="1050">
+                          <a:solidFill>
+                            <a:srgbClr val="25342A"/>
+                          </a:solidFill>
+                          <a:latin typeface="Roboto"/>
+                        </a:rPr>
+                        <a:t>$80,650</a:t>
+                      </a:r>
+                    </a:p>
+                  </a:txBody>
+                  <a:tcPr>
+                    <a:solidFill>
+                      <a:srgbClr val="FFFFFF"/>
+                    </a:solidFill>
+                  </a:tcPr>
+                </a:tc>
+              </a:tr>
+              <a:tr h="310896">
+                <a:tc>
+                  <a:txBody>
+                    <a:bodyPr/>
+                    <a:lstStyle/>
+                    <a:p>
+                      <a:pPr algn="l">
+                        <a:defRPr>
+                          <a:latin typeface="Roboto"/>
+                        </a:defRPr>
+                      </a:pPr>
+                      <a:r>
+                        <a:rPr sz="1050">
+                          <a:solidFill>
+                            <a:srgbClr val="25342A"/>
+                          </a:solidFill>
+                          <a:latin typeface="Roboto"/>
+                        </a:rPr>
+                        <a:t>23 Dec</a:t>
+                      </a:r>
+                    </a:p>
+                  </a:txBody>
+                  <a:tcPr>
+                    <a:solidFill>
+                      <a:srgbClr val="F7FAF7"/>
+                    </a:solidFill>
+                  </a:tcPr>
+                </a:tc>
+                <a:tc>
+                  <a:txBody>
+                    <a:bodyPr/>
+                    <a:lstStyle/>
+                    <a:p>
+                      <a:pPr algn="r">
+                        <a:defRPr>
+                          <a:latin typeface="Roboto"/>
+                        </a:defRPr>
+                      </a:pPr>
+                      <a:r>
+                        <a:rPr sz="1050">
+                          <a:solidFill>
+                            <a:srgbClr val="25342A"/>
+                          </a:solidFill>
+                          <a:latin typeface="Roboto"/>
+                        </a:rPr>
+                        <a:t>$87,624</a:t>
+                      </a:r>
+                    </a:p>
+                  </a:txBody>
+                  <a:tcPr>
+                    <a:solidFill>
+                      <a:srgbClr val="F7FAF7"/>
+                    </a:solidFill>
+                  </a:tcPr>
+                </a:tc>
+                <a:tc>
+                  <a:txBody>
+                    <a:bodyPr/>
+                    <a:lstStyle/>
+                    <a:p>
+                      <a:pPr algn="r">
+                        <a:defRPr>
+                          <a:latin typeface="Roboto"/>
+                        </a:defRPr>
+                      </a:pPr>
+                      <a:r>
+                        <a:rPr sz="1050">
+                          <a:solidFill>
+                            <a:srgbClr val="25342A"/>
+                          </a:solidFill>
+                          <a:latin typeface="Roboto"/>
+                        </a:rPr>
+                        <a:t>$0</a:t>
+                      </a:r>
+                    </a:p>
+                  </a:txBody>
+                  <a:tcPr>
+                    <a:solidFill>
+                      <a:srgbClr val="F7FAF7"/>
+                    </a:solidFill>
+                  </a:tcPr>
+                </a:tc>
+                <a:tc>
+                  <a:txBody>
+                    <a:bodyPr/>
+                    <a:lstStyle/>
+                    <a:p>
+                      <a:pPr algn="r">
+                        <a:defRPr>
+                          <a:latin typeface="Roboto"/>
+                        </a:defRPr>
+                      </a:pPr>
+                      <a:r>
+                        <a:rPr sz="1050">
+                          <a:solidFill>
+                            <a:srgbClr val="25342A"/>
+                          </a:solidFill>
+                          <a:latin typeface="Roboto"/>
+                        </a:rPr>
+                        <a:t>$42,694</a:t>
+                      </a:r>
+                    </a:p>
+                  </a:txBody>
+                  <a:tcPr>
+                    <a:solidFill>
+                      <a:srgbClr val="F7FAF7"/>
+                    </a:solidFill>
+                  </a:tcPr>
+                </a:tc>
+                <a:tc>
+                  <a:txBody>
+                    <a:bodyPr/>
+                    <a:lstStyle/>
+                    <a:p>
+                      <a:pPr algn="r">
+                        <a:defRPr>
+                          <a:latin typeface="Roboto"/>
+                        </a:defRPr>
+                      </a:pPr>
+                      <a:r>
+                        <a:rPr sz="1050">
+                          <a:solidFill>
+                            <a:srgbClr val="25342A"/>
+                          </a:solidFill>
+                          <a:latin typeface="Roboto"/>
+                        </a:rPr>
+                        <a:t>$0</a:t>
+                      </a:r>
+                    </a:p>
+                  </a:txBody>
+                  <a:tcPr>
+                    <a:solidFill>
+                      <a:srgbClr val="F7FAF7"/>
+                    </a:solidFill>
+                  </a:tcPr>
+                </a:tc>
+                <a:tc>
+                  <a:txBody>
+                    <a:bodyPr/>
+                    <a:lstStyle/>
+                    <a:p>
+                      <a:pPr algn="r">
+                        <a:defRPr>
+                          <a:latin typeface="Roboto"/>
+                        </a:defRPr>
+                      </a:pPr>
+                      <a:r>
+                        <a:rPr sz="1050">
+                          <a:solidFill>
+                            <a:srgbClr val="25342A"/>
+                          </a:solidFill>
+                          <a:latin typeface="Roboto"/>
+                        </a:rPr>
+                        <a:t>$0</a:t>
+                      </a:r>
+                    </a:p>
+                  </a:txBody>
+                  <a:tcPr>
+                    <a:solidFill>
+                      <a:srgbClr val="F7FAF7"/>
+                    </a:solidFill>
+                  </a:tcPr>
+                </a:tc>
+                <a:tc>
+                  <a:txBody>
+                    <a:bodyPr/>
+                    <a:lstStyle/>
+                    <a:p>
+                      <a:pPr algn="r">
+                        <a:defRPr>
+                          <a:latin typeface="Roboto"/>
+                        </a:defRPr>
+                      </a:pPr>
+                      <a:r>
+                        <a:rPr sz="1050">
+                          <a:solidFill>
+                            <a:srgbClr val="25342A"/>
+                          </a:solidFill>
+                          <a:latin typeface="Roboto"/>
+                        </a:rPr>
+                        <a:t>$0</a:t>
+                      </a:r>
+                    </a:p>
+                  </a:txBody>
+                  <a:tcPr>
+                    <a:solidFill>
+                      <a:srgbClr val="F7FAF7"/>
+                    </a:solidFill>
+                  </a:tcPr>
+                </a:tc>
+                <a:tc>
+                  <a:txBody>
+                    <a:bodyPr/>
+                    <a:lstStyle/>
+                    <a:p>
+                      <a:pPr algn="r">
+                        <a:defRPr>
+                          <a:latin typeface="Roboto"/>
+                        </a:defRPr>
+                      </a:pPr>
+                      <a:r>
+                        <a:rPr sz="1050">
+                          <a:solidFill>
+                            <a:srgbClr val="25342A"/>
+                          </a:solidFill>
+                          <a:latin typeface="Roboto"/>
+                        </a:rPr>
+                        <a:t>$0</a:t>
+                      </a:r>
+                    </a:p>
+                  </a:txBody>
+                  <a:tcPr>
+                    <a:solidFill>
+                      <a:srgbClr val="F7FAF7"/>
+                    </a:solidFill>
+                  </a:tcPr>
+                </a:tc>
+                <a:tc>
+                  <a:txBody>
+                    <a:bodyPr/>
+                    <a:lstStyle/>
+                    <a:p>
+                      <a:pPr algn="r">
+                        <a:defRPr>
+                          <a:latin typeface="Roboto"/>
+                        </a:defRPr>
+                      </a:pPr>
+                      <a:r>
+                        <a:rPr sz="1050">
+                          <a:solidFill>
+                            <a:srgbClr val="25342A"/>
+                          </a:solidFill>
+                          <a:latin typeface="Roboto"/>
+                        </a:rPr>
+                        <a:t>$130,318</a:t>
+                      </a:r>
+                    </a:p>
+                  </a:txBody>
+                  <a:tcPr>
+                    <a:solidFill>
+                      <a:srgbClr val="F7FAF7"/>
+                    </a:solidFill>
+                  </a:tcPr>
+                </a:tc>
+                <a:tc>
+                  <a:txBody>
+                    <a:bodyPr/>
+                    <a:lstStyle/>
+                    <a:p>
+                      <a:pPr algn="r">
+                        <a:defRPr>
+                          <a:latin typeface="Roboto"/>
+                        </a:defRPr>
+                      </a:pPr>
+                      <a:r>
+                        <a:rPr sz="1050">
+                          <a:solidFill>
+                            <a:srgbClr val="25342A"/>
+                          </a:solidFill>
+                          <a:latin typeface="Roboto"/>
+                        </a:rPr>
+                        <a:t>$94,598</a:t>
+                      </a:r>
+                    </a:p>
+                  </a:txBody>
+                  <a:tcPr>
+                    <a:solidFill>
+                      <a:srgbClr val="F7FAF7"/>
+                    </a:solidFill>
+                  </a:tcPr>
+                </a:tc>
+              </a:tr>
+              <a:tr h="310896">
+                <a:tc>
+                  <a:txBody>
+                    <a:bodyPr/>
+                    <a:lstStyle/>
+                    <a:p>
+                      <a:pPr algn="l">
+                        <a:defRPr>
+                          <a:latin typeface="Roboto"/>
+                        </a:defRPr>
+                      </a:pPr>
+                      <a:r>
+                        <a:rPr sz="1050">
+                          <a:solidFill>
+                            <a:srgbClr val="25342A"/>
+                          </a:solidFill>
+                          <a:latin typeface="Roboto"/>
+                        </a:rPr>
+                        <a:t>30 Dec</a:t>
+                      </a:r>
+                    </a:p>
+                  </a:txBody>
+                  <a:tcPr>
+                    <a:solidFill>
+                      <a:srgbClr val="FFFFFF"/>
+                    </a:solidFill>
+                  </a:tcPr>
+                </a:tc>
+                <a:tc>
+                  <a:txBody>
+                    <a:bodyPr/>
+                    <a:lstStyle/>
+                    <a:p>
+                      <a:pPr algn="r">
+                        <a:defRPr>
+                          <a:latin typeface="Roboto"/>
+                        </a:defRPr>
+                      </a:pPr>
+                      <a:r>
+                        <a:rPr sz="1050">
+                          <a:solidFill>
+                            <a:srgbClr val="25342A"/>
+                          </a:solidFill>
+                          <a:latin typeface="Roboto"/>
+                        </a:rPr>
+                        <a:t>$130,318</a:t>
+                      </a:r>
+                    </a:p>
+                  </a:txBody>
+                  <a:tcPr>
+                    <a:solidFill>
+                      <a:srgbClr val="FFFFFF"/>
+                    </a:solidFill>
+                  </a:tcPr>
+                </a:tc>
+                <a:tc>
+                  <a:txBody>
+                    <a:bodyPr/>
+                    <a:lstStyle/>
+                    <a:p>
+                      <a:pPr algn="r">
+                        <a:defRPr>
+                          <a:latin typeface="Roboto"/>
+                        </a:defRPr>
+                      </a:pPr>
+                      <a:r>
+                        <a:rPr sz="1050">
+                          <a:solidFill>
+                            <a:srgbClr val="25342A"/>
+                          </a:solidFill>
+                          <a:latin typeface="Roboto"/>
+                        </a:rPr>
+                        <a:t>$0</a:t>
+                      </a:r>
+                    </a:p>
+                  </a:txBody>
+                  <a:tcPr>
+                    <a:solidFill>
+                      <a:srgbClr val="FFFFFF"/>
+                    </a:solidFill>
+                  </a:tcPr>
+                </a:tc>
+                <a:tc>
+                  <a:txBody>
+                    <a:bodyPr/>
+                    <a:lstStyle/>
+                    <a:p>
+                      <a:pPr algn="r">
+                        <a:defRPr>
+                          <a:latin typeface="Roboto"/>
+                        </a:defRPr>
+                      </a:pPr>
+                      <a:r>
+                        <a:rPr sz="1050">
+                          <a:solidFill>
+                            <a:srgbClr val="25342A"/>
+                          </a:solidFill>
+                          <a:latin typeface="Roboto"/>
+                        </a:rPr>
+                        <a:t>$41,129</a:t>
+                      </a:r>
+                    </a:p>
+                  </a:txBody>
+                  <a:tcPr>
+                    <a:solidFill>
+                      <a:srgbClr val="FFFFFF"/>
+                    </a:solidFill>
+                  </a:tcPr>
+                </a:tc>
+                <a:tc>
+                  <a:txBody>
+                    <a:bodyPr/>
+                    <a:lstStyle/>
+                    <a:p>
+                      <a:pPr algn="r">
+                        <a:defRPr>
+                          <a:latin typeface="Roboto"/>
+                        </a:defRPr>
+                      </a:pPr>
+                      <a:r>
+                        <a:rPr sz="1050">
+                          <a:solidFill>
+                            <a:srgbClr val="B42318"/>
+                          </a:solidFill>
+                          <a:latin typeface="Roboto"/>
+                        </a:rPr>
+                        <a:t>($36,611)</a:t>
+                      </a:r>
+                    </a:p>
+                  </a:txBody>
+                  <a:tcPr>
+                    <a:solidFill>
+                      <a:srgbClr val="FFFFFF"/>
+                    </a:solidFill>
+                  </a:tcPr>
+                </a:tc>
+                <a:tc>
+                  <a:txBody>
+                    <a:bodyPr/>
+                    <a:lstStyle/>
+                    <a:p>
+                      <a:pPr algn="r">
+                        <a:defRPr>
+                          <a:latin typeface="Roboto"/>
+                        </a:defRPr>
+                      </a:pPr>
+                      <a:r>
+                        <a:rPr sz="1050">
+                          <a:solidFill>
+                            <a:srgbClr val="25342A"/>
+                          </a:solidFill>
+                          <a:latin typeface="Roboto"/>
+                        </a:rPr>
+                        <a:t>$0</a:t>
+                      </a:r>
+                    </a:p>
+                  </a:txBody>
+                  <a:tcPr>
+                    <a:solidFill>
+                      <a:srgbClr val="FFFFFF"/>
+                    </a:solidFill>
+                  </a:tcPr>
+                </a:tc>
+                <a:tc>
+                  <a:txBody>
+                    <a:bodyPr/>
+                    <a:lstStyle/>
+                    <a:p>
+                      <a:pPr algn="r">
+                        <a:defRPr>
+                          <a:latin typeface="Roboto"/>
+                        </a:defRPr>
+                      </a:pPr>
+                      <a:r>
+                        <a:rPr sz="1050">
+                          <a:solidFill>
+                            <a:srgbClr val="25342A"/>
+                          </a:solidFill>
+                          <a:latin typeface="Roboto"/>
+                        </a:rPr>
+                        <a:t>$0</a:t>
+                      </a:r>
+                    </a:p>
+                  </a:txBody>
+                  <a:tcPr>
+                    <a:solidFill>
+                      <a:srgbClr val="FFFFFF"/>
+                    </a:solidFill>
+                  </a:tcPr>
+                </a:tc>
+                <a:tc>
+                  <a:txBody>
+                    <a:bodyPr/>
+                    <a:lstStyle/>
+                    <a:p>
+                      <a:pPr algn="r">
+                        <a:defRPr>
+                          <a:latin typeface="Roboto"/>
+                        </a:defRPr>
+                      </a:pPr>
+                      <a:r>
+                        <a:rPr sz="1050">
+                          <a:solidFill>
+                            <a:srgbClr val="B42318"/>
+                          </a:solidFill>
+                          <a:latin typeface="Roboto"/>
+                        </a:rPr>
+                        <a:t>($5,000)</a:t>
+                      </a:r>
+                    </a:p>
+                  </a:txBody>
+                  <a:tcPr>
+                    <a:solidFill>
+                      <a:srgbClr val="FFFFFF"/>
+                    </a:solidFill>
+                  </a:tcPr>
+                </a:tc>
+                <a:tc>
+                  <a:txBody>
+                    <a:bodyPr/>
+                    <a:lstStyle/>
+                    <a:p>
+                      <a:pPr algn="r">
+                        <a:defRPr>
+                          <a:latin typeface="Roboto"/>
+                        </a:defRPr>
+                      </a:pPr>
+                      <a:r>
+                        <a:rPr sz="1050">
+                          <a:solidFill>
+                            <a:srgbClr val="25342A"/>
+                          </a:solidFill>
+                          <a:latin typeface="Roboto"/>
+                        </a:rPr>
+                        <a:t>$129,836</a:t>
+                      </a:r>
+                    </a:p>
+                  </a:txBody>
+                  <a:tcPr>
+                    <a:solidFill>
+                      <a:srgbClr val="FFFFFF"/>
+                    </a:solidFill>
+                  </a:tcPr>
+                </a:tc>
+                <a:tc>
+                  <a:txBody>
+                    <a:bodyPr/>
+                    <a:lstStyle/>
+                    <a:p>
+                      <a:pPr algn="r">
+                        <a:defRPr>
+                          <a:latin typeface="Roboto"/>
+                        </a:defRPr>
+                      </a:pPr>
+                      <a:r>
+                        <a:rPr sz="1050">
+                          <a:solidFill>
+                            <a:srgbClr val="25342A"/>
+                          </a:solidFill>
+                          <a:latin typeface="Roboto"/>
+                        </a:rPr>
+                        <a:t>$100,681</a:t>
+                      </a:r>
+                    </a:p>
+                  </a:txBody>
+                  <a:tcPr>
+                    <a:solidFill>
+                      <a:srgbClr val="FFFFFF"/>
+                    </a:solidFill>
+                  </a:tcPr>
+                </a:tc>
+              </a:tr>
+            </a:tbl>
           </a:graphicData>
         </a:graphic>
       </p:graphicFrame>
@@ -7790,7 +11340,7 @@
                 </a:solidFill>
                 <a:latin typeface="Roboto"/>
               </a:rPr>
-              <a:t>Data retrieved 2pm, Tue 6 Oct 2026 · Generated 8 Oct 2026, 9:35am · Sample data · Made with Python (python-pptx)</a:t>
+              <a:t>Data retrieved 2pm, Tue 6 Oct 2026 · Generated 9 Oct 2026, 8:41am · Sample data · Made with Python (python-pptx)</a:t>
             </a:r>
           </a:p>
         </p:txBody>
@@ -7865,7 +11415,7 @@
         <p:spPr>
           <a:xfrm>
             <a:off x="457200" y="384048"/>
-            <a:ext cx="11277295" cy="475488"/>
+            <a:ext cx="11277295" cy="719328"/>
           </a:xfrm>
         </p:spPr>
         <p:txBody>
@@ -7878,13 +11428,13 @@
               </a:defRPr>
             </a:pPr>
             <a:r>
-              <a:rPr sz="2400" b="1">
+              <a:rPr sz="2000" b="1">
                 <a:solidFill>
                   <a:srgbClr val="25342A"/>
                 </a:solidFill>
                 <a:latin typeface="Roboto"/>
               </a:rPr>
-              <a:t>13 weeks, week by week</a:t>
+              <a:t>Invoices past the customer's usual payment date ($8,734): the forecast assumes these arrive within a week (1 of 2)</a:t>
             </a:r>
           </a:p>
         </p:txBody>
@@ -7975,56 +11525,17 @@
           </a:p>
         </p:txBody>
       </p:sp>
-      <p:sp>
-        <p:nvSpPr>
-          <p:cNvPr id="5" name="TextBox 4"/>
-          <p:cNvSpPr txBox="1"/>
-          <p:nvPr/>
-        </p:nvSpPr>
-        <p:spPr>
-          <a:xfrm>
-            <a:off x="457200" y="914400"/>
-            <a:ext cx="11277295" cy="263652"/>
-          </a:xfrm>
-          <a:prstGeom prst="rect">
-            <a:avLst/>
-          </a:prstGeom>
-          <a:noFill/>
-        </p:spPr>
-        <p:txBody>
-          <a:bodyPr wrap="square" lIns="45720" rIns="45720">
-            <a:spAutoFit/>
-          </a:bodyPr>
-          <a:lstStyle/>
-          <a:p>
-            <a:pPr>
-              <a:defRPr>
-                <a:latin typeface="Roboto"/>
-              </a:defRPr>
-            </a:pPr>
-            <a:r>
-              <a:rPr sz="1200" b="0">
-                <a:solidFill>
-                  <a:srgbClr val="5F6F63"/>
-                </a:solidFill>
-                <a:latin typeface="Roboto"/>
-              </a:rPr>
-              <a:t>Lowest in the week: amber below one pay run ($37,800), red below zero.</a:t>
-            </a:r>
-          </a:p>
-        </p:txBody>
-      </p:sp>
       <p:graphicFrame>
         <p:nvGraphicFramePr>
-          <p:cNvPr id="6" name="Table 5"/>
+          <p:cNvPr id="5" name="Table 4"/>
           <p:cNvGraphicFramePr>
             <a:graphicFrameLocks noGrp="1"/>
           </p:cNvGraphicFramePr>
           <p:nvPr/>
         </p:nvGraphicFramePr>
         <p:xfrm>
-          <a:off x="457200" y="1278636"/>
-          <a:ext cx="11277295" cy="4352544"/>
+          <a:off x="457200" y="1203960"/>
+          <a:ext cx="11277295" cy="4663440"/>
         </p:xfrm>
         <a:graphic>
           <a:graphicData uri="http://schemas.openxmlformats.org/drawingml/2006/table">
@@ -8033,15 +11544,11 @@
                 <a:tableStyleId>{5C22544A-7EE6-4342-B048-85BDC9FD1C3A}</a:tableStyleId>
               </a:tblPr>
               <a:tblGrid>
-                <a:gridCol w="1253032"/>
-                <a:gridCol w="1253032"/>
-                <a:gridCol w="1253032"/>
-                <a:gridCol w="1253032"/>
-                <a:gridCol w="1253032"/>
-                <a:gridCol w="1253032"/>
-                <a:gridCol w="1253032"/>
-                <a:gridCol w="1253032"/>
-                <a:gridCol w="1253039"/>
+                <a:gridCol w="2255459"/>
+                <a:gridCol w="2255459"/>
+                <a:gridCol w="2255459"/>
+                <a:gridCol w="2255459"/>
+                <a:gridCol w="2255459"/>
               </a:tblGrid>
               <a:tr h="310896">
                 <a:tc>
@@ -8061,7 +11568,7 @@
                           </a:solidFill>
                           <a:latin typeface="Roboto"/>
                         </a:rPr>
-                        <a:t>Week ending</a:t>
+                        <a:t>Customer or job</a:t>
                       </a:r>
                     </a:p>
                   </a:txBody>
@@ -8076,7 +11583,7 @@
                     <a:bodyPr/>
                     <a:lstStyle/>
                     <a:p>
-                      <a:pPr algn="r">
+                      <a:pPr algn="l">
                         <a:defRPr>
                           <a:latin typeface="Roboto"/>
                         </a:defRPr>
@@ -8088,7 +11595,7 @@
                           </a:solidFill>
                           <a:latin typeface="Roboto"/>
                         </a:rPr>
-                        <a:t>Cash at start</a:t>
+                        <a:t>Invoiced</a:t>
                       </a:r>
                     </a:p>
                   </a:txBody>
@@ -8115,7 +11622,7 @@
                           </a:solidFill>
                           <a:latin typeface="Roboto"/>
                         </a:rPr>
-                        <a:t>Unpaid invoices collected</a:t>
+                        <a:t>Amount (incl. GST)</a:t>
                       </a:r>
                     </a:p>
                   </a:txBody>
@@ -8142,7 +11649,7 @@
                           </a:solidFill>
                           <a:latin typeface="Roboto"/>
                         </a:rPr>
-                        <a:t>New work collected</a:t>
+                        <a:t>Usually pays in (days)</a:t>
                       </a:r>
                     </a:p>
                   </a:txBody>
@@ -8169,115 +11676,7 @@
                           </a:solidFill>
                           <a:latin typeface="Roboto"/>
                         </a:rPr>
-                        <a:t>Wages</a:t>
-                      </a:r>
-                    </a:p>
-                  </a:txBody>
-                  <a:tcPr>
-                    <a:solidFill>
-                      <a:srgbClr val="2F7A5D"/>
-                    </a:solidFill>
-                  </a:tcPr>
-                </a:tc>
-                <a:tc>
-                  <a:txBody>
-                    <a:bodyPr/>
-                    <a:lstStyle/>
-                    <a:p>
-                      <a:pPr algn="r">
-                        <a:defRPr>
-                          <a:latin typeface="Roboto"/>
-                        </a:defRPr>
-                      </a:pPr>
-                      <a:r>
-                        <a:rPr sz="1100" b="1">
-                          <a:solidFill>
-                            <a:srgbClr val="FFFFFF"/>
-                          </a:solidFill>
-                          <a:latin typeface="Roboto"/>
-                        </a:rPr>
-                        <a:t>Suppliers and overheads</a:t>
-                      </a:r>
-                    </a:p>
-                  </a:txBody>
-                  <a:tcPr>
-                    <a:solidFill>
-                      <a:srgbClr val="2F7A5D"/>
-                    </a:solidFill>
-                  </a:tcPr>
-                </a:tc>
-                <a:tc>
-                  <a:txBody>
-                    <a:bodyPr/>
-                    <a:lstStyle/>
-                    <a:p>
-                      <a:pPr algn="r">
-                        <a:defRPr>
-                          <a:latin typeface="Roboto"/>
-                        </a:defRPr>
-                      </a:pPr>
-                      <a:r>
-                        <a:rPr sz="1100" b="1">
-                          <a:solidFill>
-                            <a:srgbClr val="FFFFFF"/>
-                          </a:solidFill>
-                          <a:latin typeface="Roboto"/>
-                        </a:rPr>
-                        <a:t>Tax, interest and finance</a:t>
-                      </a:r>
-                    </a:p>
-                  </a:txBody>
-                  <a:tcPr>
-                    <a:solidFill>
-                      <a:srgbClr val="2F7A5D"/>
-                    </a:solidFill>
-                  </a:tcPr>
-                </a:tc>
-                <a:tc>
-                  <a:txBody>
-                    <a:bodyPr/>
-                    <a:lstStyle/>
-                    <a:p>
-                      <a:pPr algn="r">
-                        <a:defRPr>
-                          <a:latin typeface="Roboto"/>
-                        </a:defRPr>
-                      </a:pPr>
-                      <a:r>
-                        <a:rPr sz="1100" b="1">
-                          <a:solidFill>
-                            <a:srgbClr val="FFFFFF"/>
-                          </a:solidFill>
-                          <a:latin typeface="Roboto"/>
-                        </a:rPr>
-                        <a:t>Cash at end</a:t>
-                      </a:r>
-                    </a:p>
-                  </a:txBody>
-                  <a:tcPr>
-                    <a:solidFill>
-                      <a:srgbClr val="2F7A5D"/>
-                    </a:solidFill>
-                  </a:tcPr>
-                </a:tc>
-                <a:tc>
-                  <a:txBody>
-                    <a:bodyPr/>
-                    <a:lstStyle/>
-                    <a:p>
-                      <a:pPr algn="r">
-                        <a:defRPr>
-                          <a:latin typeface="Roboto"/>
-                        </a:defRPr>
-                      </a:pPr>
-                      <a:r>
-                        <a:rPr sz="1100" b="1">
-                          <a:solidFill>
-                            <a:srgbClr val="FFFFFF"/>
-                          </a:solidFill>
-                          <a:latin typeface="Roboto"/>
-                        </a:rPr>
-                        <a:t>Lowest in the week</a:t>
+                        <a:t>Days since invoiced</a:t>
                       </a:r>
                     </a:p>
                   </a:txBody>
@@ -8306,7 +11705,7 @@
                           </a:solidFill>
                           <a:latin typeface="Roboto"/>
                         </a:rPr>
-                        <a:t>7 Oct</a:t>
+                        <a:t>Call-out 15, September</a:t>
                       </a:r>
                     </a:p>
                   </a:txBody>
@@ -8321,19 +11720,19 @@
                     <a:bodyPr/>
                     <a:lstStyle/>
                     <a:p>
-                      <a:pPr algn="r">
-                        <a:defRPr>
-                          <a:latin typeface="Roboto"/>
-                        </a:defRPr>
-                      </a:pPr>
-                      <a:r>
-                        <a:rPr sz="1050">
-                          <a:solidFill>
-                            <a:srgbClr val="25342A"/>
-                          </a:solidFill>
-                          <a:latin typeface="Roboto"/>
-                        </a:rPr>
-                        <a:t>$59,746</a:t>
+                      <a:pPr algn="l">
+                        <a:defRPr>
+                          <a:latin typeface="Roboto"/>
+                        </a:defRPr>
+                      </a:pPr>
+                      <a:r>
+                        <a:rPr sz="1050">
+                          <a:solidFill>
+                            <a:srgbClr val="25342A"/>
+                          </a:solidFill>
+                          <a:latin typeface="Roboto"/>
+                        </a:rPr>
+                        <a:t>15 Sep</a:t>
                       </a:r>
                     </a:p>
                   </a:txBody>
@@ -8360,7 +11759,7 @@
                           </a:solidFill>
                           <a:latin typeface="Roboto"/>
                         </a:rPr>
-                        <a:t>$94,563</a:t>
+                        <a:t>$932</a:t>
                       </a:r>
                     </a:p>
                   </a:txBody>
@@ -8387,7 +11786,7 @@
                           </a:solidFill>
                           <a:latin typeface="Roboto"/>
                         </a:rPr>
-                        <a:t>$3,872</a:t>
+                        <a:t>4</a:t>
                       </a:r>
                     </a:p>
                   </a:txBody>
@@ -8410,119 +11809,11 @@
                       <a:r>
                         <a:rPr sz="1050">
                           <a:solidFill>
-                            <a:srgbClr val="B42318"/>
-                          </a:solidFill>
-                          <a:latin typeface="Roboto"/>
-                        </a:rPr>
-                        <a:t>($37,800)</a:t>
-                      </a:r>
-                    </a:p>
-                  </a:txBody>
-                  <a:tcPr>
-                    <a:solidFill>
-                      <a:srgbClr val="FFFFFF"/>
-                    </a:solidFill>
-                  </a:tcPr>
-                </a:tc>
-                <a:tc>
-                  <a:txBody>
-                    <a:bodyPr/>
-                    <a:lstStyle/>
-                    <a:p>
-                      <a:pPr algn="r">
-                        <a:defRPr>
-                          <a:latin typeface="Roboto"/>
-                        </a:defRPr>
-                      </a:pPr>
-                      <a:r>
-                        <a:rPr sz="1050">
-                          <a:solidFill>
-                            <a:srgbClr val="25342A"/>
-                          </a:solidFill>
-                          <a:latin typeface="Roboto"/>
-                        </a:rPr>
-                        <a:t>$0</a:t>
-                      </a:r>
-                    </a:p>
-                  </a:txBody>
-                  <a:tcPr>
-                    <a:solidFill>
-                      <a:srgbClr val="FFFFFF"/>
-                    </a:solidFill>
-                  </a:tcPr>
-                </a:tc>
-                <a:tc>
-                  <a:txBody>
-                    <a:bodyPr/>
-                    <a:lstStyle/>
-                    <a:p>
-                      <a:pPr algn="r">
-                        <a:defRPr>
-                          <a:latin typeface="Roboto"/>
-                        </a:defRPr>
-                      </a:pPr>
-                      <a:r>
-                        <a:rPr sz="1050">
-                          <a:solidFill>
-                            <a:srgbClr val="25342A"/>
-                          </a:solidFill>
-                          <a:latin typeface="Roboto"/>
-                        </a:rPr>
-                        <a:t>$0</a:t>
-                      </a:r>
-                    </a:p>
-                  </a:txBody>
-                  <a:tcPr>
-                    <a:solidFill>
-                      <a:srgbClr val="FFFFFF"/>
-                    </a:solidFill>
-                  </a:tcPr>
-                </a:tc>
-                <a:tc>
-                  <a:txBody>
-                    <a:bodyPr/>
-                    <a:lstStyle/>
-                    <a:p>
-                      <a:pPr algn="r">
-                        <a:defRPr>
-                          <a:latin typeface="Roboto"/>
-                        </a:defRPr>
-                      </a:pPr>
-                      <a:r>
-                        <a:rPr sz="1050">
-                          <a:solidFill>
-                            <a:srgbClr val="25342A"/>
-                          </a:solidFill>
-                          <a:latin typeface="Roboto"/>
-                        </a:rPr>
-                        <a:t>$120,381</a:t>
-                      </a:r>
-                    </a:p>
-                  </a:txBody>
-                  <a:tcPr>
-                    <a:solidFill>
-                      <a:srgbClr val="FFFFFF"/>
-                    </a:solidFill>
-                  </a:tcPr>
-                </a:tc>
-                <a:tc>
-                  <a:txBody>
-                    <a:bodyPr/>
-                    <a:lstStyle/>
-                    <a:p>
-                      <a:pPr algn="r">
-                        <a:defRPr>
-                          <a:latin typeface="Roboto"/>
-                        </a:defRPr>
-                      </a:pPr>
-                      <a:r>
-                        <a:rPr sz="1050">
-                          <a:solidFill>
-                            <a:srgbClr val="25342A"/>
-                          </a:solidFill>
-                          <a:latin typeface="Roboto"/>
-                        </a:rPr>
-                        <a:t>$60,746</a:t>
+                            <a:srgbClr val="25342A"/>
+                          </a:solidFill>
+                          <a:latin typeface="Roboto"/>
+                        </a:rPr>
+                        <a:t>15</a:t>
                       </a:r>
                     </a:p>
                   </a:txBody>
@@ -8551,7 +11842,7 @@
                           </a:solidFill>
                           <a:latin typeface="Roboto"/>
                         </a:rPr>
-                        <a:t>14 Oct</a:t>
+                        <a:t>Call-out 9, September</a:t>
                       </a:r>
                     </a:p>
                   </a:txBody>
@@ -8566,19 +11857,19 @@
                     <a:bodyPr/>
                     <a:lstStyle/>
                     <a:p>
-                      <a:pPr algn="r">
-                        <a:defRPr>
-                          <a:latin typeface="Roboto"/>
-                        </a:defRPr>
-                      </a:pPr>
-                      <a:r>
-                        <a:rPr sz="1050">
-                          <a:solidFill>
-                            <a:srgbClr val="25342A"/>
-                          </a:solidFill>
-                          <a:latin typeface="Roboto"/>
-                        </a:rPr>
-                        <a:t>$120,381</a:t>
+                      <a:pPr algn="l">
+                        <a:defRPr>
+                          <a:latin typeface="Roboto"/>
+                        </a:defRPr>
+                      </a:pPr>
+                      <a:r>
+                        <a:rPr sz="1050">
+                          <a:solidFill>
+                            <a:srgbClr val="25342A"/>
+                          </a:solidFill>
+                          <a:latin typeface="Roboto"/>
+                        </a:rPr>
+                        <a:t>22 Sep</a:t>
                       </a:r>
                     </a:p>
                   </a:txBody>
@@ -8605,7 +11896,7 @@
                           </a:solidFill>
                           <a:latin typeface="Roboto"/>
                         </a:rPr>
-                        <a:t>$18,600</a:t>
+                        <a:t>$917</a:t>
                       </a:r>
                     </a:p>
                   </a:txBody>
@@ -8632,7 +11923,7 @@
                           </a:solidFill>
                           <a:latin typeface="Roboto"/>
                         </a:rPr>
-                        <a:t>$6,454</a:t>
+                        <a:t>4</a:t>
                       </a:r>
                     </a:p>
                   </a:txBody>
@@ -8659,115 +11950,7 @@
                           </a:solidFill>
                           <a:latin typeface="Roboto"/>
                         </a:rPr>
-                        <a:t>$0</a:t>
-                      </a:r>
-                    </a:p>
-                  </a:txBody>
-                  <a:tcPr>
-                    <a:solidFill>
-                      <a:srgbClr val="F7FAF7"/>
-                    </a:solidFill>
-                  </a:tcPr>
-                </a:tc>
-                <a:tc>
-                  <a:txBody>
-                    <a:bodyPr/>
-                    <a:lstStyle/>
-                    <a:p>
-                      <a:pPr algn="r">
-                        <a:defRPr>
-                          <a:latin typeface="Roboto"/>
-                        </a:defRPr>
-                      </a:pPr>
-                      <a:r>
-                        <a:rPr sz="1050">
-                          <a:solidFill>
-                            <a:srgbClr val="25342A"/>
-                          </a:solidFill>
-                          <a:latin typeface="Roboto"/>
-                        </a:rPr>
-                        <a:t>$0</a:t>
-                      </a:r>
-                    </a:p>
-                  </a:txBody>
-                  <a:tcPr>
-                    <a:solidFill>
-                      <a:srgbClr val="F7FAF7"/>
-                    </a:solidFill>
-                  </a:tcPr>
-                </a:tc>
-                <a:tc>
-                  <a:txBody>
-                    <a:bodyPr/>
-                    <a:lstStyle/>
-                    <a:p>
-                      <a:pPr algn="r">
-                        <a:defRPr>
-                          <a:latin typeface="Roboto"/>
-                        </a:defRPr>
-                      </a:pPr>
-                      <a:r>
-                        <a:rPr sz="1050">
-                          <a:solidFill>
-                            <a:srgbClr val="25342A"/>
-                          </a:solidFill>
-                          <a:latin typeface="Roboto"/>
-                        </a:rPr>
-                        <a:t>$0</a:t>
-                      </a:r>
-                    </a:p>
-                  </a:txBody>
-                  <a:tcPr>
-                    <a:solidFill>
-                      <a:srgbClr val="F7FAF7"/>
-                    </a:solidFill>
-                  </a:tcPr>
-                </a:tc>
-                <a:tc>
-                  <a:txBody>
-                    <a:bodyPr/>
-                    <a:lstStyle/>
-                    <a:p>
-                      <a:pPr algn="r">
-                        <a:defRPr>
-                          <a:latin typeface="Roboto"/>
-                        </a:defRPr>
-                      </a:pPr>
-                      <a:r>
-                        <a:rPr sz="1050">
-                          <a:solidFill>
-                            <a:srgbClr val="25342A"/>
-                          </a:solidFill>
-                          <a:latin typeface="Roboto"/>
-                        </a:rPr>
-                        <a:t>$145,435</a:t>
-                      </a:r>
-                    </a:p>
-                  </a:txBody>
-                  <a:tcPr>
-                    <a:solidFill>
-                      <a:srgbClr val="F7FAF7"/>
-                    </a:solidFill>
-                  </a:tcPr>
-                </a:tc>
-                <a:tc>
-                  <a:txBody>
-                    <a:bodyPr/>
-                    <a:lstStyle/>
-                    <a:p>
-                      <a:pPr algn="r">
-                        <a:defRPr>
-                          <a:latin typeface="Roboto"/>
-                        </a:defRPr>
-                      </a:pPr>
-                      <a:r>
-                        <a:rPr sz="1050">
-                          <a:solidFill>
-                            <a:srgbClr val="25342A"/>
-                          </a:solidFill>
-                          <a:latin typeface="Roboto"/>
-                        </a:rPr>
-                        <a:t>$121,672</a:t>
+                        <a:t>8</a:t>
                       </a:r>
                     </a:p>
                   </a:txBody>
@@ -8796,7 +11979,7 @@
                           </a:solidFill>
                           <a:latin typeface="Roboto"/>
                         </a:rPr>
-                        <a:t>21 Oct</a:t>
+                        <a:t>Call-out 40, September</a:t>
                       </a:r>
                     </a:p>
                   </a:txBody>
@@ -8811,19 +11994,19 @@
                     <a:bodyPr/>
                     <a:lstStyle/>
                     <a:p>
-                      <a:pPr algn="r">
-                        <a:defRPr>
-                          <a:latin typeface="Roboto"/>
-                        </a:defRPr>
-                      </a:pPr>
-                      <a:r>
-                        <a:rPr sz="1050">
-                          <a:solidFill>
-                            <a:srgbClr val="25342A"/>
-                          </a:solidFill>
-                          <a:latin typeface="Roboto"/>
-                        </a:rPr>
-                        <a:t>$145,435</a:t>
+                      <a:pPr algn="l">
+                        <a:defRPr>
+                          <a:latin typeface="Roboto"/>
+                        </a:defRPr>
+                      </a:pPr>
+                      <a:r>
+                        <a:rPr sz="1050">
+                          <a:solidFill>
+                            <a:srgbClr val="25342A"/>
+                          </a:solidFill>
+                          <a:latin typeface="Roboto"/>
+                        </a:rPr>
+                        <a:t>1 Sep</a:t>
                       </a:r>
                     </a:p>
                   </a:txBody>
@@ -8850,7 +12033,7 @@
                           </a:solidFill>
                           <a:latin typeface="Roboto"/>
                         </a:rPr>
-                        <a:t>$12,900</a:t>
+                        <a:t>$735</a:t>
                       </a:r>
                     </a:p>
                   </a:txBody>
@@ -8877,7 +12060,7 @@
                           </a:solidFill>
                           <a:latin typeface="Roboto"/>
                         </a:rPr>
-                        <a:t>$6,454</a:t>
+                        <a:t>4</a:t>
                       </a:r>
                     </a:p>
                   </a:txBody>
@@ -8900,119 +12083,11 @@
                       <a:r>
                         <a:rPr sz="1050">
                           <a:solidFill>
-                            <a:srgbClr val="B42318"/>
-                          </a:solidFill>
-                          <a:latin typeface="Roboto"/>
-                        </a:rPr>
-                        <a:t>($37,800)</a:t>
-                      </a:r>
-                    </a:p>
-                  </a:txBody>
-                  <a:tcPr>
-                    <a:solidFill>
-                      <a:srgbClr val="FFFFFF"/>
-                    </a:solidFill>
-                  </a:tcPr>
-                </a:tc>
-                <a:tc>
-                  <a:txBody>
-                    <a:bodyPr/>
-                    <a:lstStyle/>
-                    <a:p>
-                      <a:pPr algn="r">
-                        <a:defRPr>
-                          <a:latin typeface="Roboto"/>
-                        </a:defRPr>
-                      </a:pPr>
-                      <a:r>
-                        <a:rPr sz="1050">
-                          <a:solidFill>
-                            <a:srgbClr val="B42318"/>
-                          </a:solidFill>
-                          <a:latin typeface="Roboto"/>
-                        </a:rPr>
-                        <a:t>($55,080)</a:t>
-                      </a:r>
-                    </a:p>
-                  </a:txBody>
-                  <a:tcPr>
-                    <a:solidFill>
-                      <a:srgbClr val="FFFFFF"/>
-                    </a:solidFill>
-                  </a:tcPr>
-                </a:tc>
-                <a:tc>
-                  <a:txBody>
-                    <a:bodyPr/>
-                    <a:lstStyle/>
-                    <a:p>
-                      <a:pPr algn="r">
-                        <a:defRPr>
-                          <a:latin typeface="Roboto"/>
-                        </a:defRPr>
-                      </a:pPr>
-                      <a:r>
-                        <a:rPr sz="1050">
-                          <a:solidFill>
-                            <a:srgbClr val="25342A"/>
-                          </a:solidFill>
-                          <a:latin typeface="Roboto"/>
-                        </a:rPr>
-                        <a:t>$0</a:t>
-                      </a:r>
-                    </a:p>
-                  </a:txBody>
-                  <a:tcPr>
-                    <a:solidFill>
-                      <a:srgbClr val="FFFFFF"/>
-                    </a:solidFill>
-                  </a:tcPr>
-                </a:tc>
-                <a:tc>
-                  <a:txBody>
-                    <a:bodyPr/>
-                    <a:lstStyle/>
-                    <a:p>
-                      <a:pPr algn="r">
-                        <a:defRPr>
-                          <a:latin typeface="Roboto"/>
-                        </a:defRPr>
-                      </a:pPr>
-                      <a:r>
-                        <a:rPr sz="1050">
-                          <a:solidFill>
-                            <a:srgbClr val="25342A"/>
-                          </a:solidFill>
-                          <a:latin typeface="Roboto"/>
-                        </a:rPr>
-                        <a:t>$71,909</a:t>
-                      </a:r>
-                    </a:p>
-                  </a:txBody>
-                  <a:tcPr>
-                    <a:solidFill>
-                      <a:srgbClr val="FFFFFF"/>
-                    </a:solidFill>
-                  </a:tcPr>
-                </a:tc>
-                <a:tc>
-                  <a:txBody>
-                    <a:bodyPr/>
-                    <a:lstStyle/>
-                    <a:p>
-                      <a:pPr algn="r">
-                        <a:defRPr>
-                          <a:latin typeface="Roboto"/>
-                        </a:defRPr>
-                      </a:pPr>
-                      <a:r>
-                        <a:rPr sz="1050">
-                          <a:solidFill>
-                            <a:srgbClr val="25342A"/>
-                          </a:solidFill>
-                          <a:latin typeface="Roboto"/>
-                        </a:rPr>
-                        <a:t>$53,846</a:t>
+                            <a:srgbClr val="25342A"/>
+                          </a:solidFill>
+                          <a:latin typeface="Roboto"/>
+                        </a:rPr>
+                        <a:t>29</a:t>
                       </a:r>
                     </a:p>
                   </a:txBody>
@@ -9041,7 +12116,7 @@
                           </a:solidFill>
                           <a:latin typeface="Roboto"/>
                         </a:rPr>
-                        <a:t>28 Oct</a:t>
+                        <a:t>Call-out 32, September</a:t>
                       </a:r>
                     </a:p>
                   </a:txBody>
@@ -9056,19 +12131,19 @@
                     <a:bodyPr/>
                     <a:lstStyle/>
                     <a:p>
-                      <a:pPr algn="r">
-                        <a:defRPr>
-                          <a:latin typeface="Roboto"/>
-                        </a:defRPr>
-                      </a:pPr>
-                      <a:r>
-                        <a:rPr sz="1050">
-                          <a:solidFill>
-                            <a:srgbClr val="25342A"/>
-                          </a:solidFill>
-                          <a:latin typeface="Roboto"/>
-                        </a:rPr>
-                        <a:t>$71,909</a:t>
+                      <a:pPr algn="l">
+                        <a:defRPr>
+                          <a:latin typeface="Roboto"/>
+                        </a:defRPr>
+                      </a:pPr>
+                      <a:r>
+                        <a:rPr sz="1050">
+                          <a:solidFill>
+                            <a:srgbClr val="25342A"/>
+                          </a:solidFill>
+                          <a:latin typeface="Roboto"/>
+                        </a:rPr>
+                        <a:t>21 Sep</a:t>
                       </a:r>
                     </a:p>
                   </a:txBody>
@@ -9095,7 +12170,7 @@
                           </a:solidFill>
                           <a:latin typeface="Roboto"/>
                         </a:rPr>
-                        <a:t>$9,800</a:t>
+                        <a:t>$706</a:t>
                       </a:r>
                     </a:p>
                   </a:txBody>
@@ -9122,7 +12197,7 @@
                           </a:solidFill>
                           <a:latin typeface="Roboto"/>
                         </a:rPr>
-                        <a:t>$6,454</a:t>
+                        <a:t>4</a:t>
                       </a:r>
                     </a:p>
                   </a:txBody>
@@ -9149,115 +12224,7 @@
                           </a:solidFill>
                           <a:latin typeface="Roboto"/>
                         </a:rPr>
-                        <a:t>$0</a:t>
-                      </a:r>
-                    </a:p>
-                  </a:txBody>
-                  <a:tcPr>
-                    <a:solidFill>
-                      <a:srgbClr val="F7FAF7"/>
-                    </a:solidFill>
-                  </a:tcPr>
-                </a:tc>
-                <a:tc>
-                  <a:txBody>
-                    <a:bodyPr/>
-                    <a:lstStyle/>
-                    <a:p>
-                      <a:pPr algn="r">
-                        <a:defRPr>
-                          <a:latin typeface="Roboto"/>
-                        </a:defRPr>
-                      </a:pPr>
-                      <a:r>
-                        <a:rPr sz="1050">
-                          <a:solidFill>
-                            <a:srgbClr val="25342A"/>
-                          </a:solidFill>
-                          <a:latin typeface="Roboto"/>
-                        </a:rPr>
-                        <a:t>$0</a:t>
-                      </a:r>
-                    </a:p>
-                  </a:txBody>
-                  <a:tcPr>
-                    <a:solidFill>
-                      <a:srgbClr val="F7FAF7"/>
-                    </a:solidFill>
-                  </a:tcPr>
-                </a:tc>
-                <a:tc>
-                  <a:txBody>
-                    <a:bodyPr/>
-                    <a:lstStyle/>
-                    <a:p>
-                      <a:pPr algn="r">
-                        <a:defRPr>
-                          <a:latin typeface="Roboto"/>
-                        </a:defRPr>
-                      </a:pPr>
-                      <a:r>
-                        <a:rPr sz="1050">
-                          <a:solidFill>
-                            <a:srgbClr val="B42318"/>
-                          </a:solidFill>
-                          <a:latin typeface="Roboto"/>
-                        </a:rPr>
-                        <a:t>($12,017)</a:t>
-                      </a:r>
-                    </a:p>
-                  </a:txBody>
-                  <a:tcPr>
-                    <a:solidFill>
-                      <a:srgbClr val="F7FAF7"/>
-                    </a:solidFill>
-                  </a:tcPr>
-                </a:tc>
-                <a:tc>
-                  <a:txBody>
-                    <a:bodyPr/>
-                    <a:lstStyle/>
-                    <a:p>
-                      <a:pPr algn="r">
-                        <a:defRPr>
-                          <a:latin typeface="Roboto"/>
-                        </a:defRPr>
-                      </a:pPr>
-                      <a:r>
-                        <a:rPr sz="1050">
-                          <a:solidFill>
-                            <a:srgbClr val="25342A"/>
-                          </a:solidFill>
-                          <a:latin typeface="Roboto"/>
-                        </a:rPr>
-                        <a:t>$76,145</a:t>
-                      </a:r>
-                    </a:p>
-                  </a:txBody>
-                  <a:tcPr>
-                    <a:solidFill>
-                      <a:srgbClr val="F7FAF7"/>
-                    </a:solidFill>
-                  </a:tcPr>
-                </a:tc>
-                <a:tc>
-                  <a:txBody>
-                    <a:bodyPr/>
-                    <a:lstStyle/>
-                    <a:p>
-                      <a:pPr algn="r">
-                        <a:defRPr>
-                          <a:latin typeface="Roboto"/>
-                        </a:defRPr>
-                      </a:pPr>
-                      <a:r>
-                        <a:rPr sz="1050">
-                          <a:solidFill>
-                            <a:srgbClr val="25342A"/>
-                          </a:solidFill>
-                          <a:latin typeface="Roboto"/>
-                        </a:rPr>
-                        <a:t>$73,199</a:t>
+                        <a:t>9</a:t>
                       </a:r>
                     </a:p>
                   </a:txBody>
@@ -9286,7 +12253,7 @@
                           </a:solidFill>
                           <a:latin typeface="Roboto"/>
                         </a:rPr>
-                        <a:t>4 Nov</a:t>
+                        <a:t>Call-out 28, September</a:t>
                       </a:r>
                     </a:p>
                   </a:txBody>
@@ -9301,19 +12268,19 @@
                     <a:bodyPr/>
                     <a:lstStyle/>
                     <a:p>
-                      <a:pPr algn="r">
-                        <a:defRPr>
-                          <a:latin typeface="Roboto"/>
-                        </a:defRPr>
-                      </a:pPr>
-                      <a:r>
-                        <a:rPr sz="1050">
-                          <a:solidFill>
-                            <a:srgbClr val="25342A"/>
-                          </a:solidFill>
-                          <a:latin typeface="Roboto"/>
-                        </a:rPr>
-                        <a:t>$76,145</a:t>
+                      <a:pPr algn="l">
+                        <a:defRPr>
+                          <a:latin typeface="Roboto"/>
+                        </a:defRPr>
+                      </a:pPr>
+                      <a:r>
+                        <a:rPr sz="1050">
+                          <a:solidFill>
+                            <a:srgbClr val="25342A"/>
+                          </a:solidFill>
+                          <a:latin typeface="Roboto"/>
+                        </a:rPr>
+                        <a:t>25 Sep</a:t>
                       </a:r>
                     </a:p>
                   </a:txBody>
@@ -9340,7 +12307,7 @@
                           </a:solidFill>
                           <a:latin typeface="Roboto"/>
                         </a:rPr>
-                        <a:t>$15,200</a:t>
+                        <a:t>$659</a:t>
                       </a:r>
                     </a:p>
                   </a:txBody>
@@ -9367,7 +12334,7 @@
                           </a:solidFill>
                           <a:latin typeface="Roboto"/>
                         </a:rPr>
-                        <a:t>$63,676</a:t>
+                        <a:t>4</a:t>
                       </a:r>
                     </a:p>
                   </a:txBody>
@@ -9390,119 +12357,11 @@
                       <a:r>
                         <a:rPr sz="1050">
                           <a:solidFill>
-                            <a:srgbClr val="B42318"/>
-                          </a:solidFill>
-                          <a:latin typeface="Roboto"/>
-                        </a:rPr>
-                        <a:t>($37,800)</a:t>
-                      </a:r>
-                    </a:p>
-                  </a:txBody>
-                  <a:tcPr>
-                    <a:solidFill>
-                      <a:srgbClr val="FFFFFF"/>
-                    </a:solidFill>
-                  </a:tcPr>
-                </a:tc>
-                <a:tc>
-                  <a:txBody>
-                    <a:bodyPr/>
-                    <a:lstStyle/>
-                    <a:p>
-                      <a:pPr algn="r">
-                        <a:defRPr>
-                          <a:latin typeface="Roboto"/>
-                        </a:defRPr>
-                      </a:pPr>
-                      <a:r>
-                        <a:rPr sz="1050">
-                          <a:solidFill>
-                            <a:srgbClr val="B42318"/>
-                          </a:solidFill>
-                          <a:latin typeface="Roboto"/>
-                        </a:rPr>
-                        <a:t>($55,080)</a:t>
-                      </a:r>
-                    </a:p>
-                  </a:txBody>
-                  <a:tcPr>
-                    <a:solidFill>
-                      <a:srgbClr val="FFFFFF"/>
-                    </a:solidFill>
-                  </a:tcPr>
-                </a:tc>
-                <a:tc>
-                  <a:txBody>
-                    <a:bodyPr/>
-                    <a:lstStyle/>
-                    <a:p>
-                      <a:pPr algn="r">
-                        <a:defRPr>
-                          <a:latin typeface="Roboto"/>
-                        </a:defRPr>
-                      </a:pPr>
-                      <a:r>
-                        <a:rPr sz="1050">
-                          <a:solidFill>
-                            <a:srgbClr val="B42318"/>
-                          </a:solidFill>
-                          <a:latin typeface="Roboto"/>
-                        </a:rPr>
-                        <a:t>($1,080)</a:t>
-                      </a:r>
-                    </a:p>
-                  </a:txBody>
-                  <a:tcPr>
-                    <a:solidFill>
-                      <a:srgbClr val="FFFFFF"/>
-                    </a:solidFill>
-                  </a:tcPr>
-                </a:tc>
-                <a:tc>
-                  <a:txBody>
-                    <a:bodyPr/>
-                    <a:lstStyle/>
-                    <a:p>
-                      <a:pPr algn="r">
-                        <a:defRPr>
-                          <a:latin typeface="Roboto"/>
-                        </a:defRPr>
-                      </a:pPr>
-                      <a:r>
-                        <a:rPr sz="1050">
-                          <a:solidFill>
-                            <a:srgbClr val="25342A"/>
-                          </a:solidFill>
-                          <a:latin typeface="Roboto"/>
-                        </a:rPr>
-                        <a:t>$61,062</a:t>
-                      </a:r>
-                    </a:p>
-                  </a:txBody>
-                  <a:tcPr>
-                    <a:solidFill>
-                      <a:srgbClr val="FFFFFF"/>
-                    </a:solidFill>
-                  </a:tcPr>
-                </a:tc>
-                <a:tc>
-                  <a:txBody>
-                    <a:bodyPr/>
-                    <a:lstStyle/>
-                    <a:p>
-                      <a:pPr algn="r">
-                        <a:defRPr>
-                          <a:latin typeface="Roboto"/>
-                        </a:defRPr>
-                      </a:pPr>
-                      <a:r>
-                        <a:rPr sz="1050">
-                          <a:solidFill>
-                            <a:srgbClr val="25342A"/>
-                          </a:solidFill>
-                          <a:latin typeface="Roboto"/>
-                        </a:rPr>
-                        <a:t>$54,197</a:t>
+                            <a:srgbClr val="25342A"/>
+                          </a:solidFill>
+                          <a:latin typeface="Roboto"/>
+                        </a:rPr>
+                        <a:t>5</a:t>
                       </a:r>
                     </a:p>
                   </a:txBody>
@@ -9531,7 +12390,7 @@
                           </a:solidFill>
                           <a:latin typeface="Roboto"/>
                         </a:rPr>
-                        <a:t>11 Nov</a:t>
+                        <a:t>Call-out 11, September</a:t>
                       </a:r>
                     </a:p>
                   </a:txBody>
@@ -9546,19 +12405,19 @@
                     <a:bodyPr/>
                     <a:lstStyle/>
                     <a:p>
-                      <a:pPr algn="r">
-                        <a:defRPr>
-                          <a:latin typeface="Roboto"/>
-                        </a:defRPr>
-                      </a:pPr>
-                      <a:r>
-                        <a:rPr sz="1050">
-                          <a:solidFill>
-                            <a:srgbClr val="25342A"/>
-                          </a:solidFill>
-                          <a:latin typeface="Roboto"/>
-                        </a:rPr>
-                        <a:t>$61,062</a:t>
+                      <a:pPr algn="l">
+                        <a:defRPr>
+                          <a:latin typeface="Roboto"/>
+                        </a:defRPr>
+                      </a:pPr>
+                      <a:r>
+                        <a:rPr sz="1050">
+                          <a:solidFill>
+                            <a:srgbClr val="25342A"/>
+                          </a:solidFill>
+                          <a:latin typeface="Roboto"/>
+                        </a:rPr>
+                        <a:t>24 Sep</a:t>
                       </a:r>
                     </a:p>
                   </a:txBody>
@@ -9585,7 +12444,7 @@
                           </a:solidFill>
                           <a:latin typeface="Roboto"/>
                         </a:rPr>
-                        <a:t>$0</a:t>
+                        <a:t>$638</a:t>
                       </a:r>
                     </a:p>
                   </a:txBody>
@@ -9612,7 +12471,7 @@
                           </a:solidFill>
                           <a:latin typeface="Roboto"/>
                         </a:rPr>
-                        <a:t>$34,325</a:t>
+                        <a:t>4</a:t>
                       </a:r>
                     </a:p>
                   </a:txBody>
@@ -9639,115 +12498,7 @@
                           </a:solidFill>
                           <a:latin typeface="Roboto"/>
                         </a:rPr>
-                        <a:t>$0</a:t>
-                      </a:r>
-                    </a:p>
-                  </a:txBody>
-                  <a:tcPr>
-                    <a:solidFill>
-                      <a:srgbClr val="F7FAF7"/>
-                    </a:solidFill>
-                  </a:tcPr>
-                </a:tc>
-                <a:tc>
-                  <a:txBody>
-                    <a:bodyPr/>
-                    <a:lstStyle/>
-                    <a:p>
-                      <a:pPr algn="r">
-                        <a:defRPr>
-                          <a:latin typeface="Roboto"/>
-                        </a:defRPr>
-                      </a:pPr>
-                      <a:r>
-                        <a:rPr sz="1050">
-                          <a:solidFill>
-                            <a:srgbClr val="25342A"/>
-                          </a:solidFill>
-                          <a:latin typeface="Roboto"/>
-                        </a:rPr>
-                        <a:t>$0</a:t>
-                      </a:r>
-                    </a:p>
-                  </a:txBody>
-                  <a:tcPr>
-                    <a:solidFill>
-                      <a:srgbClr val="F7FAF7"/>
-                    </a:solidFill>
-                  </a:tcPr>
-                </a:tc>
-                <a:tc>
-                  <a:txBody>
-                    <a:bodyPr/>
-                    <a:lstStyle/>
-                    <a:p>
-                      <a:pPr algn="r">
-                        <a:defRPr>
-                          <a:latin typeface="Roboto"/>
-                        </a:defRPr>
-                      </a:pPr>
-                      <a:r>
-                        <a:rPr sz="1050">
-                          <a:solidFill>
-                            <a:srgbClr val="25342A"/>
-                          </a:solidFill>
-                          <a:latin typeface="Roboto"/>
-                        </a:rPr>
-                        <a:t>$0</a:t>
-                      </a:r>
-                    </a:p>
-                  </a:txBody>
-                  <a:tcPr>
-                    <a:solidFill>
-                      <a:srgbClr val="F7FAF7"/>
-                    </a:solidFill>
-                  </a:tcPr>
-                </a:tc>
-                <a:tc>
-                  <a:txBody>
-                    <a:bodyPr/>
-                    <a:lstStyle/>
-                    <a:p>
-                      <a:pPr algn="r">
-                        <a:defRPr>
-                          <a:latin typeface="Roboto"/>
-                        </a:defRPr>
-                      </a:pPr>
-                      <a:r>
-                        <a:rPr sz="1050">
-                          <a:solidFill>
-                            <a:srgbClr val="25342A"/>
-                          </a:solidFill>
-                          <a:latin typeface="Roboto"/>
-                        </a:rPr>
-                        <a:t>$95,387</a:t>
-                      </a:r>
-                    </a:p>
-                  </a:txBody>
-                  <a:tcPr>
-                    <a:solidFill>
-                      <a:srgbClr val="F7FAF7"/>
-                    </a:solidFill>
-                  </a:tcPr>
-                </a:tc>
-                <a:tc>
-                  <a:txBody>
-                    <a:bodyPr/>
-                    <a:lstStyle/>
-                    <a:p>
-                      <a:pPr algn="r">
-                        <a:defRPr>
-                          <a:latin typeface="Roboto"/>
-                        </a:defRPr>
-                      </a:pPr>
-                      <a:r>
-                        <a:rPr sz="1050">
-                          <a:solidFill>
-                            <a:srgbClr val="25342A"/>
-                          </a:solidFill>
-                          <a:latin typeface="Roboto"/>
-                        </a:rPr>
-                        <a:t>$67,927</a:t>
+                        <a:t>6</a:t>
                       </a:r>
                     </a:p>
                   </a:txBody>
@@ -9776,7 +12527,7 @@
                           </a:solidFill>
                           <a:latin typeface="Roboto"/>
                         </a:rPr>
-                        <a:t>18 Nov</a:t>
+                        <a:t>Call-out 63, September</a:t>
                       </a:r>
                     </a:p>
                   </a:txBody>
@@ -9791,19 +12542,19 @@
                     <a:bodyPr/>
                     <a:lstStyle/>
                     <a:p>
-                      <a:pPr algn="r">
-                        <a:defRPr>
-                          <a:latin typeface="Roboto"/>
-                        </a:defRPr>
-                      </a:pPr>
-                      <a:r>
-                        <a:rPr sz="1050">
-                          <a:solidFill>
-                            <a:srgbClr val="25342A"/>
-                          </a:solidFill>
-                          <a:latin typeface="Roboto"/>
-                        </a:rPr>
-                        <a:t>$95,387</a:t>
+                      <a:pPr algn="l">
+                        <a:defRPr>
+                          <a:latin typeface="Roboto"/>
+                        </a:defRPr>
+                      </a:pPr>
+                      <a:r>
+                        <a:rPr sz="1050">
+                          <a:solidFill>
+                            <a:srgbClr val="25342A"/>
+                          </a:solidFill>
+                          <a:latin typeface="Roboto"/>
+                        </a:rPr>
+                        <a:t>15 Sep</a:t>
                       </a:r>
                     </a:p>
                   </a:txBody>
@@ -9830,7 +12581,7 @@
                           </a:solidFill>
                           <a:latin typeface="Roboto"/>
                         </a:rPr>
-                        <a:t>$0</a:t>
+                        <a:t>$635</a:t>
                       </a:r>
                     </a:p>
                   </a:txBody>
@@ -9857,7 +12608,7 @@
                           </a:solidFill>
                           <a:latin typeface="Roboto"/>
                         </a:rPr>
-                        <a:t>$34,325</a:t>
+                        <a:t>4</a:t>
                       </a:r>
                     </a:p>
                   </a:txBody>
@@ -9880,119 +12631,11 @@
                       <a:r>
                         <a:rPr sz="1050">
                           <a:solidFill>
-                            <a:srgbClr val="B42318"/>
-                          </a:solidFill>
-                          <a:latin typeface="Roboto"/>
-                        </a:rPr>
-                        <a:t>($37,800)</a:t>
-                      </a:r>
-                    </a:p>
-                  </a:txBody>
-                  <a:tcPr>
-                    <a:solidFill>
-                      <a:srgbClr val="FFFFFF"/>
-                    </a:solidFill>
-                  </a:tcPr>
-                </a:tc>
-                <a:tc>
-                  <a:txBody>
-                    <a:bodyPr/>
-                    <a:lstStyle/>
-                    <a:p>
-                      <a:pPr algn="r">
-                        <a:defRPr>
-                          <a:latin typeface="Roboto"/>
-                        </a:defRPr>
-                      </a:pPr>
-                      <a:r>
-                        <a:rPr sz="1050">
-                          <a:solidFill>
-                            <a:srgbClr val="B42318"/>
-                          </a:solidFill>
-                          <a:latin typeface="Roboto"/>
-                        </a:rPr>
-                        <a:t>($55,080)</a:t>
-                      </a:r>
-                    </a:p>
-                  </a:txBody>
-                  <a:tcPr>
-                    <a:solidFill>
-                      <a:srgbClr val="FFFFFF"/>
-                    </a:solidFill>
-                  </a:tcPr>
-                </a:tc>
-                <a:tc>
-                  <a:txBody>
-                    <a:bodyPr/>
-                    <a:lstStyle/>
-                    <a:p>
-                      <a:pPr algn="r">
-                        <a:defRPr>
-                          <a:latin typeface="Roboto"/>
-                        </a:defRPr>
-                      </a:pPr>
-                      <a:r>
-                        <a:rPr sz="1050">
-                          <a:solidFill>
-                            <a:srgbClr val="25342A"/>
-                          </a:solidFill>
-                          <a:latin typeface="Roboto"/>
-                        </a:rPr>
-                        <a:t>$0</a:t>
-                      </a:r>
-                    </a:p>
-                  </a:txBody>
-                  <a:tcPr>
-                    <a:solidFill>
-                      <a:srgbClr val="FFFFFF"/>
-                    </a:solidFill>
-                  </a:tcPr>
-                </a:tc>
-                <a:tc>
-                  <a:txBody>
-                    <a:bodyPr/>
-                    <a:lstStyle/>
-                    <a:p>
-                      <a:pPr algn="r">
-                        <a:defRPr>
-                          <a:latin typeface="Roboto"/>
-                        </a:defRPr>
-                      </a:pPr>
-                      <a:r>
-                        <a:rPr sz="1050">
-                          <a:solidFill>
-                            <a:srgbClr val="25342A"/>
-                          </a:solidFill>
-                          <a:latin typeface="Roboto"/>
-                        </a:rPr>
-                        <a:t>$36,832</a:t>
-                      </a:r>
-                    </a:p>
-                  </a:txBody>
-                  <a:tcPr>
-                    <a:solidFill>
-                      <a:srgbClr val="FFFFFF"/>
-                    </a:solidFill>
-                  </a:tcPr>
-                </a:tc>
-                <a:tc>
-                  <a:txBody>
-                    <a:bodyPr/>
-                    <a:lstStyle/>
-                    <a:p>
-                      <a:pPr algn="r">
-                        <a:defRPr>
-                          <a:latin typeface="Roboto"/>
-                        </a:defRPr>
-                      </a:pPr>
-                      <a:r>
-                        <a:rPr sz="1050">
-                          <a:solidFill>
-                            <a:srgbClr val="25342A"/>
-                          </a:solidFill>
-                          <a:latin typeface="Roboto"/>
-                        </a:rPr>
-                        <a:t>$29,967</a:t>
+                            <a:srgbClr val="25342A"/>
+                          </a:solidFill>
+                          <a:latin typeface="Roboto"/>
+                        </a:rPr>
+                        <a:t>15</a:t>
                       </a:r>
                     </a:p>
                   </a:txBody>
@@ -10021,7 +12664,7 @@
                           </a:solidFill>
                           <a:latin typeface="Roboto"/>
                         </a:rPr>
-                        <a:t>25 Nov</a:t>
+                        <a:t>Call-out 21, September</a:t>
                       </a:r>
                     </a:p>
                   </a:txBody>
@@ -10036,19 +12679,19 @@
                     <a:bodyPr/>
                     <a:lstStyle/>
                     <a:p>
-                      <a:pPr algn="r">
-                        <a:defRPr>
-                          <a:latin typeface="Roboto"/>
-                        </a:defRPr>
-                      </a:pPr>
-                      <a:r>
-                        <a:rPr sz="1050">
-                          <a:solidFill>
-                            <a:srgbClr val="25342A"/>
-                          </a:solidFill>
-                          <a:latin typeface="Roboto"/>
-                        </a:rPr>
-                        <a:t>$36,832</a:t>
+                      <a:pPr algn="l">
+                        <a:defRPr>
+                          <a:latin typeface="Roboto"/>
+                        </a:defRPr>
+                      </a:pPr>
+                      <a:r>
+                        <a:rPr sz="1050">
+                          <a:solidFill>
+                            <a:srgbClr val="25342A"/>
+                          </a:solidFill>
+                          <a:latin typeface="Roboto"/>
+                        </a:rPr>
+                        <a:t>25 Sep</a:t>
                       </a:r>
                     </a:p>
                   </a:txBody>
@@ -10075,7 +12718,7 @@
                           </a:solidFill>
                           <a:latin typeface="Roboto"/>
                         </a:rPr>
-                        <a:t>$0</a:t>
+                        <a:t>$567</a:t>
                       </a:r>
                     </a:p>
                   </a:txBody>
@@ -10102,7 +12745,7 @@
                           </a:solidFill>
                           <a:latin typeface="Roboto"/>
                         </a:rPr>
-                        <a:t>$34,325</a:t>
+                        <a:t>4</a:t>
                       </a:r>
                     </a:p>
                   </a:txBody>
@@ -10129,115 +12772,7 @@
                           </a:solidFill>
                           <a:latin typeface="Roboto"/>
                         </a:rPr>
-                        <a:t>$0</a:t>
-                      </a:r>
-                    </a:p>
-                  </a:txBody>
-                  <a:tcPr>
-                    <a:solidFill>
-                      <a:srgbClr val="F7FAF7"/>
-                    </a:solidFill>
-                  </a:tcPr>
-                </a:tc>
-                <a:tc>
-                  <a:txBody>
-                    <a:bodyPr/>
-                    <a:lstStyle/>
-                    <a:p>
-                      <a:pPr algn="r">
-                        <a:defRPr>
-                          <a:latin typeface="Roboto"/>
-                        </a:defRPr>
-                      </a:pPr>
-                      <a:r>
-                        <a:rPr sz="1050">
-                          <a:solidFill>
-                            <a:srgbClr val="25342A"/>
-                          </a:solidFill>
-                          <a:latin typeface="Roboto"/>
-                        </a:rPr>
-                        <a:t>$0</a:t>
-                      </a:r>
-                    </a:p>
-                  </a:txBody>
-                  <a:tcPr>
-                    <a:solidFill>
-                      <a:srgbClr val="F7FAF7"/>
-                    </a:solidFill>
-                  </a:tcPr>
-                </a:tc>
-                <a:tc>
-                  <a:txBody>
-                    <a:bodyPr/>
-                    <a:lstStyle/>
-                    <a:p>
-                      <a:pPr algn="r">
-                        <a:defRPr>
-                          <a:latin typeface="Roboto"/>
-                        </a:defRPr>
-                      </a:pPr>
-                      <a:r>
-                        <a:rPr sz="1050">
-                          <a:solidFill>
-                            <a:srgbClr val="25342A"/>
-                          </a:solidFill>
-                          <a:latin typeface="Roboto"/>
-                        </a:rPr>
-                        <a:t>$0</a:t>
-                      </a:r>
-                    </a:p>
-                  </a:txBody>
-                  <a:tcPr>
-                    <a:solidFill>
-                      <a:srgbClr val="F7FAF7"/>
-                    </a:solidFill>
-                  </a:tcPr>
-                </a:tc>
-                <a:tc>
-                  <a:txBody>
-                    <a:bodyPr/>
-                    <a:lstStyle/>
-                    <a:p>
-                      <a:pPr algn="r">
-                        <a:defRPr>
-                          <a:latin typeface="Roboto"/>
-                        </a:defRPr>
-                      </a:pPr>
-                      <a:r>
-                        <a:rPr sz="1050">
-                          <a:solidFill>
-                            <a:srgbClr val="25342A"/>
-                          </a:solidFill>
-                          <a:latin typeface="Roboto"/>
-                        </a:rPr>
-                        <a:t>$71,157</a:t>
-                      </a:r>
-                    </a:p>
-                  </a:txBody>
-                  <a:tcPr>
-                    <a:solidFill>
-                      <a:srgbClr val="F7FAF7"/>
-                    </a:solidFill>
-                  </a:tcPr>
-                </a:tc>
-                <a:tc>
-                  <a:txBody>
-                    <a:bodyPr/>
-                    <a:lstStyle/>
-                    <a:p>
-                      <a:pPr algn="r">
-                        <a:defRPr>
-                          <a:latin typeface="Roboto"/>
-                        </a:defRPr>
-                      </a:pPr>
-                      <a:r>
-                        <a:rPr sz="1050">
-                          <a:solidFill>
-                            <a:srgbClr val="25342A"/>
-                          </a:solidFill>
-                          <a:latin typeface="Roboto"/>
-                        </a:rPr>
-                        <a:t>$43,697</a:t>
+                        <a:t>5</a:t>
                       </a:r>
                     </a:p>
                   </a:txBody>
@@ -10266,7 +12801,7 @@
                           </a:solidFill>
                           <a:latin typeface="Roboto"/>
                         </a:rPr>
-                        <a:t>2 Dec</a:t>
+                        <a:t>Call-out 22, September</a:t>
                       </a:r>
                     </a:p>
                   </a:txBody>
@@ -10281,19 +12816,19 @@
                     <a:bodyPr/>
                     <a:lstStyle/>
                     <a:p>
-                      <a:pPr algn="r">
-                        <a:defRPr>
-                          <a:latin typeface="Roboto"/>
-                        </a:defRPr>
-                      </a:pPr>
-                      <a:r>
-                        <a:rPr sz="1050">
-                          <a:solidFill>
-                            <a:srgbClr val="25342A"/>
-                          </a:solidFill>
-                          <a:latin typeface="Roboto"/>
-                        </a:rPr>
-                        <a:t>$71,157</a:t>
+                      <a:pPr algn="l">
+                        <a:defRPr>
+                          <a:latin typeface="Roboto"/>
+                        </a:defRPr>
+                      </a:pPr>
+                      <a:r>
+                        <a:rPr sz="1050">
+                          <a:solidFill>
+                            <a:srgbClr val="25342A"/>
+                          </a:solidFill>
+                          <a:latin typeface="Roboto"/>
+                        </a:rPr>
+                        <a:t>17 Sep</a:t>
                       </a:r>
                     </a:p>
                   </a:txBody>
@@ -10320,7 +12855,7 @@
                           </a:solidFill>
                           <a:latin typeface="Roboto"/>
                         </a:rPr>
-                        <a:t>$0</a:t>
+                        <a:t>$535</a:t>
                       </a:r>
                     </a:p>
                   </a:txBody>
@@ -10347,7 +12882,7 @@
                           </a:solidFill>
                           <a:latin typeface="Roboto"/>
                         </a:rPr>
-                        <a:t>$74,825</a:t>
+                        <a:t>4</a:t>
                       </a:r>
                     </a:p>
                   </a:txBody>
@@ -10370,119 +12905,11 @@
                       <a:r>
                         <a:rPr sz="1050">
                           <a:solidFill>
-                            <a:srgbClr val="B42318"/>
-                          </a:solidFill>
-                          <a:latin typeface="Roboto"/>
-                        </a:rPr>
-                        <a:t>($37,800)</a:t>
-                      </a:r>
-                    </a:p>
-                  </a:txBody>
-                  <a:tcPr>
-                    <a:solidFill>
-                      <a:srgbClr val="FFFFFF"/>
-                    </a:solidFill>
-                  </a:tcPr>
-                </a:tc>
-                <a:tc>
-                  <a:txBody>
-                    <a:bodyPr/>
-                    <a:lstStyle/>
-                    <a:p>
-                      <a:pPr algn="r">
-                        <a:defRPr>
-                          <a:latin typeface="Roboto"/>
-                        </a:defRPr>
-                      </a:pPr>
-                      <a:r>
-                        <a:rPr sz="1050">
-                          <a:solidFill>
-                            <a:srgbClr val="B42318"/>
-                          </a:solidFill>
-                          <a:latin typeface="Roboto"/>
-                        </a:rPr>
-                        <a:t>($55,080)</a:t>
-                      </a:r>
-                    </a:p>
-                  </a:txBody>
-                  <a:tcPr>
-                    <a:solidFill>
-                      <a:srgbClr val="FFFFFF"/>
-                    </a:solidFill>
-                  </a:tcPr>
-                </a:tc>
-                <a:tc>
-                  <a:txBody>
-                    <a:bodyPr/>
-                    <a:lstStyle/>
-                    <a:p>
-                      <a:pPr algn="r">
-                        <a:defRPr>
-                          <a:latin typeface="Roboto"/>
-                        </a:defRPr>
-                      </a:pPr>
-                      <a:r>
-                        <a:rPr sz="1050">
-                          <a:solidFill>
-                            <a:srgbClr val="B42318"/>
-                          </a:solidFill>
-                          <a:latin typeface="Roboto"/>
-                        </a:rPr>
-                        <a:t>($6,080)</a:t>
-                      </a:r>
-                    </a:p>
-                  </a:txBody>
-                  <a:tcPr>
-                    <a:solidFill>
-                      <a:srgbClr val="FFFFFF"/>
-                    </a:solidFill>
-                  </a:tcPr>
-                </a:tc>
-                <a:tc>
-                  <a:txBody>
-                    <a:bodyPr/>
-                    <a:lstStyle/>
-                    <a:p>
-                      <a:pPr algn="r">
-                        <a:defRPr>
-                          <a:latin typeface="Roboto"/>
-                        </a:defRPr>
-                      </a:pPr>
-                      <a:r>
-                        <a:rPr sz="1050">
-                          <a:solidFill>
-                            <a:srgbClr val="25342A"/>
-                          </a:solidFill>
-                          <a:latin typeface="Roboto"/>
-                        </a:rPr>
-                        <a:t>$47,022</a:t>
-                      </a:r>
-                    </a:p>
-                  </a:txBody>
-                  <a:tcPr>
-                    <a:solidFill>
-                      <a:srgbClr val="FFFFFF"/>
-                    </a:solidFill>
-                  </a:tcPr>
-                </a:tc>
-                <a:tc>
-                  <a:txBody>
-                    <a:bodyPr/>
-                    <a:lstStyle/>
-                    <a:p>
-                      <a:pPr algn="r">
-                        <a:defRPr>
-                          <a:latin typeface="Roboto"/>
-                        </a:defRPr>
-                      </a:pPr>
-                      <a:r>
-                        <a:rPr sz="1050">
-                          <a:solidFill>
-                            <a:srgbClr val="B42318"/>
-                          </a:solidFill>
-                          <a:latin typeface="Roboto"/>
-                        </a:rPr>
-                        <a:t>($343)</a:t>
+                            <a:srgbClr val="25342A"/>
+                          </a:solidFill>
+                          <a:latin typeface="Roboto"/>
+                        </a:rPr>
+                        <a:t>13</a:t>
                       </a:r>
                     </a:p>
                   </a:txBody>
@@ -10511,7 +12938,7 @@
                           </a:solidFill>
                           <a:latin typeface="Roboto"/>
                         </a:rPr>
-                        <a:t>9 Dec</a:t>
+                        <a:t>Call-out 38, September</a:t>
                       </a:r>
                     </a:p>
                   </a:txBody>
@@ -10526,19 +12953,19 @@
                     <a:bodyPr/>
                     <a:lstStyle/>
                     <a:p>
-                      <a:pPr algn="r">
-                        <a:defRPr>
-                          <a:latin typeface="Roboto"/>
-                        </a:defRPr>
-                      </a:pPr>
-                      <a:r>
-                        <a:rPr sz="1050">
-                          <a:solidFill>
-                            <a:srgbClr val="25342A"/>
-                          </a:solidFill>
-                          <a:latin typeface="Roboto"/>
-                        </a:rPr>
-                        <a:t>$47,022</a:t>
+                      <a:pPr algn="l">
+                        <a:defRPr>
+                          <a:latin typeface="Roboto"/>
+                        </a:defRPr>
+                      </a:pPr>
+                      <a:r>
+                        <a:rPr sz="1050">
+                          <a:solidFill>
+                            <a:srgbClr val="25342A"/>
+                          </a:solidFill>
+                          <a:latin typeface="Roboto"/>
+                        </a:rPr>
+                        <a:t>23 Sep</a:t>
                       </a:r>
                     </a:p>
                   </a:txBody>
@@ -10565,7 +12992,7 @@
                           </a:solidFill>
                           <a:latin typeface="Roboto"/>
                         </a:rPr>
-                        <a:t>$0</a:t>
+                        <a:t>$459</a:t>
                       </a:r>
                     </a:p>
                   </a:txBody>
@@ -10592,7 +13019,7 @@
                           </a:solidFill>
                           <a:latin typeface="Roboto"/>
                         </a:rPr>
-                        <a:t>$34,325</a:t>
+                        <a:t>4</a:t>
                       </a:r>
                     </a:p>
                   </a:txBody>
@@ -10619,115 +13046,7 @@
                           </a:solidFill>
                           <a:latin typeface="Roboto"/>
                         </a:rPr>
-                        <a:t>$0</a:t>
-                      </a:r>
-                    </a:p>
-                  </a:txBody>
-                  <a:tcPr>
-                    <a:solidFill>
-                      <a:srgbClr val="F7FAF7"/>
-                    </a:solidFill>
-                  </a:tcPr>
-                </a:tc>
-                <a:tc>
-                  <a:txBody>
-                    <a:bodyPr/>
-                    <a:lstStyle/>
-                    <a:p>
-                      <a:pPr algn="r">
-                        <a:defRPr>
-                          <a:latin typeface="Roboto"/>
-                        </a:defRPr>
-                      </a:pPr>
-                      <a:r>
-                        <a:rPr sz="1050">
-                          <a:solidFill>
-                            <a:srgbClr val="25342A"/>
-                          </a:solidFill>
-                          <a:latin typeface="Roboto"/>
-                        </a:rPr>
-                        <a:t>$0</a:t>
-                      </a:r>
-                    </a:p>
-                  </a:txBody>
-                  <a:tcPr>
-                    <a:solidFill>
-                      <a:srgbClr val="F7FAF7"/>
-                    </a:solidFill>
-                  </a:tcPr>
-                </a:tc>
-                <a:tc>
-                  <a:txBody>
-                    <a:bodyPr/>
-                    <a:lstStyle/>
-                    <a:p>
-                      <a:pPr algn="r">
-                        <a:defRPr>
-                          <a:latin typeface="Roboto"/>
-                        </a:defRPr>
-                      </a:pPr>
-                      <a:r>
-                        <a:rPr sz="1050">
-                          <a:solidFill>
-                            <a:srgbClr val="25342A"/>
-                          </a:solidFill>
-                          <a:latin typeface="Roboto"/>
-                        </a:rPr>
-                        <a:t>$0</a:t>
-                      </a:r>
-                    </a:p>
-                  </a:txBody>
-                  <a:tcPr>
-                    <a:solidFill>
-                      <a:srgbClr val="F7FAF7"/>
-                    </a:solidFill>
-                  </a:tcPr>
-                </a:tc>
-                <a:tc>
-                  <a:txBody>
-                    <a:bodyPr/>
-                    <a:lstStyle/>
-                    <a:p>
-                      <a:pPr algn="r">
-                        <a:defRPr>
-                          <a:latin typeface="Roboto"/>
-                        </a:defRPr>
-                      </a:pPr>
-                      <a:r>
-                        <a:rPr sz="1050">
-                          <a:solidFill>
-                            <a:srgbClr val="25342A"/>
-                          </a:solidFill>
-                          <a:latin typeface="Roboto"/>
-                        </a:rPr>
-                        <a:t>$81,346</a:t>
-                      </a:r>
-                    </a:p>
-                  </a:txBody>
-                  <a:tcPr>
-                    <a:solidFill>
-                      <a:srgbClr val="F7FAF7"/>
-                    </a:solidFill>
-                  </a:tcPr>
-                </a:tc>
-                <a:tc>
-                  <a:txBody>
-                    <a:bodyPr/>
-                    <a:lstStyle/>
-                    <a:p>
-                      <a:pPr algn="r">
-                        <a:defRPr>
-                          <a:latin typeface="Roboto"/>
-                        </a:defRPr>
-                      </a:pPr>
-                      <a:r>
-                        <a:rPr sz="1050">
-                          <a:solidFill>
-                            <a:srgbClr val="25342A"/>
-                          </a:solidFill>
-                          <a:latin typeface="Roboto"/>
-                        </a:rPr>
-                        <a:t>$53,886</a:t>
+                        <a:t>7</a:t>
                       </a:r>
                     </a:p>
                   </a:txBody>
@@ -10756,7 +13075,7 @@
                           </a:solidFill>
                           <a:latin typeface="Roboto"/>
                         </a:rPr>
-                        <a:t>16 Dec</a:t>
+                        <a:t>Call-out 26, September</a:t>
                       </a:r>
                     </a:p>
                   </a:txBody>
@@ -10771,19 +13090,19 @@
                     <a:bodyPr/>
                     <a:lstStyle/>
                     <a:p>
-                      <a:pPr algn="r">
-                        <a:defRPr>
-                          <a:latin typeface="Roboto"/>
-                        </a:defRPr>
-                      </a:pPr>
-                      <a:r>
-                        <a:rPr sz="1050">
-                          <a:solidFill>
-                            <a:srgbClr val="25342A"/>
-                          </a:solidFill>
-                          <a:latin typeface="Roboto"/>
-                        </a:rPr>
-                        <a:t>$81,346</a:t>
+                      <a:pPr algn="l">
+                        <a:defRPr>
+                          <a:latin typeface="Roboto"/>
+                        </a:defRPr>
+                      </a:pPr>
+                      <a:r>
+                        <a:rPr sz="1050">
+                          <a:solidFill>
+                            <a:srgbClr val="25342A"/>
+                          </a:solidFill>
+                          <a:latin typeface="Roboto"/>
+                        </a:rPr>
+                        <a:t>26 Sep</a:t>
                       </a:r>
                     </a:p>
                   </a:txBody>
@@ -10810,7 +13129,7 @@
                           </a:solidFill>
                           <a:latin typeface="Roboto"/>
                         </a:rPr>
-                        <a:t>$0</a:t>
+                        <a:t>$441</a:t>
                       </a:r>
                     </a:p>
                   </a:txBody>
@@ -10837,7 +13156,7 @@
                           </a:solidFill>
                           <a:latin typeface="Roboto"/>
                         </a:rPr>
-                        <a:t>$34,325</a:t>
+                        <a:t>4</a:t>
                       </a:r>
                     </a:p>
                   </a:txBody>
@@ -10860,119 +13179,11 @@
                       <a:r>
                         <a:rPr sz="1050">
                           <a:solidFill>
-                            <a:srgbClr val="B42318"/>
-                          </a:solidFill>
-                          <a:latin typeface="Roboto"/>
-                        </a:rPr>
-                        <a:t>($37,800)</a:t>
-                      </a:r>
-                    </a:p>
-                  </a:txBody>
-                  <a:tcPr>
-                    <a:solidFill>
-                      <a:srgbClr val="FFFFFF"/>
-                    </a:solidFill>
-                  </a:tcPr>
-                </a:tc>
-                <a:tc>
-                  <a:txBody>
-                    <a:bodyPr/>
-                    <a:lstStyle/>
-                    <a:p>
-                      <a:pPr algn="r">
-                        <a:defRPr>
-                          <a:latin typeface="Roboto"/>
-                        </a:defRPr>
-                      </a:pPr>
-                      <a:r>
-                        <a:rPr sz="1050">
-                          <a:solidFill>
-                            <a:srgbClr val="B42318"/>
-                          </a:solidFill>
-                          <a:latin typeface="Roboto"/>
-                        </a:rPr>
-                        <a:t>($55,080)</a:t>
-                      </a:r>
-                    </a:p>
-                  </a:txBody>
-                  <a:tcPr>
-                    <a:solidFill>
-                      <a:srgbClr val="FFFFFF"/>
-                    </a:solidFill>
-                  </a:tcPr>
-                </a:tc>
-                <a:tc>
-                  <a:txBody>
-                    <a:bodyPr/>
-                    <a:lstStyle/>
-                    <a:p>
-                      <a:pPr algn="r">
-                        <a:defRPr>
-                          <a:latin typeface="Roboto"/>
-                        </a:defRPr>
-                      </a:pPr>
-                      <a:r>
-                        <a:rPr sz="1050">
-                          <a:solidFill>
-                            <a:srgbClr val="25342A"/>
-                          </a:solidFill>
-                          <a:latin typeface="Roboto"/>
-                        </a:rPr>
-                        <a:t>$0</a:t>
-                      </a:r>
-                    </a:p>
-                  </a:txBody>
-                  <a:tcPr>
-                    <a:solidFill>
-                      <a:srgbClr val="FFFFFF"/>
-                    </a:solidFill>
-                  </a:tcPr>
-                </a:tc>
-                <a:tc>
-                  <a:txBody>
-                    <a:bodyPr/>
-                    <a:lstStyle/>
-                    <a:p>
-                      <a:pPr algn="r">
-                        <a:defRPr>
-                          <a:latin typeface="Roboto"/>
-                        </a:defRPr>
-                      </a:pPr>
-                      <a:r>
-                        <a:rPr sz="1050">
-                          <a:solidFill>
-                            <a:srgbClr val="25342A"/>
-                          </a:solidFill>
-                          <a:latin typeface="Roboto"/>
-                        </a:rPr>
-                        <a:t>$22,791</a:t>
-                      </a:r>
-                    </a:p>
-                  </a:txBody>
-                  <a:tcPr>
-                    <a:solidFill>
-                      <a:srgbClr val="FFFFFF"/>
-                    </a:solidFill>
-                  </a:tcPr>
-                </a:tc>
-                <a:tc>
-                  <a:txBody>
-                    <a:bodyPr/>
-                    <a:lstStyle/>
-                    <a:p>
-                      <a:pPr algn="r">
-                        <a:defRPr>
-                          <a:latin typeface="Roboto"/>
-                        </a:defRPr>
-                      </a:pPr>
-                      <a:r>
-                        <a:rPr sz="1050">
-                          <a:solidFill>
-                            <a:srgbClr val="25342A"/>
-                          </a:solidFill>
-                          <a:latin typeface="Roboto"/>
-                        </a:rPr>
-                        <a:t>$15,926</a:t>
+                            <a:srgbClr val="25342A"/>
+                          </a:solidFill>
+                          <a:latin typeface="Roboto"/>
+                        </a:rPr>
+                        <a:t>4</a:t>
                       </a:r>
                     </a:p>
                   </a:txBody>
@@ -11001,7 +13212,7 @@
                           </a:solidFill>
                           <a:latin typeface="Roboto"/>
                         </a:rPr>
-                        <a:t>23 Dec</a:t>
+                        <a:t>Call-out 20, September</a:t>
                       </a:r>
                     </a:p>
                   </a:txBody>
@@ -11016,19 +13227,19 @@
                     <a:bodyPr/>
                     <a:lstStyle/>
                     <a:p>
-                      <a:pPr algn="r">
-                        <a:defRPr>
-                          <a:latin typeface="Roboto"/>
-                        </a:defRPr>
-                      </a:pPr>
-                      <a:r>
-                        <a:rPr sz="1050">
-                          <a:solidFill>
-                            <a:srgbClr val="25342A"/>
-                          </a:solidFill>
-                          <a:latin typeface="Roboto"/>
-                        </a:rPr>
-                        <a:t>$22,791</a:t>
+                      <a:pPr algn="l">
+                        <a:defRPr>
+                          <a:latin typeface="Roboto"/>
+                        </a:defRPr>
+                      </a:pPr>
+                      <a:r>
+                        <a:rPr sz="1050">
+                          <a:solidFill>
+                            <a:srgbClr val="25342A"/>
+                          </a:solidFill>
+                          <a:latin typeface="Roboto"/>
+                        </a:rPr>
+                        <a:t>24 Sep</a:t>
                       </a:r>
                     </a:p>
                   </a:txBody>
@@ -11055,7 +13266,7 @@
                           </a:solidFill>
                           <a:latin typeface="Roboto"/>
                         </a:rPr>
-                        <a:t>$0</a:t>
+                        <a:t>$416</a:t>
                       </a:r>
                     </a:p>
                   </a:txBody>
@@ -11082,7 +13293,7 @@
                           </a:solidFill>
                           <a:latin typeface="Roboto"/>
                         </a:rPr>
-                        <a:t>$34,325</a:t>
+                        <a:t>4</a:t>
                       </a:r>
                     </a:p>
                   </a:txBody>
@@ -11109,115 +13320,7 @@
                           </a:solidFill>
                           <a:latin typeface="Roboto"/>
                         </a:rPr>
-                        <a:t>$0</a:t>
-                      </a:r>
-                    </a:p>
-                  </a:txBody>
-                  <a:tcPr>
-                    <a:solidFill>
-                      <a:srgbClr val="F7FAF7"/>
-                    </a:solidFill>
-                  </a:tcPr>
-                </a:tc>
-                <a:tc>
-                  <a:txBody>
-                    <a:bodyPr/>
-                    <a:lstStyle/>
-                    <a:p>
-                      <a:pPr algn="r">
-                        <a:defRPr>
-                          <a:latin typeface="Roboto"/>
-                        </a:defRPr>
-                      </a:pPr>
-                      <a:r>
-                        <a:rPr sz="1050">
-                          <a:solidFill>
-                            <a:srgbClr val="25342A"/>
-                          </a:solidFill>
-                          <a:latin typeface="Roboto"/>
-                        </a:rPr>
-                        <a:t>$0</a:t>
-                      </a:r>
-                    </a:p>
-                  </a:txBody>
-                  <a:tcPr>
-                    <a:solidFill>
-                      <a:srgbClr val="F7FAF7"/>
-                    </a:solidFill>
-                  </a:tcPr>
-                </a:tc>
-                <a:tc>
-                  <a:txBody>
-                    <a:bodyPr/>
-                    <a:lstStyle/>
-                    <a:p>
-                      <a:pPr algn="r">
-                        <a:defRPr>
-                          <a:latin typeface="Roboto"/>
-                        </a:defRPr>
-                      </a:pPr>
-                      <a:r>
-                        <a:rPr sz="1050">
-                          <a:solidFill>
-                            <a:srgbClr val="25342A"/>
-                          </a:solidFill>
-                          <a:latin typeface="Roboto"/>
-                        </a:rPr>
-                        <a:t>$0</a:t>
-                      </a:r>
-                    </a:p>
-                  </a:txBody>
-                  <a:tcPr>
-                    <a:solidFill>
-                      <a:srgbClr val="F7FAF7"/>
-                    </a:solidFill>
-                  </a:tcPr>
-                </a:tc>
-                <a:tc>
-                  <a:txBody>
-                    <a:bodyPr/>
-                    <a:lstStyle/>
-                    <a:p>
-                      <a:pPr algn="r">
-                        <a:defRPr>
-                          <a:latin typeface="Roboto"/>
-                        </a:defRPr>
-                      </a:pPr>
-                      <a:r>
-                        <a:rPr sz="1050">
-                          <a:solidFill>
-                            <a:srgbClr val="25342A"/>
-                          </a:solidFill>
-                          <a:latin typeface="Roboto"/>
-                        </a:rPr>
-                        <a:t>$57,116</a:t>
-                      </a:r>
-                    </a:p>
-                  </a:txBody>
-                  <a:tcPr>
-                    <a:solidFill>
-                      <a:srgbClr val="F7FAF7"/>
-                    </a:solidFill>
-                  </a:tcPr>
-                </a:tc>
-                <a:tc>
-                  <a:txBody>
-                    <a:bodyPr/>
-                    <a:lstStyle/>
-                    <a:p>
-                      <a:pPr algn="r">
-                        <a:defRPr>
-                          <a:latin typeface="Roboto"/>
-                        </a:defRPr>
-                      </a:pPr>
-                      <a:r>
-                        <a:rPr sz="1050">
-                          <a:solidFill>
-                            <a:srgbClr val="25342A"/>
-                          </a:solidFill>
-                          <a:latin typeface="Roboto"/>
-                        </a:rPr>
-                        <a:t>$29,656</a:t>
+                        <a:t>6</a:t>
                       </a:r>
                     </a:p>
                   </a:txBody>
@@ -11246,7 +13349,7 @@
                           </a:solidFill>
                           <a:latin typeface="Roboto"/>
                         </a:rPr>
-                        <a:t>30 Dec</a:t>
+                        <a:t>Call-out 31, September</a:t>
                       </a:r>
                     </a:p>
                   </a:txBody>
@@ -11261,19 +13364,19 @@
                     <a:bodyPr/>
                     <a:lstStyle/>
                     <a:p>
-                      <a:pPr algn="r">
-                        <a:defRPr>
-                          <a:latin typeface="Roboto"/>
-                        </a:defRPr>
-                      </a:pPr>
-                      <a:r>
-                        <a:rPr sz="1050">
-                          <a:solidFill>
-                            <a:srgbClr val="25342A"/>
-                          </a:solidFill>
-                          <a:latin typeface="Roboto"/>
-                        </a:rPr>
-                        <a:t>$57,116</a:t>
+                      <a:pPr algn="l">
+                        <a:defRPr>
+                          <a:latin typeface="Roboto"/>
+                        </a:defRPr>
+                      </a:pPr>
+                      <a:r>
+                        <a:rPr sz="1050">
+                          <a:solidFill>
+                            <a:srgbClr val="25342A"/>
+                          </a:solidFill>
+                          <a:latin typeface="Roboto"/>
+                        </a:rPr>
+                        <a:t>13 Sep</a:t>
                       </a:r>
                     </a:p>
                   </a:txBody>
@@ -11300,7 +13403,7 @@
                           </a:solidFill>
                           <a:latin typeface="Roboto"/>
                         </a:rPr>
-                        <a:t>$0</a:t>
+                        <a:t>$416</a:t>
                       </a:r>
                     </a:p>
                   </a:txBody>
@@ -11327,7 +13430,7 @@
                           </a:solidFill>
                           <a:latin typeface="Roboto"/>
                         </a:rPr>
-                        <a:t>$34,325</a:t>
+                        <a:t>4</a:t>
                       </a:r>
                     </a:p>
                   </a:txBody>
@@ -11350,11 +13453,11 @@
                       <a:r>
                         <a:rPr sz="1050">
                           <a:solidFill>
-                            <a:srgbClr val="B42318"/>
-                          </a:solidFill>
-                          <a:latin typeface="Roboto"/>
-                        </a:rPr>
-                        <a:t>($37,800)</a:t>
+                            <a:srgbClr val="25342A"/>
+                          </a:solidFill>
+                          <a:latin typeface="Roboto"/>
+                        </a:rPr>
+                        <a:t>17</a:t>
                       </a:r>
                     </a:p>
                   </a:txBody>
@@ -11364,111 +13467,140 @@
                     </a:solidFill>
                   </a:tcPr>
                 </a:tc>
-                <a:tc>
-                  <a:txBody>
-                    <a:bodyPr/>
-                    <a:lstStyle/>
-                    <a:p>
-                      <a:pPr algn="r">
-                        <a:defRPr>
-                          <a:latin typeface="Roboto"/>
-                        </a:defRPr>
-                      </a:pPr>
-                      <a:r>
-                        <a:rPr sz="1050">
-                          <a:solidFill>
-                            <a:srgbClr val="25342A"/>
-                          </a:solidFill>
-                          <a:latin typeface="Roboto"/>
-                        </a:rPr>
-                        <a:t>$0</a:t>
-                      </a:r>
-                    </a:p>
-                  </a:txBody>
-                  <a:tcPr>
-                    <a:solidFill>
-                      <a:srgbClr val="FFFFFF"/>
-                    </a:solidFill>
-                  </a:tcPr>
-                </a:tc>
-                <a:tc>
-                  <a:txBody>
-                    <a:bodyPr/>
-                    <a:lstStyle/>
-                    <a:p>
-                      <a:pPr algn="r">
-                        <a:defRPr>
-                          <a:latin typeface="Roboto"/>
-                        </a:defRPr>
-                      </a:pPr>
-                      <a:r>
-                        <a:rPr sz="1050">
-                          <a:solidFill>
-                            <a:srgbClr val="B42318"/>
-                          </a:solidFill>
-                          <a:latin typeface="Roboto"/>
-                        </a:rPr>
-                        <a:t>($5,000)</a:t>
-                      </a:r>
-                    </a:p>
-                  </a:txBody>
-                  <a:tcPr>
-                    <a:solidFill>
-                      <a:srgbClr val="FFFFFF"/>
-                    </a:solidFill>
-                  </a:tcPr>
-                </a:tc>
-                <a:tc>
-                  <a:txBody>
-                    <a:bodyPr/>
-                    <a:lstStyle/>
-                    <a:p>
-                      <a:pPr algn="r">
-                        <a:defRPr>
-                          <a:latin typeface="Roboto"/>
-                        </a:defRPr>
-                      </a:pPr>
-                      <a:r>
-                        <a:rPr sz="1050">
-                          <a:solidFill>
-                            <a:srgbClr val="25342A"/>
-                          </a:solidFill>
-                          <a:latin typeface="Roboto"/>
-                        </a:rPr>
-                        <a:t>$48,641</a:t>
-                      </a:r>
-                    </a:p>
-                  </a:txBody>
-                  <a:tcPr>
-                    <a:solidFill>
-                      <a:srgbClr val="FFFFFF"/>
-                    </a:solidFill>
-                  </a:tcPr>
-                </a:tc>
-                <a:tc>
-                  <a:txBody>
-                    <a:bodyPr/>
-                    <a:lstStyle/>
-                    <a:p>
-                      <a:pPr algn="r">
-                        <a:defRPr>
-                          <a:latin typeface="Roboto"/>
-                        </a:defRPr>
-                      </a:pPr>
-                      <a:r>
-                        <a:rPr sz="1050">
-                          <a:solidFill>
-                            <a:srgbClr val="25342A"/>
-                          </a:solidFill>
-                          <a:latin typeface="Roboto"/>
-                        </a:rPr>
-                        <a:t>$26,181</a:t>
-                      </a:r>
-                    </a:p>
-                  </a:txBody>
-                  <a:tcPr>
-                    <a:solidFill>
-                      <a:srgbClr val="FFFFFF"/>
+              </a:tr>
+              <a:tr h="310896">
+                <a:tc>
+                  <a:txBody>
+                    <a:bodyPr/>
+                    <a:lstStyle/>
+                    <a:p>
+                      <a:pPr algn="l">
+                        <a:defRPr>
+                          <a:latin typeface="Roboto"/>
+                        </a:defRPr>
+                      </a:pPr>
+                      <a:r>
+                        <a:rPr sz="1050">
+                          <a:solidFill>
+                            <a:srgbClr val="25342A"/>
+                          </a:solidFill>
+                          <a:latin typeface="Roboto"/>
+                        </a:rPr>
+                        <a:t>Call-out 61, September</a:t>
+                      </a:r>
+                    </a:p>
+                  </a:txBody>
+                  <a:tcPr>
+                    <a:solidFill>
+                      <a:srgbClr val="F7FAF7"/>
+                    </a:solidFill>
+                  </a:tcPr>
+                </a:tc>
+                <a:tc>
+                  <a:txBody>
+                    <a:bodyPr/>
+                    <a:lstStyle/>
+                    <a:p>
+                      <a:pPr algn="l">
+                        <a:defRPr>
+                          <a:latin typeface="Roboto"/>
+                        </a:defRPr>
+                      </a:pPr>
+                      <a:r>
+                        <a:rPr sz="1050">
+                          <a:solidFill>
+                            <a:srgbClr val="25342A"/>
+                          </a:solidFill>
+                          <a:latin typeface="Roboto"/>
+                        </a:rPr>
+                        <a:t>19 Sep</a:t>
+                      </a:r>
+                    </a:p>
+                  </a:txBody>
+                  <a:tcPr>
+                    <a:solidFill>
+                      <a:srgbClr val="F7FAF7"/>
+                    </a:solidFill>
+                  </a:tcPr>
+                </a:tc>
+                <a:tc>
+                  <a:txBody>
+                    <a:bodyPr/>
+                    <a:lstStyle/>
+                    <a:p>
+                      <a:pPr algn="r">
+                        <a:defRPr>
+                          <a:latin typeface="Roboto"/>
+                        </a:defRPr>
+                      </a:pPr>
+                      <a:r>
+                        <a:rPr sz="1050">
+                          <a:solidFill>
+                            <a:srgbClr val="25342A"/>
+                          </a:solidFill>
+                          <a:latin typeface="Roboto"/>
+                        </a:rPr>
+                        <a:t>$351</a:t>
+                      </a:r>
+                    </a:p>
+                  </a:txBody>
+                  <a:tcPr>
+                    <a:solidFill>
+                      <a:srgbClr val="F7FAF7"/>
+                    </a:solidFill>
+                  </a:tcPr>
+                </a:tc>
+                <a:tc>
+                  <a:txBody>
+                    <a:bodyPr/>
+                    <a:lstStyle/>
+                    <a:p>
+                      <a:pPr algn="r">
+                        <a:defRPr>
+                          <a:latin typeface="Roboto"/>
+                        </a:defRPr>
+                      </a:pPr>
+                      <a:r>
+                        <a:rPr sz="1050">
+                          <a:solidFill>
+                            <a:srgbClr val="25342A"/>
+                          </a:solidFill>
+                          <a:latin typeface="Roboto"/>
+                        </a:rPr>
+                        <a:t>4</a:t>
+                      </a:r>
+                    </a:p>
+                  </a:txBody>
+                  <a:tcPr>
+                    <a:solidFill>
+                      <a:srgbClr val="F7FAF7"/>
+                    </a:solidFill>
+                  </a:tcPr>
+                </a:tc>
+                <a:tc>
+                  <a:txBody>
+                    <a:bodyPr/>
+                    <a:lstStyle/>
+                    <a:p>
+                      <a:pPr algn="r">
+                        <a:defRPr>
+                          <a:latin typeface="Roboto"/>
+                        </a:defRPr>
+                      </a:pPr>
+                      <a:r>
+                        <a:rPr sz="1050">
+                          <a:solidFill>
+                            <a:srgbClr val="25342A"/>
+                          </a:solidFill>
+                          <a:latin typeface="Roboto"/>
+                        </a:rPr>
+                        <a:t>11</a:t>
+                      </a:r>
+                    </a:p>
+                  </a:txBody>
+                  <a:tcPr>
+                    <a:solidFill>
+                      <a:srgbClr val="F7FAF7"/>
                     </a:solidFill>
                   </a:tcPr>
                 </a:tc>
@@ -11479,7 +13611,7 @@
       </p:graphicFrame>
       <p:sp>
         <p:nvSpPr>
-          <p:cNvPr id="7" name="TextBox 6"/>
+          <p:cNvPr id="6" name="TextBox 5"/>
           <p:cNvSpPr txBox="1"/>
           <p:nvPr/>
         </p:nvSpPr>
@@ -11518,7 +13650,7 @@
       </p:sp>
       <p:sp>
         <p:nvSpPr>
-          <p:cNvPr id="8" name="TextBox 7"/>
+          <p:cNvPr id="7" name="TextBox 6"/>
           <p:cNvSpPr txBox="1"/>
           <p:nvPr/>
         </p:nvSpPr>
@@ -11550,14 +13682,14 @@
                 </a:solidFill>
                 <a:latin typeface="Roboto"/>
               </a:rPr>
-              <a:t>Data retrieved 2pm, Tue 6 Oct 2026 · Generated 8 Oct 2026, 9:35am · Sample data · Made with Python (python-pptx)</a:t>
+              <a:t>Data retrieved 2pm, Tue 6 Oct 2026 · Generated 9 Oct 2026, 8:41am · Sample data · Made with Python (python-pptx)</a:t>
             </a:r>
           </a:p>
         </p:txBody>
       </p:sp>
       <p:sp>
         <p:nvSpPr>
-          <p:cNvPr id="9" name="TextBox 8"/>
+          <p:cNvPr id="8" name="TextBox 7"/>
           <p:cNvSpPr txBox="1"/>
           <p:nvPr/>
         </p:nvSpPr>
@@ -11625,7 +13757,7 @@
         <p:spPr>
           <a:xfrm>
             <a:off x="457200" y="384048"/>
-            <a:ext cx="11277295" cy="475488"/>
+            <a:ext cx="11277295" cy="719328"/>
           </a:xfrm>
         </p:spPr>
         <p:txBody>
@@ -11638,13 +13770,13 @@
               </a:defRPr>
             </a:pPr>
             <a:r>
-              <a:rPr sz="2400" b="1">
+              <a:rPr sz="2000" b="1">
                 <a:solidFill>
                   <a:srgbClr val="25342A"/>
                 </a:solidFill>
                 <a:latin typeface="Roboto"/>
               </a:rPr>
-              <a:t>Invoices past the customer's usual payment date ($8,963)</a:t>
+              <a:t>Invoices past the customer's usual payment date ($8,734): the forecast assumes these arrive within a week (2 of 2)</a:t>
             </a:r>
           </a:p>
         </p:txBody>
@@ -11744,8 +13876,8 @@
           <p:nvPr/>
         </p:nvGraphicFramePr>
         <p:xfrm>
-          <a:off x="457200" y="960120"/>
-          <a:ext cx="11277295" cy="3419856"/>
+          <a:off x="457200" y="1203960"/>
+          <a:ext cx="11277295" cy="621792"/>
         </p:xfrm>
         <a:graphic>
           <a:graphicData uri="http://schemas.openxmlformats.org/drawingml/2006/table">
@@ -11832,7 +13964,7 @@
                           </a:solidFill>
                           <a:latin typeface="Roboto"/>
                         </a:rPr>
-                        <a:t>Amount</a:t>
+                        <a:t>Amount (incl. GST)</a:t>
                       </a:r>
                     </a:p>
                   </a:txBody>
@@ -11915,7 +14047,7 @@
                           </a:solidFill>
                           <a:latin typeface="Roboto"/>
                         </a:rPr>
-                        <a:t>Call-out 15, September</a:t>
+                        <a:t>Call-out 43, September</a:t>
                       </a:r>
                     </a:p>
                   </a:txBody>
@@ -11942,7 +14074,7 @@
                           </a:solidFill>
                           <a:latin typeface="Roboto"/>
                         </a:rPr>
-                        <a:t>15 Sep</a:t>
+                        <a:t>16 Sep</a:t>
                       </a:r>
                     </a:p>
                   </a:txBody>
@@ -11969,7 +14101,7 @@
                           </a:solidFill>
                           <a:latin typeface="Roboto"/>
                         </a:rPr>
-                        <a:t>$775</a:t>
+                        <a:t>$327</a:t>
                       </a:r>
                     </a:p>
                   </a:txBody>
@@ -11996,7 +14128,7 @@
                           </a:solidFill>
                           <a:latin typeface="Roboto"/>
                         </a:rPr>
-                        <a:t>2</a:t>
+                        <a:t>4</a:t>
                       </a:r>
                     </a:p>
                   </a:txBody>
@@ -12023,1246 +14155,13 @@
                           </a:solidFill>
                           <a:latin typeface="Roboto"/>
                         </a:rPr>
-                        <a:t>15</a:t>
+                        <a:t>14</a:t>
                       </a:r>
                     </a:p>
                   </a:txBody>
                   <a:tcPr>
                     <a:solidFill>
                       <a:srgbClr val="FFFFFF"/>
-                    </a:solidFill>
-                  </a:tcPr>
-                </a:tc>
-              </a:tr>
-              <a:tr h="310896">
-                <a:tc>
-                  <a:txBody>
-                    <a:bodyPr/>
-                    <a:lstStyle/>
-                    <a:p>
-                      <a:pPr algn="l">
-                        <a:defRPr>
-                          <a:latin typeface="Roboto"/>
-                        </a:defRPr>
-                      </a:pPr>
-                      <a:r>
-                        <a:rPr sz="1050">
-                          <a:solidFill>
-                            <a:srgbClr val="25342A"/>
-                          </a:solidFill>
-                          <a:latin typeface="Roboto"/>
-                        </a:rPr>
-                        <a:t>Call-out 9, September</a:t>
-                      </a:r>
-                    </a:p>
-                  </a:txBody>
-                  <a:tcPr>
-                    <a:solidFill>
-                      <a:srgbClr val="F7FAF7"/>
-                    </a:solidFill>
-                  </a:tcPr>
-                </a:tc>
-                <a:tc>
-                  <a:txBody>
-                    <a:bodyPr/>
-                    <a:lstStyle/>
-                    <a:p>
-                      <a:pPr algn="l">
-                        <a:defRPr>
-                          <a:latin typeface="Roboto"/>
-                        </a:defRPr>
-                      </a:pPr>
-                      <a:r>
-                        <a:rPr sz="1050">
-                          <a:solidFill>
-                            <a:srgbClr val="25342A"/>
-                          </a:solidFill>
-                          <a:latin typeface="Roboto"/>
-                        </a:rPr>
-                        <a:t>22 Sep</a:t>
-                      </a:r>
-                    </a:p>
-                  </a:txBody>
-                  <a:tcPr>
-                    <a:solidFill>
-                      <a:srgbClr val="F7FAF7"/>
-                    </a:solidFill>
-                  </a:tcPr>
-                </a:tc>
-                <a:tc>
-                  <a:txBody>
-                    <a:bodyPr/>
-                    <a:lstStyle/>
-                    <a:p>
-                      <a:pPr algn="r">
-                        <a:defRPr>
-                          <a:latin typeface="Roboto"/>
-                        </a:defRPr>
-                      </a:pPr>
-                      <a:r>
-                        <a:rPr sz="1050">
-                          <a:solidFill>
-                            <a:srgbClr val="25342A"/>
-                          </a:solidFill>
-                          <a:latin typeface="Roboto"/>
-                        </a:rPr>
-                        <a:t>$762</a:t>
-                      </a:r>
-                    </a:p>
-                  </a:txBody>
-                  <a:tcPr>
-                    <a:solidFill>
-                      <a:srgbClr val="F7FAF7"/>
-                    </a:solidFill>
-                  </a:tcPr>
-                </a:tc>
-                <a:tc>
-                  <a:txBody>
-                    <a:bodyPr/>
-                    <a:lstStyle/>
-                    <a:p>
-                      <a:pPr algn="r">
-                        <a:defRPr>
-                          <a:latin typeface="Roboto"/>
-                        </a:defRPr>
-                      </a:pPr>
-                      <a:r>
-                        <a:rPr sz="1050">
-                          <a:solidFill>
-                            <a:srgbClr val="25342A"/>
-                          </a:solidFill>
-                          <a:latin typeface="Roboto"/>
-                        </a:rPr>
-                        <a:t>2</a:t>
-                      </a:r>
-                    </a:p>
-                  </a:txBody>
-                  <a:tcPr>
-                    <a:solidFill>
-                      <a:srgbClr val="F7FAF7"/>
-                    </a:solidFill>
-                  </a:tcPr>
-                </a:tc>
-                <a:tc>
-                  <a:txBody>
-                    <a:bodyPr/>
-                    <a:lstStyle/>
-                    <a:p>
-                      <a:pPr algn="r">
-                        <a:defRPr>
-                          <a:latin typeface="Roboto"/>
-                        </a:defRPr>
-                      </a:pPr>
-                      <a:r>
-                        <a:rPr sz="1050">
-                          <a:solidFill>
-                            <a:srgbClr val="25342A"/>
-                          </a:solidFill>
-                          <a:latin typeface="Roboto"/>
-                        </a:rPr>
-                        <a:t>8</a:t>
-                      </a:r>
-                    </a:p>
-                  </a:txBody>
-                  <a:tcPr>
-                    <a:solidFill>
-                      <a:srgbClr val="F7FAF7"/>
-                    </a:solidFill>
-                  </a:tcPr>
-                </a:tc>
-              </a:tr>
-              <a:tr h="310896">
-                <a:tc>
-                  <a:txBody>
-                    <a:bodyPr/>
-                    <a:lstStyle/>
-                    <a:p>
-                      <a:pPr algn="l">
-                        <a:defRPr>
-                          <a:latin typeface="Roboto"/>
-                        </a:defRPr>
-                      </a:pPr>
-                      <a:r>
-                        <a:rPr sz="1050">
-                          <a:solidFill>
-                            <a:srgbClr val="25342A"/>
-                          </a:solidFill>
-                          <a:latin typeface="Roboto"/>
-                        </a:rPr>
-                        <a:t>Call-out 40, September</a:t>
-                      </a:r>
-                    </a:p>
-                  </a:txBody>
-                  <a:tcPr>
-                    <a:solidFill>
-                      <a:srgbClr val="FFFFFF"/>
-                    </a:solidFill>
-                  </a:tcPr>
-                </a:tc>
-                <a:tc>
-                  <a:txBody>
-                    <a:bodyPr/>
-                    <a:lstStyle/>
-                    <a:p>
-                      <a:pPr algn="l">
-                        <a:defRPr>
-                          <a:latin typeface="Roboto"/>
-                        </a:defRPr>
-                      </a:pPr>
-                      <a:r>
-                        <a:rPr sz="1050">
-                          <a:solidFill>
-                            <a:srgbClr val="25342A"/>
-                          </a:solidFill>
-                          <a:latin typeface="Roboto"/>
-                        </a:rPr>
-                        <a:t>1 Sep</a:t>
-                      </a:r>
-                    </a:p>
-                  </a:txBody>
-                  <a:tcPr>
-                    <a:solidFill>
-                      <a:srgbClr val="FFFFFF"/>
-                    </a:solidFill>
-                  </a:tcPr>
-                </a:tc>
-                <a:tc>
-                  <a:txBody>
-                    <a:bodyPr/>
-                    <a:lstStyle/>
-                    <a:p>
-                      <a:pPr algn="r">
-                        <a:defRPr>
-                          <a:latin typeface="Roboto"/>
-                        </a:defRPr>
-                      </a:pPr>
-                      <a:r>
-                        <a:rPr sz="1050">
-                          <a:solidFill>
-                            <a:srgbClr val="25342A"/>
-                          </a:solidFill>
-                          <a:latin typeface="Roboto"/>
-                        </a:rPr>
-                        <a:t>$623</a:t>
-                      </a:r>
-                    </a:p>
-                  </a:txBody>
-                  <a:tcPr>
-                    <a:solidFill>
-                      <a:srgbClr val="FFFFFF"/>
-                    </a:solidFill>
-                  </a:tcPr>
-                </a:tc>
-                <a:tc>
-                  <a:txBody>
-                    <a:bodyPr/>
-                    <a:lstStyle/>
-                    <a:p>
-                      <a:pPr algn="r">
-                        <a:defRPr>
-                          <a:latin typeface="Roboto"/>
-                        </a:defRPr>
-                      </a:pPr>
-                      <a:r>
-                        <a:rPr sz="1050">
-                          <a:solidFill>
-                            <a:srgbClr val="25342A"/>
-                          </a:solidFill>
-                          <a:latin typeface="Roboto"/>
-                        </a:rPr>
-                        <a:t>2</a:t>
-                      </a:r>
-                    </a:p>
-                  </a:txBody>
-                  <a:tcPr>
-                    <a:solidFill>
-                      <a:srgbClr val="FFFFFF"/>
-                    </a:solidFill>
-                  </a:tcPr>
-                </a:tc>
-                <a:tc>
-                  <a:txBody>
-                    <a:bodyPr/>
-                    <a:lstStyle/>
-                    <a:p>
-                      <a:pPr algn="r">
-                        <a:defRPr>
-                          <a:latin typeface="Roboto"/>
-                        </a:defRPr>
-                      </a:pPr>
-                      <a:r>
-                        <a:rPr sz="1050">
-                          <a:solidFill>
-                            <a:srgbClr val="25342A"/>
-                          </a:solidFill>
-                          <a:latin typeface="Roboto"/>
-                        </a:rPr>
-                        <a:t>29</a:t>
-                      </a:r>
-                    </a:p>
-                  </a:txBody>
-                  <a:tcPr>
-                    <a:solidFill>
-                      <a:srgbClr val="FFFFFF"/>
-                    </a:solidFill>
-                  </a:tcPr>
-                </a:tc>
-              </a:tr>
-              <a:tr h="310896">
-                <a:tc>
-                  <a:txBody>
-                    <a:bodyPr/>
-                    <a:lstStyle/>
-                    <a:p>
-                      <a:pPr algn="l">
-                        <a:defRPr>
-                          <a:latin typeface="Roboto"/>
-                        </a:defRPr>
-                      </a:pPr>
-                      <a:r>
-                        <a:rPr sz="1050">
-                          <a:solidFill>
-                            <a:srgbClr val="25342A"/>
-                          </a:solidFill>
-                          <a:latin typeface="Roboto"/>
-                        </a:rPr>
-                        <a:t>Call-out 29, September</a:t>
-                      </a:r>
-                    </a:p>
-                  </a:txBody>
-                  <a:tcPr>
-                    <a:solidFill>
-                      <a:srgbClr val="F7FAF7"/>
-                    </a:solidFill>
-                  </a:tcPr>
-                </a:tc>
-                <a:tc>
-                  <a:txBody>
-                    <a:bodyPr/>
-                    <a:lstStyle/>
-                    <a:p>
-                      <a:pPr algn="l">
-                        <a:defRPr>
-                          <a:latin typeface="Roboto"/>
-                        </a:defRPr>
-                      </a:pPr>
-                      <a:r>
-                        <a:rPr sz="1050">
-                          <a:solidFill>
-                            <a:srgbClr val="25342A"/>
-                          </a:solidFill>
-                          <a:latin typeface="Roboto"/>
-                        </a:rPr>
-                        <a:t>28 Sep</a:t>
-                      </a:r>
-                    </a:p>
-                  </a:txBody>
-                  <a:tcPr>
-                    <a:solidFill>
-                      <a:srgbClr val="F7FAF7"/>
-                    </a:solidFill>
-                  </a:tcPr>
-                </a:tc>
-                <a:tc>
-                  <a:txBody>
-                    <a:bodyPr/>
-                    <a:lstStyle/>
-                    <a:p>
-                      <a:pPr algn="r">
-                        <a:defRPr>
-                          <a:latin typeface="Roboto"/>
-                        </a:defRPr>
-                      </a:pPr>
-                      <a:r>
-                        <a:rPr sz="1050">
-                          <a:solidFill>
-                            <a:srgbClr val="25342A"/>
-                          </a:solidFill>
-                          <a:latin typeface="Roboto"/>
-                        </a:rPr>
-                        <a:t>$606</a:t>
-                      </a:r>
-                    </a:p>
-                  </a:txBody>
-                  <a:tcPr>
-                    <a:solidFill>
-                      <a:srgbClr val="F7FAF7"/>
-                    </a:solidFill>
-                  </a:tcPr>
-                </a:tc>
-                <a:tc>
-                  <a:txBody>
-                    <a:bodyPr/>
-                    <a:lstStyle/>
-                    <a:p>
-                      <a:pPr algn="r">
-                        <a:defRPr>
-                          <a:latin typeface="Roboto"/>
-                        </a:defRPr>
-                      </a:pPr>
-                      <a:r>
-                        <a:rPr sz="1050">
-                          <a:solidFill>
-                            <a:srgbClr val="25342A"/>
-                          </a:solidFill>
-                          <a:latin typeface="Roboto"/>
-                        </a:rPr>
-                        <a:t>2</a:t>
-                      </a:r>
-                    </a:p>
-                  </a:txBody>
-                  <a:tcPr>
-                    <a:solidFill>
-                      <a:srgbClr val="F7FAF7"/>
-                    </a:solidFill>
-                  </a:tcPr>
-                </a:tc>
-                <a:tc>
-                  <a:txBody>
-                    <a:bodyPr/>
-                    <a:lstStyle/>
-                    <a:p>
-                      <a:pPr algn="r">
-                        <a:defRPr>
-                          <a:latin typeface="Roboto"/>
-                        </a:defRPr>
-                      </a:pPr>
-                      <a:r>
-                        <a:rPr sz="1050">
-                          <a:solidFill>
-                            <a:srgbClr val="25342A"/>
-                          </a:solidFill>
-                          <a:latin typeface="Roboto"/>
-                        </a:rPr>
-                        <a:t>2</a:t>
-                      </a:r>
-                    </a:p>
-                  </a:txBody>
-                  <a:tcPr>
-                    <a:solidFill>
-                      <a:srgbClr val="F7FAF7"/>
-                    </a:solidFill>
-                  </a:tcPr>
-                </a:tc>
-              </a:tr>
-              <a:tr h="310896">
-                <a:tc>
-                  <a:txBody>
-                    <a:bodyPr/>
-                    <a:lstStyle/>
-                    <a:p>
-                      <a:pPr algn="l">
-                        <a:defRPr>
-                          <a:latin typeface="Roboto"/>
-                        </a:defRPr>
-                      </a:pPr>
-                      <a:r>
-                        <a:rPr sz="1050">
-                          <a:solidFill>
-                            <a:srgbClr val="25342A"/>
-                          </a:solidFill>
-                          <a:latin typeface="Roboto"/>
-                        </a:rPr>
-                        <a:t>Call-out 32, September</a:t>
-                      </a:r>
-                    </a:p>
-                  </a:txBody>
-                  <a:tcPr>
-                    <a:solidFill>
-                      <a:srgbClr val="FFFFFF"/>
-                    </a:solidFill>
-                  </a:tcPr>
-                </a:tc>
-                <a:tc>
-                  <a:txBody>
-                    <a:bodyPr/>
-                    <a:lstStyle/>
-                    <a:p>
-                      <a:pPr algn="l">
-                        <a:defRPr>
-                          <a:latin typeface="Roboto"/>
-                        </a:defRPr>
-                      </a:pPr>
-                      <a:r>
-                        <a:rPr sz="1050">
-                          <a:solidFill>
-                            <a:srgbClr val="25342A"/>
-                          </a:solidFill>
-                          <a:latin typeface="Roboto"/>
-                        </a:rPr>
-                        <a:t>21 Sep</a:t>
-                      </a:r>
-                    </a:p>
-                  </a:txBody>
-                  <a:tcPr>
-                    <a:solidFill>
-                      <a:srgbClr val="FFFFFF"/>
-                    </a:solidFill>
-                  </a:tcPr>
-                </a:tc>
-                <a:tc>
-                  <a:txBody>
-                    <a:bodyPr/>
-                    <a:lstStyle/>
-                    <a:p>
-                      <a:pPr algn="r">
-                        <a:defRPr>
-                          <a:latin typeface="Roboto"/>
-                        </a:defRPr>
-                      </a:pPr>
-                      <a:r>
-                        <a:rPr sz="1050">
-                          <a:solidFill>
-                            <a:srgbClr val="25342A"/>
-                          </a:solidFill>
-                          <a:latin typeface="Roboto"/>
-                        </a:rPr>
-                        <a:t>$597</a:t>
-                      </a:r>
-                    </a:p>
-                  </a:txBody>
-                  <a:tcPr>
-                    <a:solidFill>
-                      <a:srgbClr val="FFFFFF"/>
-                    </a:solidFill>
-                  </a:tcPr>
-                </a:tc>
-                <a:tc>
-                  <a:txBody>
-                    <a:bodyPr/>
-                    <a:lstStyle/>
-                    <a:p>
-                      <a:pPr algn="r">
-                        <a:defRPr>
-                          <a:latin typeface="Roboto"/>
-                        </a:defRPr>
-                      </a:pPr>
-                      <a:r>
-                        <a:rPr sz="1050">
-                          <a:solidFill>
-                            <a:srgbClr val="25342A"/>
-                          </a:solidFill>
-                          <a:latin typeface="Roboto"/>
-                        </a:rPr>
-                        <a:t>2</a:t>
-                      </a:r>
-                    </a:p>
-                  </a:txBody>
-                  <a:tcPr>
-                    <a:solidFill>
-                      <a:srgbClr val="FFFFFF"/>
-                    </a:solidFill>
-                  </a:tcPr>
-                </a:tc>
-                <a:tc>
-                  <a:txBody>
-                    <a:bodyPr/>
-                    <a:lstStyle/>
-                    <a:p>
-                      <a:pPr algn="r">
-                        <a:defRPr>
-                          <a:latin typeface="Roboto"/>
-                        </a:defRPr>
-                      </a:pPr>
-                      <a:r>
-                        <a:rPr sz="1050">
-                          <a:solidFill>
-                            <a:srgbClr val="25342A"/>
-                          </a:solidFill>
-                          <a:latin typeface="Roboto"/>
-                        </a:rPr>
-                        <a:t>9</a:t>
-                      </a:r>
-                    </a:p>
-                  </a:txBody>
-                  <a:tcPr>
-                    <a:solidFill>
-                      <a:srgbClr val="FFFFFF"/>
-                    </a:solidFill>
-                  </a:tcPr>
-                </a:tc>
-              </a:tr>
-              <a:tr h="310896">
-                <a:tc>
-                  <a:txBody>
-                    <a:bodyPr/>
-                    <a:lstStyle/>
-                    <a:p>
-                      <a:pPr algn="l">
-                        <a:defRPr>
-                          <a:latin typeface="Roboto"/>
-                        </a:defRPr>
-                      </a:pPr>
-                      <a:r>
-                        <a:rPr sz="1050">
-                          <a:solidFill>
-                            <a:srgbClr val="25342A"/>
-                          </a:solidFill>
-                          <a:latin typeface="Roboto"/>
-                        </a:rPr>
-                        <a:t>Call-out 28, September</a:t>
-                      </a:r>
-                    </a:p>
-                  </a:txBody>
-                  <a:tcPr>
-                    <a:solidFill>
-                      <a:srgbClr val="F7FAF7"/>
-                    </a:solidFill>
-                  </a:tcPr>
-                </a:tc>
-                <a:tc>
-                  <a:txBody>
-                    <a:bodyPr/>
-                    <a:lstStyle/>
-                    <a:p>
-                      <a:pPr algn="l">
-                        <a:defRPr>
-                          <a:latin typeface="Roboto"/>
-                        </a:defRPr>
-                      </a:pPr>
-                      <a:r>
-                        <a:rPr sz="1050">
-                          <a:solidFill>
-                            <a:srgbClr val="25342A"/>
-                          </a:solidFill>
-                          <a:latin typeface="Roboto"/>
-                        </a:rPr>
-                        <a:t>25 Sep</a:t>
-                      </a:r>
-                    </a:p>
-                  </a:txBody>
-                  <a:tcPr>
-                    <a:solidFill>
-                      <a:srgbClr val="F7FAF7"/>
-                    </a:solidFill>
-                  </a:tcPr>
-                </a:tc>
-                <a:tc>
-                  <a:txBody>
-                    <a:bodyPr/>
-                    <a:lstStyle/>
-                    <a:p>
-                      <a:pPr algn="r">
-                        <a:defRPr>
-                          <a:latin typeface="Roboto"/>
-                        </a:defRPr>
-                      </a:pPr>
-                      <a:r>
-                        <a:rPr sz="1050">
-                          <a:solidFill>
-                            <a:srgbClr val="25342A"/>
-                          </a:solidFill>
-                          <a:latin typeface="Roboto"/>
-                        </a:rPr>
-                        <a:t>$563</a:t>
-                      </a:r>
-                    </a:p>
-                  </a:txBody>
-                  <a:tcPr>
-                    <a:solidFill>
-                      <a:srgbClr val="F7FAF7"/>
-                    </a:solidFill>
-                  </a:tcPr>
-                </a:tc>
-                <a:tc>
-                  <a:txBody>
-                    <a:bodyPr/>
-                    <a:lstStyle/>
-                    <a:p>
-                      <a:pPr algn="r">
-                        <a:defRPr>
-                          <a:latin typeface="Roboto"/>
-                        </a:defRPr>
-                      </a:pPr>
-                      <a:r>
-                        <a:rPr sz="1050">
-                          <a:solidFill>
-                            <a:srgbClr val="25342A"/>
-                          </a:solidFill>
-                          <a:latin typeface="Roboto"/>
-                        </a:rPr>
-                        <a:t>2</a:t>
-                      </a:r>
-                    </a:p>
-                  </a:txBody>
-                  <a:tcPr>
-                    <a:solidFill>
-                      <a:srgbClr val="F7FAF7"/>
-                    </a:solidFill>
-                  </a:tcPr>
-                </a:tc>
-                <a:tc>
-                  <a:txBody>
-                    <a:bodyPr/>
-                    <a:lstStyle/>
-                    <a:p>
-                      <a:pPr algn="r">
-                        <a:defRPr>
-                          <a:latin typeface="Roboto"/>
-                        </a:defRPr>
-                      </a:pPr>
-                      <a:r>
-                        <a:rPr sz="1050">
-                          <a:solidFill>
-                            <a:srgbClr val="25342A"/>
-                          </a:solidFill>
-                          <a:latin typeface="Roboto"/>
-                        </a:rPr>
-                        <a:t>5</a:t>
-                      </a:r>
-                    </a:p>
-                  </a:txBody>
-                  <a:tcPr>
-                    <a:solidFill>
-                      <a:srgbClr val="F7FAF7"/>
-                    </a:solidFill>
-                  </a:tcPr>
-                </a:tc>
-              </a:tr>
-              <a:tr h="310896">
-                <a:tc>
-                  <a:txBody>
-                    <a:bodyPr/>
-                    <a:lstStyle/>
-                    <a:p>
-                      <a:pPr algn="l">
-                        <a:defRPr>
-                          <a:latin typeface="Roboto"/>
-                        </a:defRPr>
-                      </a:pPr>
-                      <a:r>
-                        <a:rPr sz="1050">
-                          <a:solidFill>
-                            <a:srgbClr val="25342A"/>
-                          </a:solidFill>
-                          <a:latin typeface="Roboto"/>
-                        </a:rPr>
-                        <a:t>Call-out 49, September</a:t>
-                      </a:r>
-                    </a:p>
-                  </a:txBody>
-                  <a:tcPr>
-                    <a:solidFill>
-                      <a:srgbClr val="FFFFFF"/>
-                    </a:solidFill>
-                  </a:tcPr>
-                </a:tc>
-                <a:tc>
-                  <a:txBody>
-                    <a:bodyPr/>
-                    <a:lstStyle/>
-                    <a:p>
-                      <a:pPr algn="l">
-                        <a:defRPr>
-                          <a:latin typeface="Roboto"/>
-                        </a:defRPr>
-                      </a:pPr>
-                      <a:r>
-                        <a:rPr sz="1050">
-                          <a:solidFill>
-                            <a:srgbClr val="25342A"/>
-                          </a:solidFill>
-                          <a:latin typeface="Roboto"/>
-                        </a:rPr>
-                        <a:t>27 Sep</a:t>
-                      </a:r>
-                    </a:p>
-                  </a:txBody>
-                  <a:tcPr>
-                    <a:solidFill>
-                      <a:srgbClr val="FFFFFF"/>
-                    </a:solidFill>
-                  </a:tcPr>
-                </a:tc>
-                <a:tc>
-                  <a:txBody>
-                    <a:bodyPr/>
-                    <a:lstStyle/>
-                    <a:p>
-                      <a:pPr algn="r">
-                        <a:defRPr>
-                          <a:latin typeface="Roboto"/>
-                        </a:defRPr>
-                      </a:pPr>
-                      <a:r>
-                        <a:rPr sz="1050">
-                          <a:solidFill>
-                            <a:srgbClr val="25342A"/>
-                          </a:solidFill>
-                          <a:latin typeface="Roboto"/>
-                        </a:rPr>
-                        <a:t>$550</a:t>
-                      </a:r>
-                    </a:p>
-                  </a:txBody>
-                  <a:tcPr>
-                    <a:solidFill>
-                      <a:srgbClr val="FFFFFF"/>
-                    </a:solidFill>
-                  </a:tcPr>
-                </a:tc>
-                <a:tc>
-                  <a:txBody>
-                    <a:bodyPr/>
-                    <a:lstStyle/>
-                    <a:p>
-                      <a:pPr algn="r">
-                        <a:defRPr>
-                          <a:latin typeface="Roboto"/>
-                        </a:defRPr>
-                      </a:pPr>
-                      <a:r>
-                        <a:rPr sz="1050">
-                          <a:solidFill>
-                            <a:srgbClr val="25342A"/>
-                          </a:solidFill>
-                          <a:latin typeface="Roboto"/>
-                        </a:rPr>
-                        <a:t>2</a:t>
-                      </a:r>
-                    </a:p>
-                  </a:txBody>
-                  <a:tcPr>
-                    <a:solidFill>
-                      <a:srgbClr val="FFFFFF"/>
-                    </a:solidFill>
-                  </a:tcPr>
-                </a:tc>
-                <a:tc>
-                  <a:txBody>
-                    <a:bodyPr/>
-                    <a:lstStyle/>
-                    <a:p>
-                      <a:pPr algn="r">
-                        <a:defRPr>
-                          <a:latin typeface="Roboto"/>
-                        </a:defRPr>
-                      </a:pPr>
-                      <a:r>
-                        <a:rPr sz="1050">
-                          <a:solidFill>
-                            <a:srgbClr val="25342A"/>
-                          </a:solidFill>
-                          <a:latin typeface="Roboto"/>
-                        </a:rPr>
-                        <a:t>3</a:t>
-                      </a:r>
-                    </a:p>
-                  </a:txBody>
-                  <a:tcPr>
-                    <a:solidFill>
-                      <a:srgbClr val="FFFFFF"/>
-                    </a:solidFill>
-                  </a:tcPr>
-                </a:tc>
-              </a:tr>
-              <a:tr h="310896">
-                <a:tc>
-                  <a:txBody>
-                    <a:bodyPr/>
-                    <a:lstStyle/>
-                    <a:p>
-                      <a:pPr algn="l">
-                        <a:defRPr>
-                          <a:latin typeface="Roboto"/>
-                        </a:defRPr>
-                      </a:pPr>
-                      <a:r>
-                        <a:rPr sz="1050">
-                          <a:solidFill>
-                            <a:srgbClr val="25342A"/>
-                          </a:solidFill>
-                          <a:latin typeface="Roboto"/>
-                        </a:rPr>
-                        <a:t>Call-out 63, September</a:t>
-                      </a:r>
-                    </a:p>
-                  </a:txBody>
-                  <a:tcPr>
-                    <a:solidFill>
-                      <a:srgbClr val="F7FAF7"/>
-                    </a:solidFill>
-                  </a:tcPr>
-                </a:tc>
-                <a:tc>
-                  <a:txBody>
-                    <a:bodyPr/>
-                    <a:lstStyle/>
-                    <a:p>
-                      <a:pPr algn="l">
-                        <a:defRPr>
-                          <a:latin typeface="Roboto"/>
-                        </a:defRPr>
-                      </a:pPr>
-                      <a:r>
-                        <a:rPr sz="1050">
-                          <a:solidFill>
-                            <a:srgbClr val="25342A"/>
-                          </a:solidFill>
-                          <a:latin typeface="Roboto"/>
-                        </a:rPr>
-                        <a:t>15 Sep</a:t>
-                      </a:r>
-                    </a:p>
-                  </a:txBody>
-                  <a:tcPr>
-                    <a:solidFill>
-                      <a:srgbClr val="F7FAF7"/>
-                    </a:solidFill>
-                  </a:tcPr>
-                </a:tc>
-                <a:tc>
-                  <a:txBody>
-                    <a:bodyPr/>
-                    <a:lstStyle/>
-                    <a:p>
-                      <a:pPr algn="r">
-                        <a:defRPr>
-                          <a:latin typeface="Roboto"/>
-                        </a:defRPr>
-                      </a:pPr>
-                      <a:r>
-                        <a:rPr sz="1050">
-                          <a:solidFill>
-                            <a:srgbClr val="25342A"/>
-                          </a:solidFill>
-                          <a:latin typeface="Roboto"/>
-                        </a:rPr>
-                        <a:t>$532</a:t>
-                      </a:r>
-                    </a:p>
-                  </a:txBody>
-                  <a:tcPr>
-                    <a:solidFill>
-                      <a:srgbClr val="F7FAF7"/>
-                    </a:solidFill>
-                  </a:tcPr>
-                </a:tc>
-                <a:tc>
-                  <a:txBody>
-                    <a:bodyPr/>
-                    <a:lstStyle/>
-                    <a:p>
-                      <a:pPr algn="r">
-                        <a:defRPr>
-                          <a:latin typeface="Roboto"/>
-                        </a:defRPr>
-                      </a:pPr>
-                      <a:r>
-                        <a:rPr sz="1050">
-                          <a:solidFill>
-                            <a:srgbClr val="25342A"/>
-                          </a:solidFill>
-                          <a:latin typeface="Roboto"/>
-                        </a:rPr>
-                        <a:t>2</a:t>
-                      </a:r>
-                    </a:p>
-                  </a:txBody>
-                  <a:tcPr>
-                    <a:solidFill>
-                      <a:srgbClr val="F7FAF7"/>
-                    </a:solidFill>
-                  </a:tcPr>
-                </a:tc>
-                <a:tc>
-                  <a:txBody>
-                    <a:bodyPr/>
-                    <a:lstStyle/>
-                    <a:p>
-                      <a:pPr algn="r">
-                        <a:defRPr>
-                          <a:latin typeface="Roboto"/>
-                        </a:defRPr>
-                      </a:pPr>
-                      <a:r>
-                        <a:rPr sz="1050">
-                          <a:solidFill>
-                            <a:srgbClr val="25342A"/>
-                          </a:solidFill>
-                          <a:latin typeface="Roboto"/>
-                        </a:rPr>
-                        <a:t>15</a:t>
-                      </a:r>
-                    </a:p>
-                  </a:txBody>
-                  <a:tcPr>
-                    <a:solidFill>
-                      <a:srgbClr val="F7FAF7"/>
-                    </a:solidFill>
-                  </a:tcPr>
-                </a:tc>
-              </a:tr>
-              <a:tr h="310896">
-                <a:tc>
-                  <a:txBody>
-                    <a:bodyPr/>
-                    <a:lstStyle/>
-                    <a:p>
-                      <a:pPr algn="l">
-                        <a:defRPr>
-                          <a:latin typeface="Roboto"/>
-                        </a:defRPr>
-                      </a:pPr>
-                      <a:r>
-                        <a:rPr sz="1050">
-                          <a:solidFill>
-                            <a:srgbClr val="25342A"/>
-                          </a:solidFill>
-                          <a:latin typeface="Roboto"/>
-                        </a:rPr>
-                        <a:t>Call-out 11, September</a:t>
-                      </a:r>
-                    </a:p>
-                  </a:txBody>
-                  <a:tcPr>
-                    <a:solidFill>
-                      <a:srgbClr val="FFFFFF"/>
-                    </a:solidFill>
-                  </a:tcPr>
-                </a:tc>
-                <a:tc>
-                  <a:txBody>
-                    <a:bodyPr/>
-                    <a:lstStyle/>
-                    <a:p>
-                      <a:pPr algn="l">
-                        <a:defRPr>
-                          <a:latin typeface="Roboto"/>
-                        </a:defRPr>
-                      </a:pPr>
-                      <a:r>
-                        <a:rPr sz="1050">
-                          <a:solidFill>
-                            <a:srgbClr val="25342A"/>
-                          </a:solidFill>
-                          <a:latin typeface="Roboto"/>
-                        </a:rPr>
-                        <a:t>24 Sep</a:t>
-                      </a:r>
-                    </a:p>
-                  </a:txBody>
-                  <a:tcPr>
-                    <a:solidFill>
-                      <a:srgbClr val="FFFFFF"/>
-                    </a:solidFill>
-                  </a:tcPr>
-                </a:tc>
-                <a:tc>
-                  <a:txBody>
-                    <a:bodyPr/>
-                    <a:lstStyle/>
-                    <a:p>
-                      <a:pPr algn="r">
-                        <a:defRPr>
-                          <a:latin typeface="Roboto"/>
-                        </a:defRPr>
-                      </a:pPr>
-                      <a:r>
-                        <a:rPr sz="1050">
-                          <a:solidFill>
-                            <a:srgbClr val="25342A"/>
-                          </a:solidFill>
-                          <a:latin typeface="Roboto"/>
-                        </a:rPr>
-                        <a:t>$526</a:t>
-                      </a:r>
-                    </a:p>
-                  </a:txBody>
-                  <a:tcPr>
-                    <a:solidFill>
-                      <a:srgbClr val="FFFFFF"/>
-                    </a:solidFill>
-                  </a:tcPr>
-                </a:tc>
-                <a:tc>
-                  <a:txBody>
-                    <a:bodyPr/>
-                    <a:lstStyle/>
-                    <a:p>
-                      <a:pPr algn="r">
-                        <a:defRPr>
-                          <a:latin typeface="Roboto"/>
-                        </a:defRPr>
-                      </a:pPr>
-                      <a:r>
-                        <a:rPr sz="1050">
-                          <a:solidFill>
-                            <a:srgbClr val="25342A"/>
-                          </a:solidFill>
-                          <a:latin typeface="Roboto"/>
-                        </a:rPr>
-                        <a:t>2</a:t>
-                      </a:r>
-                    </a:p>
-                  </a:txBody>
-                  <a:tcPr>
-                    <a:solidFill>
-                      <a:srgbClr val="FFFFFF"/>
-                    </a:solidFill>
-                  </a:tcPr>
-                </a:tc>
-                <a:tc>
-                  <a:txBody>
-                    <a:bodyPr/>
-                    <a:lstStyle/>
-                    <a:p>
-                      <a:pPr algn="r">
-                        <a:defRPr>
-                          <a:latin typeface="Roboto"/>
-                        </a:defRPr>
-                      </a:pPr>
-                      <a:r>
-                        <a:rPr sz="1050">
-                          <a:solidFill>
-                            <a:srgbClr val="25342A"/>
-                          </a:solidFill>
-                          <a:latin typeface="Roboto"/>
-                        </a:rPr>
-                        <a:t>6</a:t>
-                      </a:r>
-                    </a:p>
-                  </a:txBody>
-                  <a:tcPr>
-                    <a:solidFill>
-                      <a:srgbClr val="FFFFFF"/>
-                    </a:solidFill>
-                  </a:tcPr>
-                </a:tc>
-              </a:tr>
-              <a:tr h="310896">
-                <a:tc>
-                  <a:txBody>
-                    <a:bodyPr/>
-                    <a:lstStyle/>
-                    <a:p>
-                      <a:pPr algn="l">
-                        <a:defRPr>
-                          <a:latin typeface="Roboto"/>
-                        </a:defRPr>
-                      </a:pPr>
-                      <a:r>
-                        <a:rPr sz="1050">
-                          <a:solidFill>
-                            <a:srgbClr val="25342A"/>
-                          </a:solidFill>
-                          <a:latin typeface="Roboto"/>
-                        </a:rPr>
-                        <a:t>Call-out 50, September</a:t>
-                      </a:r>
-                    </a:p>
-                  </a:txBody>
-                  <a:tcPr>
-                    <a:solidFill>
-                      <a:srgbClr val="F7FAF7"/>
-                    </a:solidFill>
-                  </a:tcPr>
-                </a:tc>
-                <a:tc>
-                  <a:txBody>
-                    <a:bodyPr/>
-                    <a:lstStyle/>
-                    <a:p>
-                      <a:pPr algn="l">
-                        <a:defRPr>
-                          <a:latin typeface="Roboto"/>
-                        </a:defRPr>
-                      </a:pPr>
-                      <a:r>
-                        <a:rPr sz="1050">
-                          <a:solidFill>
-                            <a:srgbClr val="25342A"/>
-                          </a:solidFill>
-                          <a:latin typeface="Roboto"/>
-                        </a:rPr>
-                        <a:t>28 Sep</a:t>
-                      </a:r>
-                    </a:p>
-                  </a:txBody>
-                  <a:tcPr>
-                    <a:solidFill>
-                      <a:srgbClr val="F7FAF7"/>
-                    </a:solidFill>
-                  </a:tcPr>
-                </a:tc>
-                <a:tc>
-                  <a:txBody>
-                    <a:bodyPr/>
-                    <a:lstStyle/>
-                    <a:p>
-                      <a:pPr algn="r">
-                        <a:defRPr>
-                          <a:latin typeface="Roboto"/>
-                        </a:defRPr>
-                      </a:pPr>
-                      <a:r>
-                        <a:rPr sz="1050">
-                          <a:solidFill>
-                            <a:srgbClr val="25342A"/>
-                          </a:solidFill>
-                          <a:latin typeface="Roboto"/>
-                        </a:rPr>
-                        <a:t>$517</a:t>
-                      </a:r>
-                    </a:p>
-                  </a:txBody>
-                  <a:tcPr>
-                    <a:solidFill>
-                      <a:srgbClr val="F7FAF7"/>
-                    </a:solidFill>
-                  </a:tcPr>
-                </a:tc>
-                <a:tc>
-                  <a:txBody>
-                    <a:bodyPr/>
-                    <a:lstStyle/>
-                    <a:p>
-                      <a:pPr algn="r">
-                        <a:defRPr>
-                          <a:latin typeface="Roboto"/>
-                        </a:defRPr>
-                      </a:pPr>
-                      <a:r>
-                        <a:rPr sz="1050">
-                          <a:solidFill>
-                            <a:srgbClr val="25342A"/>
-                          </a:solidFill>
-                          <a:latin typeface="Roboto"/>
-                        </a:rPr>
-                        <a:t>2</a:t>
-                      </a:r>
-                    </a:p>
-                  </a:txBody>
-                  <a:tcPr>
-                    <a:solidFill>
-                      <a:srgbClr val="F7FAF7"/>
-                    </a:solidFill>
-                  </a:tcPr>
-                </a:tc>
-                <a:tc>
-                  <a:txBody>
-                    <a:bodyPr/>
-                    <a:lstStyle/>
-                    <a:p>
-                      <a:pPr algn="r">
-                        <a:defRPr>
-                          <a:latin typeface="Roboto"/>
-                        </a:defRPr>
-                      </a:pPr>
-                      <a:r>
-                        <a:rPr sz="1050">
-                          <a:solidFill>
-                            <a:srgbClr val="25342A"/>
-                          </a:solidFill>
-                          <a:latin typeface="Roboto"/>
-                        </a:rPr>
-                        <a:t>2</a:t>
-                      </a:r>
-                    </a:p>
-                  </a:txBody>
-                  <a:tcPr>
-                    <a:solidFill>
-                      <a:srgbClr val="F7FAF7"/>
                     </a:solidFill>
                   </a:tcPr>
                 </a:tc>
@@ -13344,7 +14243,7 @@
                 </a:solidFill>
                 <a:latin typeface="Roboto"/>
               </a:rPr>
-              <a:t>Data retrieved 2pm, Tue 6 Oct 2026 · Generated 8 Oct 2026, 9:35am · Sample data · Made with Python (python-pptx)</a:t>
+              <a:t>Data retrieved 2pm, Tue 6 Oct 2026 · Generated 9 Oct 2026, 8:41am · Sample data · Made with Python (python-pptx)</a:t>
             </a:r>
           </a:p>
         </p:txBody>

--- a/media/exports/reports/2026-09/cash-payroll.pptx
+++ b/media/exports/reports/2026-09/cash-payroll.pptx
@@ -5578,7 +5578,7 @@
                 </a:solidFill>
                 <a:latin typeface="Roboto"/>
               </a:rPr>
-              <a:t>Data retrieved 2pm, Tue 6 Oct 2026 · Generated 9 Oct 2026, 8:41am · Sample data · Made with Python (python-pptx)</a:t>
+              <a:t>Data retrieved 2pm, Tue 6 Oct 2026 · Generated 9 Oct 2026, 1:20pm · Sample data · Made with Python (python-pptx)</a:t>
             </a:r>
           </a:p>
         </p:txBody>
@@ -6886,7 +6886,7 @@
                 </a:solidFill>
                 <a:latin typeface="Roboto"/>
               </a:rPr>
-              <a:t>Data retrieved 2pm, Tue 6 Oct 2026 · Generated 9 Oct 2026, 8:41am · Sample data · Made with Python (python-pptx)</a:t>
+              <a:t>Data retrieved 2pm, Tue 6 Oct 2026 · Generated 9 Oct 2026, 1:20pm · Sample data · Made with Python (python-pptx)</a:t>
             </a:r>
           </a:p>
         </p:txBody>
@@ -7201,7 +7201,7 @@
                 </a:solidFill>
                 <a:latin typeface="Roboto"/>
               </a:rPr>
-              <a:t>Data retrieved 2pm, Tue 6 Oct 2026 · Generated 9 Oct 2026, 8:41am · Sample data · Made with Python (python-pptx)</a:t>
+              <a:t>Data retrieved 2pm, Tue 6 Oct 2026 · Generated 9 Oct 2026, 1:20pm · Sample data · Made with Python (python-pptx)</a:t>
             </a:r>
           </a:p>
         </p:txBody>
@@ -11340,7 +11340,7 @@
                 </a:solidFill>
                 <a:latin typeface="Roboto"/>
               </a:rPr>
-              <a:t>Data retrieved 2pm, Tue 6 Oct 2026 · Generated 9 Oct 2026, 8:41am · Sample data · Made with Python (python-pptx)</a:t>
+              <a:t>Data retrieved 2pm, Tue 6 Oct 2026 · Generated 9 Oct 2026, 1:20pm · Sample data · Made with Python (python-pptx)</a:t>
             </a:r>
           </a:p>
         </p:txBody>
@@ -11705,7 +11705,7 @@
                           </a:solidFill>
                           <a:latin typeface="Roboto"/>
                         </a:rPr>
-                        <a:t>Call-out 15, September</a:t>
+                        <a:t>Call-out CO-49240</a:t>
                       </a:r>
                     </a:p>
                   </a:txBody>
@@ -11842,7 +11842,7 @@
                           </a:solidFill>
                           <a:latin typeface="Roboto"/>
                         </a:rPr>
-                        <a:t>Call-out 9, September</a:t>
+                        <a:t>Call-out CO-49233</a:t>
                       </a:r>
                     </a:p>
                   </a:txBody>
@@ -11979,7 +11979,7 @@
                           </a:solidFill>
                           <a:latin typeface="Roboto"/>
                         </a:rPr>
-                        <a:t>Call-out 40, September</a:t>
+                        <a:t>Call-out CO-49269</a:t>
                       </a:r>
                     </a:p>
                   </a:txBody>
@@ -12116,7 +12116,7 @@
                           </a:solidFill>
                           <a:latin typeface="Roboto"/>
                         </a:rPr>
-                        <a:t>Call-out 32, September</a:t>
+                        <a:t>Call-out CO-49260</a:t>
                       </a:r>
                     </a:p>
                   </a:txBody>
@@ -12253,7 +12253,7 @@
                           </a:solidFill>
                           <a:latin typeface="Roboto"/>
                         </a:rPr>
-                        <a:t>Call-out 28, September</a:t>
+                        <a:t>Call-out CO-49255</a:t>
                       </a:r>
                     </a:p>
                   </a:txBody>
@@ -12390,7 +12390,7 @@
                           </a:solidFill>
                           <a:latin typeface="Roboto"/>
                         </a:rPr>
-                        <a:t>Call-out 11, September</a:t>
+                        <a:t>Call-out CO-49235</a:t>
                       </a:r>
                     </a:p>
                   </a:txBody>
@@ -12527,7 +12527,7 @@
                           </a:solidFill>
                           <a:latin typeface="Roboto"/>
                         </a:rPr>
-                        <a:t>Call-out 63, September</a:t>
+                        <a:t>Call-out CO-49296</a:t>
                       </a:r>
                     </a:p>
                   </a:txBody>
@@ -12664,7 +12664,7 @@
                           </a:solidFill>
                           <a:latin typeface="Roboto"/>
                         </a:rPr>
-                        <a:t>Call-out 21, September</a:t>
+                        <a:t>Call-out CO-49247</a:t>
                       </a:r>
                     </a:p>
                   </a:txBody>
@@ -12801,7 +12801,7 @@
                           </a:solidFill>
                           <a:latin typeface="Roboto"/>
                         </a:rPr>
-                        <a:t>Call-out 22, September</a:t>
+                        <a:t>Call-out CO-49248</a:t>
                       </a:r>
                     </a:p>
                   </a:txBody>
@@ -12938,7 +12938,7 @@
                           </a:solidFill>
                           <a:latin typeface="Roboto"/>
                         </a:rPr>
-                        <a:t>Call-out 38, September</a:t>
+                        <a:t>Call-out CO-49267</a:t>
                       </a:r>
                     </a:p>
                   </a:txBody>
@@ -13075,7 +13075,7 @@
                           </a:solidFill>
                           <a:latin typeface="Roboto"/>
                         </a:rPr>
-                        <a:t>Call-out 26, September</a:t>
+                        <a:t>Call-out CO-49253</a:t>
                       </a:r>
                     </a:p>
                   </a:txBody>
@@ -13212,7 +13212,7 @@
                           </a:solidFill>
                           <a:latin typeface="Roboto"/>
                         </a:rPr>
-                        <a:t>Call-out 20, September</a:t>
+                        <a:t>Call-out CO-49246</a:t>
                       </a:r>
                     </a:p>
                   </a:txBody>
@@ -13349,7 +13349,7 @@
                           </a:solidFill>
                           <a:latin typeface="Roboto"/>
                         </a:rPr>
-                        <a:t>Call-out 31, September</a:t>
+                        <a:t>Call-out CO-49259</a:t>
                       </a:r>
                     </a:p>
                   </a:txBody>
@@ -13486,7 +13486,7 @@
                           </a:solidFill>
                           <a:latin typeface="Roboto"/>
                         </a:rPr>
-                        <a:t>Call-out 61, September</a:t>
+                        <a:t>Call-out CO-49294</a:t>
                       </a:r>
                     </a:p>
                   </a:txBody>
@@ -13682,7 +13682,7 @@
                 </a:solidFill>
                 <a:latin typeface="Roboto"/>
               </a:rPr>
-              <a:t>Data retrieved 2pm, Tue 6 Oct 2026 · Generated 9 Oct 2026, 8:41am · Sample data · Made with Python (python-pptx)</a:t>
+              <a:t>Data retrieved 2pm, Tue 6 Oct 2026 · Generated 9 Oct 2026, 1:20pm · Sample data · Made with Python (python-pptx)</a:t>
             </a:r>
           </a:p>
         </p:txBody>
@@ -14047,7 +14047,7 @@
                           </a:solidFill>
                           <a:latin typeface="Roboto"/>
                         </a:rPr>
-                        <a:t>Call-out 43, September</a:t>
+                        <a:t>Call-out CO-49273</a:t>
                       </a:r>
                     </a:p>
                   </a:txBody>
@@ -14243,7 +14243,7 @@
                 </a:solidFill>
                 <a:latin typeface="Roboto"/>
               </a:rPr>
-              <a:t>Data retrieved 2pm, Tue 6 Oct 2026 · Generated 9 Oct 2026, 8:41am · Sample data · Made with Python (python-pptx)</a:t>
+              <a:t>Data retrieved 2pm, Tue 6 Oct 2026 · Generated 9 Oct 2026, 1:20pm · Sample data · Made with Python (python-pptx)</a:t>
             </a:r>
           </a:p>
         </p:txBody>

--- a/media/exports/reports/2026-09/cash-payroll.pptx
+++ b/media/exports/reports/2026-09/cash-payroll.pptx
@@ -1813,7 +1813,7 @@
           <a:lstStyle/>
           <a:p>
             <a:r>
-              <a:t>Will cash cover payroll next month?. Sample Electrical &amp; Air Pty Ltd. Period: September 2026. A 13-week cash forecast from 30 September: cash at bank, plus what customers owe on their usual payment dates and new work at its recent rate, less pay runs, supplier bills, the BAS and finance on their due dates. Every day opens its workings.</a:t>
+              <a:t>Will cash cover payroll next month?. Sample Electrical &amp; Air Pty Ltd. Period: September 2026. In short: Yes: $69,267 forecast in the bank after the 29 October pay run, the tightest in October, and at least one pay run in reserve for all 13 weeks. A 13-week cash forecast from 30 September: cash at bank, plus what customers owe on their usual payment dates and new work at its recent rate, less pay runs, supplier bills, the BAS and finance on their due dates. Every day opens its workings.</a:t>
             </a:r>
           </a:p>
         </p:txBody>
@@ -5388,7 +5388,7 @@
         <p:spPr>
           <a:xfrm>
             <a:off x="457200" y="3703320"/>
-            <a:ext cx="11277295" cy="758190"/>
+            <a:ext cx="11277295" cy="980440"/>
           </a:xfrm>
           <a:prstGeom prst="rect">
             <a:avLst/>
@@ -5413,7 +5413,7 @@
                 </a:solidFill>
                 <a:latin typeface="Roboto"/>
               </a:rPr>
-              <a:t>Period: September 2026. A 13-week cash forecast from 30 September: cash at bank, plus what customers owe on their usual payment dates and new work at its recent rate, less pay runs, supplier bills, the BAS and finance on their due dates. Every day opens its workings.</a:t>
+              <a:t>Period: September 2026. In short: Yes: $69,267 forecast in the bank after the 29 October pay run, the tightest in October, and at least one pay run in reserve for all 13 weeks. A 13-week cash forecast from 30 September: cash at bank, plus what customers owe on their usual payment dates and new work at its recent rate, less pay runs, supplier bills, the BAS and finance on their due dates. Every day opens its workings.</a:t>
             </a:r>
           </a:p>
         </p:txBody>
@@ -5426,7 +5426,7 @@
         </p:nvSpPr>
         <p:spPr>
           <a:xfrm>
-            <a:off x="457200" y="4552950"/>
+            <a:off x="457200" y="4775200"/>
             <a:ext cx="11277295" cy="1097280"/>
           </a:xfrm>
           <a:prstGeom prst="rect">
@@ -5578,7 +5578,7 @@
                 </a:solidFill>
                 <a:latin typeface="Roboto"/>
               </a:rPr>
-              <a:t>Data retrieved 2pm, Tue 6 Oct 2026 · Generated 9 Oct 2026, 1:20pm · Sample data · Made with Python (python-pptx)</a:t>
+              <a:t>Data retrieved 2pm, Tue 6 Oct 2026 · Generated 10 Oct 2026, 9:55pm · Sample data · Made with Python (python-pptx)</a:t>
             </a:r>
           </a:p>
         </p:txBody>
@@ -6886,7 +6886,7 @@
                 </a:solidFill>
                 <a:latin typeface="Roboto"/>
               </a:rPr>
-              <a:t>Data retrieved 2pm, Tue 6 Oct 2026 · Generated 9 Oct 2026, 1:20pm · Sample data · Made with Python (python-pptx)</a:t>
+              <a:t>Data retrieved 2pm, Tue 6 Oct 2026 · Generated 10 Oct 2026, 9:55pm · Sample data · Made with Python (python-pptx)</a:t>
             </a:r>
           </a:p>
         </p:txBody>
@@ -7201,7 +7201,7 @@
                 </a:solidFill>
                 <a:latin typeface="Roboto"/>
               </a:rPr>
-              <a:t>Data retrieved 2pm, Tue 6 Oct 2026 · Generated 9 Oct 2026, 1:20pm · Sample data · Made with Python (python-pptx)</a:t>
+              <a:t>Data retrieved 2pm, Tue 6 Oct 2026 · Generated 10 Oct 2026, 9:55pm · Sample data · Made with Python (python-pptx)</a:t>
             </a:r>
           </a:p>
         </p:txBody>
@@ -11340,7 +11340,7 @@
                 </a:solidFill>
                 <a:latin typeface="Roboto"/>
               </a:rPr>
-              <a:t>Data retrieved 2pm, Tue 6 Oct 2026 · Generated 9 Oct 2026, 1:20pm · Sample data · Made with Python (python-pptx)</a:t>
+              <a:t>Data retrieved 2pm, Tue 6 Oct 2026 · Generated 10 Oct 2026, 9:55pm · Sample data · Made with Python (python-pptx)</a:t>
             </a:r>
           </a:p>
         </p:txBody>
@@ -13682,7 +13682,7 @@
                 </a:solidFill>
                 <a:latin typeface="Roboto"/>
               </a:rPr>
-              <a:t>Data retrieved 2pm, Tue 6 Oct 2026 · Generated 9 Oct 2026, 1:20pm · Sample data · Made with Python (python-pptx)</a:t>
+              <a:t>Data retrieved 2pm, Tue 6 Oct 2026 · Generated 10 Oct 2026, 9:55pm · Sample data · Made with Python (python-pptx)</a:t>
             </a:r>
           </a:p>
         </p:txBody>
@@ -14243,7 +14243,7 @@
                 </a:solidFill>
                 <a:latin typeface="Roboto"/>
               </a:rPr>
-              <a:t>Data retrieved 2pm, Tue 6 Oct 2026 · Generated 9 Oct 2026, 1:20pm · Sample data · Made with Python (python-pptx)</a:t>
+              <a:t>Data retrieved 2pm, Tue 6 Oct 2026 · Generated 10 Oct 2026, 9:55pm · Sample data · Made with Python (python-pptx)</a:t>
             </a:r>
           </a:p>
         </p:txBody>
